--- a/李岩松/论文汇报.pptx
+++ b/李岩松/论文汇报.pptx
@@ -6,7 +6,23 @@
   </p:sldMasterIdLst>
   <p:sldIdLst>
     <p:sldId id="256" r:id="rId3"/>
-    <p:sldId id="257" r:id="rId4"/>
+    <p:sldId id="263" r:id="rId4"/>
+    <p:sldId id="257" r:id="rId5"/>
+    <p:sldId id="258" r:id="rId6"/>
+    <p:sldId id="259" r:id="rId7"/>
+    <p:sldId id="260" r:id="rId8"/>
+    <p:sldId id="261" r:id="rId9"/>
+    <p:sldId id="262" r:id="rId10"/>
+    <p:sldId id="265" r:id="rId11"/>
+    <p:sldId id="266" r:id="rId12"/>
+    <p:sldId id="264" r:id="rId13"/>
+    <p:sldId id="267" r:id="rId14"/>
+    <p:sldId id="268" r:id="rId15"/>
+    <p:sldId id="269" r:id="rId16"/>
+    <p:sldId id="270" r:id="rId17"/>
+    <p:sldId id="271" r:id="rId18"/>
+    <p:sldId id="272" r:id="rId19"/>
+    <p:sldId id="273" r:id="rId20"/>
   </p:sldIdLst>
   <p:sldSz cx="12192000" cy="6858000"/>
   <p:notesSz cx="6858000" cy="9144000"/>
@@ -108,12 +124,12 @@
   <p:extLst>
     <p:ext uri="{EFAFB233-063F-42B5-8137-9DF3F51BA10A}">
       <p15:sldGuideLst xmlns:p15="http://schemas.microsoft.com/office/powerpoint/2012/main">
-        <p15:guide id="1" orient="horz" pos="2195" userDrawn="1">
+        <p15:guide id="1" orient="horz" pos="2450" userDrawn="1">
           <p15:clr>
             <a:srgbClr val="A4A3A4"/>
           </p15:clr>
         </p15:guide>
-        <p15:guide id="2" pos="3838" userDrawn="1">
+        <p15:guide id="2" pos="3858" userDrawn="1">
           <p15:clr>
             <a:srgbClr val="A4A3A4"/>
           </p15:clr>
@@ -3124,7 +3140,7 @@
           <a:p>
             <a:r>
               <a:rPr lang="en-US" altLang="zh-CN"/>
-              <a:t>2026.10.7</a:t>
+              <a:t>2026.10.9</a:t>
             </a:r>
             <a:endParaRPr lang="en-US" altLang="zh-CN"/>
           </a:p>
@@ -3141,7 +3157,2246 @@
 </p:sld>
 </file>
 
+<file path=ppt/slides/slide10.xml><?xml version="1.0" encoding="utf-8"?>
+<p:sld xmlns:a="http://schemas.openxmlformats.org/drawingml/2006/main" xmlns:r="http://schemas.openxmlformats.org/officeDocument/2006/relationships" xmlns:p="http://schemas.openxmlformats.org/presentationml/2006/main">
+  <p:cSld>
+    <p:spTree>
+      <p:nvGrpSpPr>
+        <p:cNvPr id="1" name=""/>
+        <p:cNvGrpSpPr/>
+        <p:nvPr/>
+      </p:nvGrpSpPr>
+      <p:grpSpPr/>
+      <p:sp>
+        <p:nvSpPr>
+          <p:cNvPr id="2" name="文本框 1"/>
+          <p:cNvSpPr txBox="1"/>
+          <p:nvPr/>
+        </p:nvSpPr>
+        <p:spPr>
+          <a:xfrm>
+            <a:off x="759460" y="1840865"/>
+            <a:ext cx="2790190" cy="398780"/>
+          </a:xfrm>
+          <a:prstGeom prst="rect">
+            <a:avLst/>
+          </a:prstGeom>
+          <a:noFill/>
+        </p:spPr>
+        <p:txBody>
+          <a:bodyPr wrap="square" rtlCol="0">
+            <a:spAutoFit/>
+          </a:bodyPr>
+          <a:p>
+            <a:r>
+              <a:rPr lang="zh-CN" altLang="en-US" sz="2000"/>
+              <a:t>该算法当然存在局限：</a:t>
+            </a:r>
+            <a:endParaRPr lang="zh-CN" altLang="en-US" sz="2000"/>
+          </a:p>
+        </p:txBody>
+      </p:sp>
+      <p:sp>
+        <p:nvSpPr>
+          <p:cNvPr id="3" name="文本框 2"/>
+          <p:cNvSpPr txBox="1"/>
+          <p:nvPr/>
+        </p:nvSpPr>
+        <p:spPr>
+          <a:xfrm>
+            <a:off x="3549650" y="2512060"/>
+            <a:ext cx="5093335" cy="1014730"/>
+          </a:xfrm>
+          <a:prstGeom prst="rect">
+            <a:avLst/>
+          </a:prstGeom>
+          <a:noFill/>
+        </p:spPr>
+        <p:txBody>
+          <a:bodyPr wrap="square" rtlCol="0">
+            <a:spAutoFit/>
+          </a:bodyPr>
+          <a:p>
+            <a:r>
+              <a:rPr lang="en-US" altLang="zh-CN" sz="2000"/>
+              <a:t>1.</a:t>
+            </a:r>
+            <a:r>
+              <a:rPr lang="zh-CN" altLang="en-US" sz="2000"/>
+              <a:t>真实目标函数必须满足</a:t>
+            </a:r>
+            <a:r>
+              <a:rPr lang="en-US" altLang="zh-CN" sz="2000"/>
+              <a:t> PL </a:t>
+            </a:r>
+            <a:r>
+              <a:rPr lang="zh-CN" altLang="en-US" sz="2000"/>
+              <a:t>条件。</a:t>
+            </a:r>
+            <a:endParaRPr lang="zh-CN" altLang="en-US" sz="2000"/>
+          </a:p>
+          <a:p>
+            <a:r>
+              <a:rPr lang="en-US" altLang="zh-CN" sz="2000"/>
+              <a:t>2.</a:t>
+            </a:r>
+            <a:r>
+              <a:rPr lang="zh-CN" altLang="en-US" sz="2000"/>
+              <a:t>残差梯度必须是</a:t>
+            </a:r>
+            <a:r>
+              <a:rPr lang="en-US" altLang="zh-CN" sz="2000"/>
+              <a:t>                      </a:t>
+            </a:r>
+            <a:r>
+              <a:rPr lang="zh-CN" altLang="en-US" sz="2000"/>
+              <a:t>连续的。</a:t>
+            </a:r>
+            <a:endParaRPr lang="zh-CN" altLang="en-US" sz="2000"/>
+          </a:p>
+          <a:p>
+            <a:r>
+              <a:rPr lang="en-US" altLang="zh-CN" sz="2000"/>
+              <a:t>3.</a:t>
+            </a:r>
+            <a:r>
+              <a:rPr lang="zh-CN" altLang="en-US" sz="2000"/>
+              <a:t>模型梯度必须有闭式表达式。</a:t>
+            </a:r>
+            <a:endParaRPr lang="zh-CN" altLang="en-US" sz="2000"/>
+          </a:p>
+        </p:txBody>
+      </p:sp>
+      <mc:AlternateContent xmlns:mc="http://schemas.openxmlformats.org/markup-compatibility/2006">
+        <mc:Choice xmlns:a14="http://schemas.microsoft.com/office/drawing/2010/main" Requires="a14">
+          <p:sp>
+            <p:nvSpPr>
+              <p:cNvPr id="4" name="文本框 3"/>
+              <p:cNvSpPr txBox="1"/>
+              <p:nvPr/>
+            </p:nvSpPr>
+            <p:spPr>
+              <a:xfrm>
+                <a:off x="5625401" y="2835529"/>
+                <a:ext cx="1621155" cy="368300"/>
+              </a:xfrm>
+              <a:prstGeom prst="rect">
+                <a:avLst/>
+              </a:prstGeom>
+              <a:noFill/>
+            </p:spPr>
+            <p:txBody>
+              <a:bodyPr wrap="none" rtlCol="0" anchor="t">
+                <a:spAutoFit/>
+              </a:bodyPr>
+              <a:p>
+                <a:pPr algn="l"/>
+                <a14:m>
+                  <m:oMathPara xmlns:m="http://schemas.openxmlformats.org/officeDocument/2006/math">
+                    <m:oMathParaPr>
+                      <m:jc m:val="centerGroup"/>
+                    </m:oMathParaPr>
+                    <m:oMath xmlns:m="http://schemas.openxmlformats.org/officeDocument/2006/math">
+                      <m:sSub>
+                        <m:sSubPr>
+                          <m:ctrlPr>
+                            <a:rPr lang="en-US" altLang="zh-CN" i="1">
+                              <a:latin typeface="Cambria Math" panose="02040503050406030204" charset="0"/>
+                              <a:cs typeface="Cambria Math" panose="02040503050406030204" charset="0"/>
+                            </a:rPr>
+                          </m:ctrlPr>
+                        </m:sSubPr>
+                        <m:e>
+                          <m:r>
+                            <a:rPr lang="en-US" altLang="zh-CN" i="1">
+                              <a:latin typeface="Cambria Math" panose="02040503050406030204" charset="0"/>
+                              <a:cs typeface="Cambria Math" panose="02040503050406030204" charset="0"/>
+                            </a:rPr>
+                            <m:t>𝐿</m:t>
+                          </m:r>
+                        </m:e>
+                        <m:sub>
+                          <m:r>
+                            <a:rPr lang="en-US" altLang="zh-CN" i="1">
+                              <a:latin typeface="Cambria Math" panose="02040503050406030204" charset="0"/>
+                              <a:cs typeface="Cambria Math" panose="02040503050406030204" charset="0"/>
+                            </a:rPr>
+                            <m:t>𝑟</m:t>
+                          </m:r>
+                        </m:sub>
+                      </m:sSub>
+                      <m:r>
+                        <a:rPr lang="en-US" altLang="zh-CN" i="1">
+                          <a:latin typeface="Cambria Math" panose="02040503050406030204" charset="0"/>
+                          <a:cs typeface="Cambria Math" panose="02040503050406030204" charset="0"/>
+                        </a:rPr>
+                        <m:t>−</m:t>
+                      </m:r>
+                      <m:r>
+                        <a:rPr lang="en-US" altLang="zh-CN" i="1">
+                          <a:latin typeface="Cambria Math" panose="02040503050406030204" charset="0"/>
+                          <a:cs typeface="Cambria Math" panose="02040503050406030204" charset="0"/>
+                        </a:rPr>
+                        <m:t>𝐿𝑖𝑝𝑠𝑐ℎ𝑖𝑡𝑧</m:t>
+                      </m:r>
+                    </m:oMath>
+                  </m:oMathPara>
+                </a14:m>
+                <a:endParaRPr lang="en-US" altLang="zh-CN" i="1">
+                  <a:latin typeface="Cambria Math" panose="02040503050406030204" charset="0"/>
+                  <a:cs typeface="Cambria Math" panose="02040503050406030204" charset="0"/>
+                </a:endParaRPr>
+              </a:p>
+            </p:txBody>
+          </p:sp>
+        </mc:Choice>
+        <mc:Fallback>
+          <p:sp>
+            <p:nvSpPr>
+              <p:cNvPr id="4" name="文本框 3"/>
+              <p:cNvSpPr txBox="1">
+                <a:spLocks noRot="1" noChangeAspect="1" noMove="1" noResize="1" noEditPoints="1" noAdjustHandles="1" noChangeArrowheads="1" noChangeShapeType="1" noTextEdit="1"/>
+              </p:cNvSpPr>
+              <p:nvPr/>
+            </p:nvSpPr>
+            <p:spPr>
+              <a:xfrm>
+                <a:off x="5625401" y="2835529"/>
+                <a:ext cx="1621155" cy="368300"/>
+              </a:xfrm>
+              <a:prstGeom prst="rect">
+                <a:avLst/>
+              </a:prstGeom>
+              <a:blipFill rotWithShape="1">
+                <a:blip r:embed="rId1"/>
+                <a:stretch>
+                  <a:fillRect l="-35" t="-69" r="35" b="69"/>
+                </a:stretch>
+              </a:blipFill>
+            </p:spPr>
+            <p:txBody>
+              <a:bodyPr/>
+              <a:lstStyle/>
+              <a:p>
+                <a:r>
+                  <a:rPr lang="zh-CN" altLang="en-US">
+                    <a:noFill/>
+                  </a:rPr>
+                  <a:t> </a:t>
+                </a:r>
+              </a:p>
+            </p:txBody>
+          </p:sp>
+        </mc:Fallback>
+      </mc:AlternateContent>
+    </p:spTree>
+    <p:custDataLst>
+      <p:tags r:id="rId2"/>
+    </p:custDataLst>
+  </p:cSld>
+  <p:clrMapOvr>
+    <a:masterClrMapping/>
+  </p:clrMapOvr>
+</p:sld>
+</file>
+
+<file path=ppt/slides/slide11.xml><?xml version="1.0" encoding="utf-8"?>
+<p:sld xmlns:a="http://schemas.openxmlformats.org/drawingml/2006/main" xmlns:r="http://schemas.openxmlformats.org/officeDocument/2006/relationships" xmlns:p="http://schemas.openxmlformats.org/presentationml/2006/main">
+  <p:cSld>
+    <p:spTree>
+      <p:nvGrpSpPr>
+        <p:cNvPr id="1" name=""/>
+        <p:cNvGrpSpPr/>
+        <p:nvPr/>
+      </p:nvGrpSpPr>
+      <p:grpSpPr/>
+      <p:sp>
+        <p:nvSpPr>
+          <p:cNvPr id="4" name="文本框 3"/>
+          <p:cNvSpPr txBox="1"/>
+          <p:nvPr/>
+        </p:nvSpPr>
+        <p:spPr>
+          <a:xfrm>
+            <a:off x="4682490" y="2235835"/>
+            <a:ext cx="3353435" cy="829945"/>
+          </a:xfrm>
+          <a:prstGeom prst="rect">
+            <a:avLst/>
+          </a:prstGeom>
+          <a:noFill/>
+        </p:spPr>
+        <p:txBody>
+          <a:bodyPr wrap="square" rtlCol="0">
+            <a:spAutoFit/>
+          </a:bodyPr>
+          <a:p>
+            <a:r>
+              <a:rPr lang="zh-CN" altLang="en-US" sz="4800">
+                <a:solidFill>
+                  <a:schemeClr val="bg2"/>
+                </a:solidFill>
+              </a:rPr>
+              <a:t>论文内容</a:t>
+            </a:r>
+            <a:endParaRPr lang="zh-CN" altLang="en-US" sz="4800">
+              <a:solidFill>
+                <a:schemeClr val="bg2"/>
+              </a:solidFill>
+            </a:endParaRPr>
+          </a:p>
+        </p:txBody>
+      </p:sp>
+      <p:sp>
+        <p:nvSpPr>
+          <p:cNvPr id="5" name="文本框 4"/>
+          <p:cNvSpPr txBox="1"/>
+          <p:nvPr/>
+        </p:nvSpPr>
+        <p:spPr>
+          <a:xfrm>
+            <a:off x="4682490" y="3117215"/>
+            <a:ext cx="3353435" cy="829945"/>
+          </a:xfrm>
+          <a:prstGeom prst="rect">
+            <a:avLst/>
+          </a:prstGeom>
+          <a:noFill/>
+        </p:spPr>
+        <p:txBody>
+          <a:bodyPr wrap="square" rtlCol="0">
+            <a:spAutoFit/>
+          </a:bodyPr>
+          <a:p>
+            <a:r>
+              <a:rPr lang="zh-CN" altLang="en-US" sz="4800">
+                <a:solidFill>
+                  <a:schemeClr val="tx1"/>
+                </a:solidFill>
+              </a:rPr>
+              <a:t>代码复现</a:t>
+            </a:r>
+            <a:endParaRPr lang="zh-CN" altLang="en-US" sz="4800">
+              <a:solidFill>
+                <a:schemeClr val="tx1"/>
+              </a:solidFill>
+            </a:endParaRPr>
+          </a:p>
+        </p:txBody>
+      </p:sp>
+      <p:sp>
+        <p:nvSpPr>
+          <p:cNvPr id="6" name="文本框 5"/>
+          <p:cNvSpPr txBox="1"/>
+          <p:nvPr/>
+        </p:nvSpPr>
+        <p:spPr>
+          <a:xfrm>
+            <a:off x="2037080" y="2137410"/>
+            <a:ext cx="990600" cy="1753235"/>
+          </a:xfrm>
+          <a:prstGeom prst="rect">
+            <a:avLst/>
+          </a:prstGeom>
+          <a:noFill/>
+        </p:spPr>
+        <p:txBody>
+          <a:bodyPr wrap="square" rtlCol="0">
+            <a:spAutoFit/>
+          </a:bodyPr>
+          <a:p>
+            <a:r>
+              <a:rPr lang="zh-CN" altLang="en-US" sz="5400">
+                <a:ln w="15875"/>
+                <a:gradFill>
+                  <a:gsLst>
+                    <a:gs pos="0">
+                      <a:schemeClr val="accent1">
+                        <a:lumOff val="-19997"/>
+                        <a:satOff val="20000"/>
+                      </a:schemeClr>
+                    </a:gs>
+                    <a:gs pos="100000">
+                      <a:schemeClr val="accent1">
+                        <a:lumOff val="15000"/>
+                        <a:satOff val="-14997"/>
+                      </a:schemeClr>
+                    </a:gs>
+                  </a:gsLst>
+                  <a:lin ang="0" scaled="0"/>
+                </a:gradFill>
+                <a:effectLst/>
+              </a:rPr>
+              <a:t>目录</a:t>
+            </a:r>
+            <a:endParaRPr lang="zh-CN" altLang="en-US" sz="5400">
+              <a:ln w="15875"/>
+              <a:gradFill>
+                <a:gsLst>
+                  <a:gs pos="0">
+                    <a:schemeClr val="accent1">
+                      <a:lumOff val="-19997"/>
+                      <a:satOff val="20000"/>
+                    </a:schemeClr>
+                  </a:gs>
+                  <a:gs pos="100000">
+                    <a:schemeClr val="accent1">
+                      <a:lumOff val="15000"/>
+                      <a:satOff val="-14997"/>
+                    </a:schemeClr>
+                  </a:gs>
+                </a:gsLst>
+                <a:lin ang="0" scaled="0"/>
+              </a:gradFill>
+              <a:effectLst/>
+            </a:endParaRPr>
+          </a:p>
+        </p:txBody>
+      </p:sp>
+    </p:spTree>
+    <p:custDataLst>
+      <p:tags r:id="rId1"/>
+    </p:custDataLst>
+  </p:cSld>
+  <p:clrMapOvr>
+    <a:masterClrMapping/>
+  </p:clrMapOvr>
+</p:sld>
+</file>
+
+<file path=ppt/slides/slide12.xml><?xml version="1.0" encoding="utf-8"?>
+<p:sld xmlns:a="http://schemas.openxmlformats.org/drawingml/2006/main" xmlns:r="http://schemas.openxmlformats.org/officeDocument/2006/relationships" xmlns:p="http://schemas.openxmlformats.org/presentationml/2006/main">
+  <p:cSld>
+    <p:spTree>
+      <p:nvGrpSpPr>
+        <p:cNvPr id="1" name=""/>
+        <p:cNvGrpSpPr/>
+        <p:nvPr/>
+      </p:nvGrpSpPr>
+      <p:grpSpPr/>
+      <p:sp>
+        <p:nvSpPr>
+          <p:cNvPr id="4" name="文本框 3"/>
+          <p:cNvSpPr txBox="1"/>
+          <p:nvPr/>
+        </p:nvSpPr>
+        <p:spPr>
+          <a:xfrm>
+            <a:off x="1139825" y="1858645"/>
+            <a:ext cx="9890760" cy="706755"/>
+          </a:xfrm>
+          <a:prstGeom prst="rect">
+            <a:avLst/>
+          </a:prstGeom>
+          <a:noFill/>
+        </p:spPr>
+        <p:txBody>
+          <a:bodyPr wrap="square" rtlCol="0">
+            <a:spAutoFit/>
+          </a:bodyPr>
+          <a:p>
+            <a:r>
+              <a:rPr lang="zh-CN" altLang="en-US" sz="2000"/>
+              <a:t>代码复现了</a:t>
+            </a:r>
+            <a:r>
+              <a:rPr lang="en-US" altLang="zh-CN" sz="2000"/>
+              <a:t> GC </a:t>
+            </a:r>
+            <a:r>
+              <a:rPr lang="zh-CN" altLang="en-US" sz="2000"/>
+              <a:t>算法和纯模型自由算法在解决凸二次函数最小值问题上的表现。</a:t>
+            </a:r>
+            <a:endParaRPr lang="zh-CN" altLang="en-US" sz="2000"/>
+          </a:p>
+          <a:p>
+            <a:r>
+              <a:rPr lang="zh-CN" altLang="en-US" sz="2000"/>
+              <a:t>我们需要复现以下内容：</a:t>
+            </a:r>
+            <a:endParaRPr lang="zh-CN" altLang="en-US" sz="2000"/>
+          </a:p>
+        </p:txBody>
+      </p:sp>
+      <p:sp>
+        <p:nvSpPr>
+          <p:cNvPr id="6" name="文本框 5"/>
+          <p:cNvSpPr txBox="1"/>
+          <p:nvPr/>
+        </p:nvSpPr>
+        <p:spPr>
+          <a:xfrm>
+            <a:off x="2144395" y="3204210"/>
+            <a:ext cx="7882255" cy="1014730"/>
+          </a:xfrm>
+          <a:prstGeom prst="rect">
+            <a:avLst/>
+          </a:prstGeom>
+          <a:noFill/>
+        </p:spPr>
+        <p:txBody>
+          <a:bodyPr wrap="square" rtlCol="0">
+            <a:spAutoFit/>
+          </a:bodyPr>
+          <a:p>
+            <a:r>
+              <a:rPr lang="en-US" altLang="zh-CN" sz="2000"/>
+              <a:t>1.</a:t>
+            </a:r>
+            <a:r>
+              <a:rPr lang="zh-CN" altLang="en-US" sz="2000"/>
+              <a:t>构造凸二次目标函数。</a:t>
+            </a:r>
+            <a:endParaRPr lang="zh-CN" altLang="en-US" sz="2000"/>
+          </a:p>
+          <a:p>
+            <a:r>
+              <a:rPr lang="en-US" altLang="zh-CN" sz="2000"/>
+              <a:t>2.</a:t>
+            </a:r>
+            <a:r>
+              <a:rPr lang="zh-CN" altLang="en-US" sz="2000"/>
+              <a:t>实现</a:t>
+            </a:r>
+            <a:r>
+              <a:rPr lang="en-US" altLang="zh-CN" sz="2000"/>
+              <a:t> GC </a:t>
+            </a:r>
+            <a:r>
+              <a:rPr lang="zh-CN" altLang="en-US" sz="2000"/>
+              <a:t>算法和纯模型自由算法。</a:t>
+            </a:r>
+            <a:endParaRPr lang="zh-CN" altLang="en-US" sz="2000"/>
+          </a:p>
+          <a:p>
+            <a:r>
+              <a:rPr lang="en-US" altLang="zh-CN" sz="2000"/>
+              <a:t>3.</a:t>
+            </a:r>
+            <a:r>
+              <a:rPr lang="zh-CN" altLang="en-US" sz="2000"/>
+              <a:t>比较状态精度达到</a:t>
+            </a:r>
+            <a:r>
+              <a:rPr lang="en-US" altLang="zh-CN" sz="2000"/>
+              <a:t> 0.001 </a:t>
+            </a:r>
+            <a:r>
+              <a:rPr lang="zh-CN" altLang="en-US" sz="2000"/>
+              <a:t>时所需的函数评估次数。</a:t>
+            </a:r>
+            <a:endParaRPr lang="zh-CN" altLang="en-US" sz="2000"/>
+          </a:p>
+        </p:txBody>
+      </p:sp>
+    </p:spTree>
+    <p:custDataLst>
+      <p:tags r:id="rId1"/>
+    </p:custDataLst>
+  </p:cSld>
+  <p:clrMapOvr>
+    <a:masterClrMapping/>
+  </p:clrMapOvr>
+</p:sld>
+</file>
+
+<file path=ppt/slides/slide13.xml><?xml version="1.0" encoding="utf-8"?>
+<p:sld xmlns:a="http://schemas.openxmlformats.org/drawingml/2006/main" xmlns:r="http://schemas.openxmlformats.org/officeDocument/2006/relationships" xmlns:p="http://schemas.openxmlformats.org/presentationml/2006/main">
+  <p:cSld>
+    <p:spTree>
+      <p:nvGrpSpPr>
+        <p:cNvPr id="1" name=""/>
+        <p:cNvGrpSpPr/>
+        <p:nvPr/>
+      </p:nvGrpSpPr>
+      <p:grpSpPr/>
+      <p:sp>
+        <p:nvSpPr>
+          <p:cNvPr id="2" name="文本框 1"/>
+          <p:cNvSpPr txBox="1"/>
+          <p:nvPr/>
+        </p:nvSpPr>
+        <p:spPr>
+          <a:xfrm>
+            <a:off x="686435" y="394970"/>
+            <a:ext cx="2798445" cy="398780"/>
+          </a:xfrm>
+          <a:prstGeom prst="rect">
+            <a:avLst/>
+          </a:prstGeom>
+          <a:noFill/>
+        </p:spPr>
+        <p:txBody>
+          <a:bodyPr wrap="square" rtlCol="0">
+            <a:spAutoFit/>
+          </a:bodyPr>
+          <a:p>
+            <a:r>
+              <a:rPr lang="en-US" altLang="zh-CN" sz="2000">
+                <a:sym typeface="+mn-ea"/>
+              </a:rPr>
+              <a:t>1.</a:t>
+            </a:r>
+            <a:r>
+              <a:rPr lang="zh-CN" altLang="en-US" sz="2000">
+                <a:sym typeface="+mn-ea"/>
+              </a:rPr>
+              <a:t>构造凸二次目标函数：</a:t>
+            </a:r>
+            <a:endParaRPr lang="zh-CN" altLang="en-US" sz="2000"/>
+          </a:p>
+        </p:txBody>
+      </p:sp>
+      <p:pic>
+        <p:nvPicPr>
+          <p:cNvPr id="4" name="图片 3"/>
+          <p:cNvPicPr>
+            <a:picLocks noChangeAspect="1"/>
+          </p:cNvPicPr>
+          <p:nvPr/>
+        </p:nvPicPr>
+        <p:blipFill>
+          <a:blip r:embed="rId1"/>
+          <a:stretch>
+            <a:fillRect/>
+          </a:stretch>
+        </p:blipFill>
+        <p:spPr>
+          <a:xfrm>
+            <a:off x="273050" y="1656080"/>
+            <a:ext cx="3924300" cy="3302000"/>
+          </a:xfrm>
+          <a:prstGeom prst="rect">
+            <a:avLst/>
+          </a:prstGeom>
+        </p:spPr>
+      </p:pic>
+      <p:sp>
+        <p:nvSpPr>
+          <p:cNvPr id="5" name="文本框 4"/>
+          <p:cNvSpPr txBox="1"/>
+          <p:nvPr/>
+        </p:nvSpPr>
+        <p:spPr>
+          <a:xfrm>
+            <a:off x="963930" y="5408295"/>
+            <a:ext cx="2032000" cy="398780"/>
+          </a:xfrm>
+          <a:prstGeom prst="rect">
+            <a:avLst/>
+          </a:prstGeom>
+          <a:noFill/>
+        </p:spPr>
+        <p:txBody>
+          <a:bodyPr wrap="square" rtlCol="0">
+            <a:spAutoFit/>
+          </a:bodyPr>
+          <a:p>
+            <a:r>
+              <a:rPr lang="zh-CN" altLang="en-US" sz="2000"/>
+              <a:t>生成矩阵</a:t>
+            </a:r>
+            <a:r>
+              <a:rPr lang="en-US" altLang="zh-CN" sz="2000"/>
+              <a:t> P</a:t>
+            </a:r>
+            <a:r>
+              <a:rPr lang="zh-CN" altLang="en-US" sz="2000"/>
+              <a:t>，</a:t>
+            </a:r>
+            <a:r>
+              <a:rPr lang="en-US" altLang="zh-CN" sz="2000"/>
+              <a:t>Q</a:t>
+            </a:r>
+            <a:r>
+              <a:rPr lang="zh-CN" altLang="en-US" sz="2000"/>
+              <a:t>。</a:t>
+            </a:r>
+            <a:endParaRPr lang="zh-CN" altLang="en-US" sz="2000"/>
+          </a:p>
+        </p:txBody>
+      </p:sp>
+      <p:pic>
+        <p:nvPicPr>
+          <p:cNvPr id="7" name="图片 6"/>
+          <p:cNvPicPr>
+            <a:picLocks noChangeAspect="1"/>
+          </p:cNvPicPr>
+          <p:nvPr/>
+        </p:nvPicPr>
+        <p:blipFill>
+          <a:blip r:embed="rId2"/>
+          <a:stretch>
+            <a:fillRect/>
+          </a:stretch>
+        </p:blipFill>
+        <p:spPr>
+          <a:xfrm>
+            <a:off x="3352800" y="793750"/>
+            <a:ext cx="1905000" cy="398780"/>
+          </a:xfrm>
+          <a:prstGeom prst="rect">
+            <a:avLst/>
+          </a:prstGeom>
+        </p:spPr>
+      </p:pic>
+      <p:pic>
+        <p:nvPicPr>
+          <p:cNvPr id="8" name="图片 7"/>
+          <p:cNvPicPr>
+            <a:picLocks noChangeAspect="1"/>
+          </p:cNvPicPr>
+          <p:nvPr/>
+        </p:nvPicPr>
+        <p:blipFill>
+          <a:blip r:embed="rId3"/>
+          <a:stretch>
+            <a:fillRect/>
+          </a:stretch>
+        </p:blipFill>
+        <p:spPr>
+          <a:xfrm>
+            <a:off x="6242050" y="793750"/>
+            <a:ext cx="3638550" cy="368935"/>
+          </a:xfrm>
+          <a:prstGeom prst="rect">
+            <a:avLst/>
+          </a:prstGeom>
+        </p:spPr>
+      </p:pic>
+      <p:pic>
+        <p:nvPicPr>
+          <p:cNvPr id="9" name="图片 8"/>
+          <p:cNvPicPr>
+            <a:picLocks noChangeAspect="1"/>
+          </p:cNvPicPr>
+          <p:nvPr/>
+        </p:nvPicPr>
+        <p:blipFill>
+          <a:blip r:embed="rId4"/>
+          <a:stretch>
+            <a:fillRect/>
+          </a:stretch>
+        </p:blipFill>
+        <p:spPr>
+          <a:xfrm>
+            <a:off x="4335780" y="1656080"/>
+            <a:ext cx="4059555" cy="3306445"/>
+          </a:xfrm>
+          <a:prstGeom prst="rect">
+            <a:avLst/>
+          </a:prstGeom>
+        </p:spPr>
+      </p:pic>
+      <p:sp>
+        <p:nvSpPr>
+          <p:cNvPr id="10" name="文本框 9"/>
+          <p:cNvSpPr txBox="1"/>
+          <p:nvPr/>
+        </p:nvSpPr>
+        <p:spPr>
+          <a:xfrm>
+            <a:off x="4287520" y="5408295"/>
+            <a:ext cx="3898265" cy="706755"/>
+          </a:xfrm>
+          <a:prstGeom prst="rect">
+            <a:avLst/>
+          </a:prstGeom>
+          <a:noFill/>
+        </p:spPr>
+        <p:txBody>
+          <a:bodyPr wrap="square" rtlCol="0">
+            <a:spAutoFit/>
+          </a:bodyPr>
+          <a:p>
+            <a:r>
+              <a:rPr lang="zh-CN" altLang="en-US" sz="2000"/>
+              <a:t>模型函数、偏差函数、真实函数及它们的梯度</a:t>
+            </a:r>
+            <a:endParaRPr lang="zh-CN" altLang="en-US" sz="2000"/>
+          </a:p>
+        </p:txBody>
+      </p:sp>
+      <p:pic>
+        <p:nvPicPr>
+          <p:cNvPr id="11" name="图片 10"/>
+          <p:cNvPicPr>
+            <a:picLocks noChangeAspect="1"/>
+          </p:cNvPicPr>
+          <p:nvPr/>
+        </p:nvPicPr>
+        <p:blipFill>
+          <a:blip r:embed="rId5"/>
+          <a:stretch>
+            <a:fillRect/>
+          </a:stretch>
+        </p:blipFill>
+        <p:spPr>
+          <a:xfrm>
+            <a:off x="8634730" y="3848735"/>
+            <a:ext cx="3055620" cy="1113790"/>
+          </a:xfrm>
+          <a:prstGeom prst="rect">
+            <a:avLst/>
+          </a:prstGeom>
+        </p:spPr>
+      </p:pic>
+      <p:sp>
+        <p:nvSpPr>
+          <p:cNvPr id="12" name="文本框 11"/>
+          <p:cNvSpPr txBox="1"/>
+          <p:nvPr/>
+        </p:nvSpPr>
+        <p:spPr>
+          <a:xfrm>
+            <a:off x="8634730" y="5408295"/>
+            <a:ext cx="3201035" cy="706755"/>
+          </a:xfrm>
+          <a:prstGeom prst="rect">
+            <a:avLst/>
+          </a:prstGeom>
+          <a:noFill/>
+        </p:spPr>
+        <p:txBody>
+          <a:bodyPr wrap="square" rtlCol="0">
+            <a:spAutoFit/>
+          </a:bodyPr>
+          <a:p>
+            <a:r>
+              <a:rPr lang="zh-CN" altLang="en-US" sz="2000"/>
+              <a:t>由凸二次函数表达式直接得到最优解</a:t>
+            </a:r>
+            <a:endParaRPr lang="zh-CN" altLang="en-US" sz="2000"/>
+          </a:p>
+        </p:txBody>
+      </p:sp>
+    </p:spTree>
+    <p:custDataLst>
+      <p:tags r:id="rId6"/>
+    </p:custDataLst>
+  </p:cSld>
+  <p:clrMapOvr>
+    <a:masterClrMapping/>
+  </p:clrMapOvr>
+</p:sld>
+</file>
+
+<file path=ppt/slides/slide14.xml><?xml version="1.0" encoding="utf-8"?>
+<p:sld xmlns:a="http://schemas.openxmlformats.org/drawingml/2006/main" xmlns:r="http://schemas.openxmlformats.org/officeDocument/2006/relationships" xmlns:p="http://schemas.openxmlformats.org/presentationml/2006/main">
+  <p:cSld>
+    <p:spTree>
+      <p:nvGrpSpPr>
+        <p:cNvPr id="1" name=""/>
+        <p:cNvGrpSpPr/>
+        <p:nvPr/>
+      </p:nvGrpSpPr>
+      <p:grpSpPr/>
+      <p:sp>
+        <p:nvSpPr>
+          <p:cNvPr id="3" name="文本框 2"/>
+          <p:cNvSpPr txBox="1"/>
+          <p:nvPr/>
+        </p:nvSpPr>
+        <p:spPr>
+          <a:xfrm>
+            <a:off x="686435" y="394970"/>
+            <a:ext cx="1562735" cy="398780"/>
+          </a:xfrm>
+          <a:prstGeom prst="rect">
+            <a:avLst/>
+          </a:prstGeom>
+          <a:noFill/>
+        </p:spPr>
+        <p:txBody>
+          <a:bodyPr wrap="square" rtlCol="0">
+            <a:spAutoFit/>
+          </a:bodyPr>
+          <a:p>
+            <a:r>
+              <a:rPr lang="en-US" sz="2000">
+                <a:sym typeface="+mn-ea"/>
+              </a:rPr>
+              <a:t>2.</a:t>
+            </a:r>
+            <a:r>
+              <a:rPr lang="zh-CN" altLang="en-US" sz="2000">
+                <a:sym typeface="+mn-ea"/>
+              </a:rPr>
+              <a:t>算法实现</a:t>
+            </a:r>
+            <a:endParaRPr lang="zh-CN" altLang="en-US" sz="2000">
+              <a:sym typeface="+mn-ea"/>
+            </a:endParaRPr>
+          </a:p>
+        </p:txBody>
+      </p:sp>
+      <p:pic>
+        <p:nvPicPr>
+          <p:cNvPr id="4" name="图片 3"/>
+          <p:cNvPicPr>
+            <a:picLocks noChangeAspect="1"/>
+          </p:cNvPicPr>
+          <p:nvPr/>
+        </p:nvPicPr>
+        <p:blipFill>
+          <a:blip r:embed="rId1"/>
+          <a:stretch>
+            <a:fillRect/>
+          </a:stretch>
+        </p:blipFill>
+        <p:spPr>
+          <a:xfrm>
+            <a:off x="239395" y="1204595"/>
+            <a:ext cx="4848860" cy="4262755"/>
+          </a:xfrm>
+          <a:prstGeom prst="rect">
+            <a:avLst/>
+          </a:prstGeom>
+        </p:spPr>
+      </p:pic>
+      <p:sp>
+        <p:nvSpPr>
+          <p:cNvPr id="5" name="文本框 4"/>
+          <p:cNvSpPr txBox="1"/>
+          <p:nvPr/>
+        </p:nvSpPr>
+        <p:spPr>
+          <a:xfrm>
+            <a:off x="1524000" y="5568950"/>
+            <a:ext cx="1960880" cy="398780"/>
+          </a:xfrm>
+          <a:prstGeom prst="rect">
+            <a:avLst/>
+          </a:prstGeom>
+          <a:noFill/>
+        </p:spPr>
+        <p:txBody>
+          <a:bodyPr wrap="square" rtlCol="0">
+            <a:spAutoFit/>
+          </a:bodyPr>
+          <a:p>
+            <a:r>
+              <a:rPr lang="zh-CN" altLang="en-US" sz="2000"/>
+              <a:t>回溯线搜索算法</a:t>
+            </a:r>
+            <a:endParaRPr lang="zh-CN" altLang="en-US" sz="2000"/>
+          </a:p>
+        </p:txBody>
+      </p:sp>
+      <p:pic>
+        <p:nvPicPr>
+          <p:cNvPr id="6" name="图片 5"/>
+          <p:cNvPicPr>
+            <a:picLocks noChangeAspect="1"/>
+          </p:cNvPicPr>
+          <p:nvPr/>
+        </p:nvPicPr>
+        <p:blipFill>
+          <a:blip r:embed="rId2"/>
+          <a:stretch>
+            <a:fillRect/>
+          </a:stretch>
+        </p:blipFill>
+        <p:spPr>
+          <a:xfrm>
+            <a:off x="5544820" y="1211580"/>
+            <a:ext cx="6544310" cy="4255770"/>
+          </a:xfrm>
+          <a:prstGeom prst="rect">
+            <a:avLst/>
+          </a:prstGeom>
+        </p:spPr>
+      </p:pic>
+      <p:sp>
+        <p:nvSpPr>
+          <p:cNvPr id="7" name="文本框 6"/>
+          <p:cNvSpPr txBox="1"/>
+          <p:nvPr/>
+        </p:nvSpPr>
+        <p:spPr>
+          <a:xfrm>
+            <a:off x="6977380" y="5568950"/>
+            <a:ext cx="3530600" cy="398780"/>
+          </a:xfrm>
+          <a:prstGeom prst="rect">
+            <a:avLst/>
+          </a:prstGeom>
+          <a:noFill/>
+        </p:spPr>
+        <p:txBody>
+          <a:bodyPr wrap="square" rtlCol="0">
+            <a:spAutoFit/>
+          </a:bodyPr>
+          <a:p>
+            <a:r>
+              <a:rPr lang="zh-CN" altLang="en-US" sz="2000"/>
+              <a:t>模型基础阶段的梯度下降算法</a:t>
+            </a:r>
+            <a:endParaRPr lang="zh-CN" altLang="en-US" sz="2000"/>
+          </a:p>
+        </p:txBody>
+      </p:sp>
+    </p:spTree>
+    <p:custDataLst>
+      <p:tags r:id="rId3"/>
+    </p:custDataLst>
+  </p:cSld>
+  <p:clrMapOvr>
+    <a:masterClrMapping/>
+  </p:clrMapOvr>
+</p:sld>
+</file>
+
+<file path=ppt/slides/slide15.xml><?xml version="1.0" encoding="utf-8"?>
+<p:sld xmlns:a="http://schemas.openxmlformats.org/drawingml/2006/main" xmlns:r="http://schemas.openxmlformats.org/officeDocument/2006/relationships" xmlns:p="http://schemas.openxmlformats.org/presentationml/2006/main">
+  <p:cSld>
+    <p:spTree>
+      <p:nvGrpSpPr>
+        <p:cNvPr id="1" name=""/>
+        <p:cNvGrpSpPr/>
+        <p:nvPr/>
+      </p:nvGrpSpPr>
+      <p:grpSpPr/>
+      <p:sp>
+        <p:nvSpPr>
+          <p:cNvPr id="3" name="文本框 2"/>
+          <p:cNvSpPr txBox="1"/>
+          <p:nvPr/>
+        </p:nvSpPr>
+        <p:spPr>
+          <a:xfrm>
+            <a:off x="686435" y="394970"/>
+            <a:ext cx="1562735" cy="398780"/>
+          </a:xfrm>
+          <a:prstGeom prst="rect">
+            <a:avLst/>
+          </a:prstGeom>
+          <a:noFill/>
+        </p:spPr>
+        <p:txBody>
+          <a:bodyPr wrap="square" rtlCol="0">
+            <a:spAutoFit/>
+          </a:bodyPr>
+          <a:p>
+            <a:r>
+              <a:rPr lang="en-US" sz="2000">
+                <a:sym typeface="+mn-ea"/>
+              </a:rPr>
+              <a:t>2.</a:t>
+            </a:r>
+            <a:r>
+              <a:rPr lang="zh-CN" altLang="en-US" sz="2000">
+                <a:sym typeface="+mn-ea"/>
+              </a:rPr>
+              <a:t>算法实现</a:t>
+            </a:r>
+            <a:endParaRPr lang="zh-CN" altLang="en-US" sz="2000">
+              <a:sym typeface="+mn-ea"/>
+            </a:endParaRPr>
+          </a:p>
+        </p:txBody>
+      </p:sp>
+      <p:sp>
+        <p:nvSpPr>
+          <p:cNvPr id="4" name="文本框 3"/>
+          <p:cNvSpPr txBox="1"/>
+          <p:nvPr/>
+        </p:nvSpPr>
+        <p:spPr>
+          <a:xfrm>
+            <a:off x="870585" y="3229610"/>
+            <a:ext cx="1194435" cy="398780"/>
+          </a:xfrm>
+          <a:prstGeom prst="rect">
+            <a:avLst/>
+          </a:prstGeom>
+          <a:noFill/>
+        </p:spPr>
+        <p:txBody>
+          <a:bodyPr wrap="square" rtlCol="0">
+            <a:spAutoFit/>
+          </a:bodyPr>
+          <a:p>
+            <a:r>
+              <a:rPr lang="en-US" altLang="zh-CN" sz="2000"/>
+              <a:t>GC </a:t>
+            </a:r>
+            <a:r>
+              <a:rPr lang="zh-CN" altLang="en-US" sz="2000"/>
+              <a:t>算法</a:t>
+            </a:r>
+            <a:endParaRPr lang="zh-CN" altLang="en-US" sz="2000"/>
+          </a:p>
+        </p:txBody>
+      </p:sp>
+      <p:pic>
+        <p:nvPicPr>
+          <p:cNvPr id="5" name="图片 4"/>
+          <p:cNvPicPr>
+            <a:picLocks noChangeAspect="1"/>
+          </p:cNvPicPr>
+          <p:nvPr/>
+        </p:nvPicPr>
+        <p:blipFill>
+          <a:blip r:embed="rId1"/>
+          <a:stretch>
+            <a:fillRect/>
+          </a:stretch>
+        </p:blipFill>
+        <p:spPr>
+          <a:xfrm>
+            <a:off x="2729230" y="793750"/>
+            <a:ext cx="6733540" cy="5907405"/>
+          </a:xfrm>
+          <a:prstGeom prst="rect">
+            <a:avLst/>
+          </a:prstGeom>
+        </p:spPr>
+      </p:pic>
+    </p:spTree>
+    <p:custDataLst>
+      <p:tags r:id="rId2"/>
+    </p:custDataLst>
+  </p:cSld>
+  <p:clrMapOvr>
+    <a:masterClrMapping/>
+  </p:clrMapOvr>
+</p:sld>
+</file>
+
+<file path=ppt/slides/slide16.xml><?xml version="1.0" encoding="utf-8"?>
+<p:sld xmlns:a="http://schemas.openxmlformats.org/drawingml/2006/main" xmlns:r="http://schemas.openxmlformats.org/officeDocument/2006/relationships" xmlns:p="http://schemas.openxmlformats.org/presentationml/2006/main">
+  <p:cSld>
+    <p:spTree>
+      <p:nvGrpSpPr>
+        <p:cNvPr id="1" name=""/>
+        <p:cNvGrpSpPr/>
+        <p:nvPr/>
+      </p:nvGrpSpPr>
+      <p:grpSpPr/>
+      <p:pic>
+        <p:nvPicPr>
+          <p:cNvPr id="2" name="图片 1"/>
+          <p:cNvPicPr>
+            <a:picLocks noChangeAspect="1"/>
+          </p:cNvPicPr>
+          <p:nvPr/>
+        </p:nvPicPr>
+        <p:blipFill>
+          <a:blip r:embed="rId1"/>
+          <a:stretch>
+            <a:fillRect/>
+          </a:stretch>
+        </p:blipFill>
+        <p:spPr>
+          <a:xfrm>
+            <a:off x="2711450" y="1000125"/>
+            <a:ext cx="8393430" cy="4858385"/>
+          </a:xfrm>
+          <a:prstGeom prst="rect">
+            <a:avLst/>
+          </a:prstGeom>
+        </p:spPr>
+      </p:pic>
+      <p:sp>
+        <p:nvSpPr>
+          <p:cNvPr id="3" name="文本框 2"/>
+          <p:cNvSpPr txBox="1"/>
+          <p:nvPr/>
+        </p:nvSpPr>
+        <p:spPr>
+          <a:xfrm>
+            <a:off x="686435" y="394970"/>
+            <a:ext cx="1562735" cy="398780"/>
+          </a:xfrm>
+          <a:prstGeom prst="rect">
+            <a:avLst/>
+          </a:prstGeom>
+          <a:noFill/>
+        </p:spPr>
+        <p:txBody>
+          <a:bodyPr wrap="square" rtlCol="0">
+            <a:spAutoFit/>
+          </a:bodyPr>
+          <a:p>
+            <a:r>
+              <a:rPr lang="en-US" sz="2000">
+                <a:sym typeface="+mn-ea"/>
+              </a:rPr>
+              <a:t>2.</a:t>
+            </a:r>
+            <a:r>
+              <a:rPr lang="zh-CN" altLang="en-US" sz="2000">
+                <a:sym typeface="+mn-ea"/>
+              </a:rPr>
+              <a:t>算法实现</a:t>
+            </a:r>
+            <a:endParaRPr lang="zh-CN" altLang="en-US" sz="2000">
+              <a:sym typeface="+mn-ea"/>
+            </a:endParaRPr>
+          </a:p>
+        </p:txBody>
+      </p:sp>
+      <p:sp>
+        <p:nvSpPr>
+          <p:cNvPr id="4" name="文本框 3"/>
+          <p:cNvSpPr txBox="1"/>
+          <p:nvPr/>
+        </p:nvSpPr>
+        <p:spPr>
+          <a:xfrm>
+            <a:off x="483870" y="3201670"/>
+            <a:ext cx="1967865" cy="398780"/>
+          </a:xfrm>
+          <a:prstGeom prst="rect">
+            <a:avLst/>
+          </a:prstGeom>
+          <a:noFill/>
+        </p:spPr>
+        <p:txBody>
+          <a:bodyPr wrap="square" rtlCol="0">
+            <a:spAutoFit/>
+          </a:bodyPr>
+          <a:p>
+            <a:r>
+              <a:rPr lang="zh-CN" altLang="en-US" sz="2000"/>
+              <a:t>纯模型自由算法</a:t>
+            </a:r>
+            <a:endParaRPr lang="zh-CN" altLang="en-US" sz="2000"/>
+          </a:p>
+        </p:txBody>
+      </p:sp>
+    </p:spTree>
+    <p:custDataLst>
+      <p:tags r:id="rId2"/>
+    </p:custDataLst>
+  </p:cSld>
+  <p:clrMapOvr>
+    <a:masterClrMapping/>
+  </p:clrMapOvr>
+</p:sld>
+</file>
+
+<file path=ppt/slides/slide17.xml><?xml version="1.0" encoding="utf-8"?>
+<p:sld xmlns:a="http://schemas.openxmlformats.org/drawingml/2006/main" xmlns:r="http://schemas.openxmlformats.org/officeDocument/2006/relationships" xmlns:p="http://schemas.openxmlformats.org/presentationml/2006/main">
+  <p:cSld>
+    <p:spTree>
+      <p:nvGrpSpPr>
+        <p:cNvPr id="1" name=""/>
+        <p:cNvGrpSpPr/>
+        <p:nvPr/>
+      </p:nvGrpSpPr>
+      <p:grpSpPr/>
+      <p:sp>
+        <p:nvSpPr>
+          <p:cNvPr id="3" name="文本框 2"/>
+          <p:cNvSpPr txBox="1"/>
+          <p:nvPr/>
+        </p:nvSpPr>
+        <p:spPr>
+          <a:xfrm>
+            <a:off x="686435" y="394970"/>
+            <a:ext cx="1562735" cy="398780"/>
+          </a:xfrm>
+          <a:prstGeom prst="rect">
+            <a:avLst/>
+          </a:prstGeom>
+          <a:noFill/>
+        </p:spPr>
+        <p:txBody>
+          <a:bodyPr wrap="square" rtlCol="0">
+            <a:spAutoFit/>
+          </a:bodyPr>
+          <a:p>
+            <a:r>
+              <a:rPr lang="en-US" sz="2000">
+                <a:sym typeface="+mn-ea"/>
+              </a:rPr>
+              <a:t>3.</a:t>
+            </a:r>
+            <a:r>
+              <a:rPr lang="zh-CN" altLang="en-US" sz="2000">
+                <a:sym typeface="+mn-ea"/>
+              </a:rPr>
+              <a:t>复现结果</a:t>
+            </a:r>
+            <a:endParaRPr lang="zh-CN" altLang="en-US" sz="2000">
+              <a:sym typeface="+mn-ea"/>
+            </a:endParaRPr>
+          </a:p>
+        </p:txBody>
+      </p:sp>
+      <mc:AlternateContent xmlns:mc="http://schemas.openxmlformats.org/markup-compatibility/2006">
+        <mc:Choice xmlns:a14="http://schemas.microsoft.com/office/drawing/2010/main" Requires="a14">
+          <p:sp>
+            <p:nvSpPr>
+              <p:cNvPr id="4" name="文本框 3"/>
+              <p:cNvSpPr txBox="1"/>
+              <p:nvPr/>
+            </p:nvSpPr>
+            <p:spPr>
+              <a:xfrm>
+                <a:off x="686371" y="1134364"/>
+                <a:ext cx="8366125" cy="398780"/>
+              </a:xfrm>
+              <a:prstGeom prst="rect">
+                <a:avLst/>
+              </a:prstGeom>
+              <a:noFill/>
+            </p:spPr>
+            <p:txBody>
+              <a:bodyPr wrap="none" rtlCol="0" anchor="t">
+                <a:spAutoFit/>
+              </a:bodyPr>
+              <a:p>
+                <a:pPr algn="l"/>
+                <a14:m>
+                  <m:oMathPara xmlns:m="http://schemas.openxmlformats.org/officeDocument/2006/math">
+                    <m:oMathParaPr>
+                      <m:jc m:val="centerGroup"/>
+                    </m:oMathParaPr>
+                    <m:oMath xmlns:m="http://schemas.openxmlformats.org/officeDocument/2006/math">
+                      <m:sSub>
+                        <m:sSubPr>
+                          <m:ctrlPr>
+                            <a:rPr lang="en-US" altLang="zh-CN" sz="2000" i="1">
+                              <a:latin typeface="Cambria Math" panose="02040503050406030204" charset="0"/>
+                              <a:cs typeface="Cambria Math" panose="02040503050406030204" charset="0"/>
+                            </a:rPr>
+                          </m:ctrlPr>
+                        </m:sSubPr>
+                        <m:e>
+                          <m:r>
+                            <a:rPr lang="en-US" altLang="zh-CN" sz="2000" i="1">
+                              <a:latin typeface="Cambria Math" panose="02040503050406030204" charset="0"/>
+                              <a:cs typeface="Cambria Math" panose="02040503050406030204" charset="0"/>
+                            </a:rPr>
+                            <m:t>𝑐</m:t>
+                          </m:r>
+                        </m:e>
+                        <m:sub>
+                          <m:r>
+                            <a:rPr lang="en-US" altLang="zh-CN" sz="2000" i="1">
+                              <a:latin typeface="Cambria Math" panose="02040503050406030204" charset="0"/>
+                              <a:cs typeface="Cambria Math" panose="02040503050406030204" charset="0"/>
+                            </a:rPr>
+                            <m:t>1</m:t>
+                          </m:r>
+                        </m:sub>
+                      </m:sSub>
+                      <m:r>
+                        <a:rPr lang="en-US" altLang="zh-CN" sz="2000" i="1">
+                          <a:latin typeface="Cambria Math" panose="02040503050406030204" charset="0"/>
+                          <a:cs typeface="Cambria Math" panose="02040503050406030204" charset="0"/>
+                        </a:rPr>
+                        <m:t>=</m:t>
+                      </m:r>
+                      <m:r>
+                        <a:rPr lang="en-US" altLang="zh-CN" sz="2000" i="1">
+                          <a:latin typeface="Cambria Math" panose="02040503050406030204" charset="0"/>
+                          <a:cs typeface="Cambria Math" panose="02040503050406030204" charset="0"/>
+                        </a:rPr>
+                        <m:t>1</m:t>
+                      </m:r>
+                      <m:r>
+                        <a:rPr lang="en-US" altLang="zh-CN" sz="2000" i="1">
+                          <a:latin typeface="Cambria Math" panose="02040503050406030204" charset="0"/>
+                          <a:cs typeface="Cambria Math" panose="02040503050406030204" charset="0"/>
+                        </a:rPr>
+                        <m:t>,</m:t>
+                      </m:r>
+                      <m:sSub>
+                        <m:sSubPr>
+                          <m:ctrlPr>
+                            <a:rPr lang="en-US" altLang="zh-CN" sz="2000" i="1">
+                              <a:latin typeface="Cambria Math" panose="02040503050406030204" charset="0"/>
+                              <a:cs typeface="Cambria Math" panose="02040503050406030204" charset="0"/>
+                            </a:rPr>
+                          </m:ctrlPr>
+                        </m:sSubPr>
+                        <m:e>
+                          <m:r>
+                            <a:rPr lang="en-US" altLang="zh-CN" sz="2000" i="1">
+                              <a:latin typeface="Cambria Math" panose="02040503050406030204" charset="0"/>
+                              <a:cs typeface="Cambria Math" panose="02040503050406030204" charset="0"/>
+                            </a:rPr>
+                            <m:t>𝑐</m:t>
+                          </m:r>
+                        </m:e>
+                        <m:sub>
+                          <m:r>
+                            <a:rPr lang="en-US" altLang="zh-CN" sz="2000" i="1">
+                              <a:latin typeface="Cambria Math" panose="02040503050406030204" charset="0"/>
+                              <a:cs typeface="Cambria Math" panose="02040503050406030204" charset="0"/>
+                            </a:rPr>
+                            <m:t>2</m:t>
+                          </m:r>
+                        </m:sub>
+                      </m:sSub>
+                      <m:r>
+                        <a:rPr lang="en-US" altLang="zh-CN" sz="2000" i="1">
+                          <a:latin typeface="Cambria Math" panose="02040503050406030204" charset="0"/>
+                          <a:cs typeface="Cambria Math" panose="02040503050406030204" charset="0"/>
+                        </a:rPr>
+                        <m:t>=</m:t>
+                      </m:r>
+                      <m:sSub>
+                        <m:sSubPr>
+                          <m:ctrlPr>
+                            <a:rPr lang="en-US" altLang="zh-CN" sz="2000" i="1">
+                              <a:latin typeface="Cambria Math" panose="02040503050406030204" charset="0"/>
+                              <a:cs typeface="Cambria Math" panose="02040503050406030204" charset="0"/>
+                            </a:rPr>
+                          </m:ctrlPr>
+                        </m:sSubPr>
+                        <m:e>
+                          <m:r>
+                            <a:rPr lang="en-US" altLang="zh-CN" sz="2000" i="1">
+                              <a:latin typeface="Cambria Math" panose="02040503050406030204" charset="0"/>
+                              <a:cs typeface="Cambria Math" panose="02040503050406030204" charset="0"/>
+                            </a:rPr>
+                            <m:t>𝑐</m:t>
+                          </m:r>
+                        </m:e>
+                        <m:sub>
+                          <m:r>
+                            <a:rPr lang="en-US" altLang="zh-CN" sz="2000" i="1">
+                              <a:latin typeface="Cambria Math" panose="02040503050406030204" charset="0"/>
+                              <a:cs typeface="Cambria Math" panose="02040503050406030204" charset="0"/>
+                            </a:rPr>
+                            <m:t>3</m:t>
+                          </m:r>
+                        </m:sub>
+                      </m:sSub>
+                      <m:r>
+                        <a:rPr lang="en-US" altLang="zh-CN" sz="2000" i="1">
+                          <a:latin typeface="Cambria Math" panose="02040503050406030204" charset="0"/>
+                          <a:cs typeface="Cambria Math" panose="02040503050406030204" charset="0"/>
+                        </a:rPr>
+                        <m:t>=</m:t>
+                      </m:r>
+                      <m:sSub>
+                        <m:sSubPr>
+                          <m:ctrlPr>
+                            <a:rPr lang="en-US" altLang="zh-CN" sz="2000" i="1">
+                              <a:latin typeface="Cambria Math" panose="02040503050406030204" charset="0"/>
+                              <a:cs typeface="Cambria Math" panose="02040503050406030204" charset="0"/>
+                            </a:rPr>
+                          </m:ctrlPr>
+                        </m:sSubPr>
+                        <m:e>
+                          <m:r>
+                            <a:rPr lang="en-US" altLang="zh-CN" sz="2000" i="1">
+                              <a:latin typeface="Cambria Math" panose="02040503050406030204" charset="0"/>
+                              <a:cs typeface="Cambria Math" panose="02040503050406030204" charset="0"/>
+                            </a:rPr>
+                            <m:t>𝐿</m:t>
+                          </m:r>
+                        </m:e>
+                        <m:sub>
+                          <m:r>
+                            <a:rPr lang="en-US" altLang="zh-CN" sz="2000" i="1">
+                              <a:latin typeface="Cambria Math" panose="02040503050406030204" charset="0"/>
+                              <a:cs typeface="Cambria Math" panose="02040503050406030204" charset="0"/>
+                            </a:rPr>
+                            <m:t>𝑟</m:t>
+                          </m:r>
+                        </m:sub>
+                      </m:sSub>
+                      <m:r>
+                        <a:rPr lang="en-US" altLang="zh-CN" sz="2000" i="1">
+                          <a:latin typeface="Cambria Math" panose="02040503050406030204" charset="0"/>
+                          <a:cs typeface="Cambria Math" panose="02040503050406030204" charset="0"/>
+                        </a:rPr>
+                        <m:t>=</m:t>
+                      </m:r>
+                      <m:r>
+                        <a:rPr lang="en-US" altLang="zh-CN" sz="2000" i="1">
+                          <a:latin typeface="Cambria Math" panose="02040503050406030204" charset="0"/>
+                          <a:cs typeface="Cambria Math" panose="02040503050406030204" charset="0"/>
+                        </a:rPr>
+                        <m:t>0</m:t>
+                      </m:r>
+                      <m:r>
+                        <a:rPr lang="en-US" altLang="zh-CN" sz="2000" i="1">
+                          <a:latin typeface="Cambria Math" panose="02040503050406030204" charset="0"/>
+                          <a:cs typeface="Cambria Math" panose="02040503050406030204" charset="0"/>
+                        </a:rPr>
+                        <m:t>.</m:t>
+                      </m:r>
+                      <m:r>
+                        <a:rPr lang="en-US" altLang="zh-CN" sz="2000" i="1">
+                          <a:latin typeface="Cambria Math" panose="02040503050406030204" charset="0"/>
+                          <a:cs typeface="Cambria Math" panose="02040503050406030204" charset="0"/>
+                        </a:rPr>
+                        <m:t>1</m:t>
+                      </m:r>
+                      <m:r>
+                        <a:rPr lang="en-US" altLang="zh-CN" sz="2000" i="1">
+                          <a:latin typeface="Cambria Math" panose="02040503050406030204" charset="0"/>
+                          <a:cs typeface="Cambria Math" panose="02040503050406030204" charset="0"/>
+                        </a:rPr>
+                        <m:t>,</m:t>
+                      </m:r>
+                      <m:r>
+                        <a:rPr lang="en-US" altLang="zh-CN" sz="2000" i="1">
+                          <a:latin typeface="Cambria Math" panose="02040503050406030204" charset="0"/>
+                          <a:cs typeface="Cambria Math" panose="02040503050406030204" charset="0"/>
+                        </a:rPr>
+                        <m:t>𝑛</m:t>
+                      </m:r>
+                      <m:r>
+                        <a:rPr lang="en-US" altLang="zh-CN" sz="2000" i="1">
+                          <a:latin typeface="Cambria Math" panose="02040503050406030204" charset="0"/>
+                          <a:cs typeface="Cambria Math" panose="02040503050406030204" charset="0"/>
+                        </a:rPr>
+                        <m:t>=</m:t>
+                      </m:r>
+                      <m:r>
+                        <a:rPr lang="en-US" altLang="zh-CN" sz="2000" i="1">
+                          <a:latin typeface="Cambria Math" panose="02040503050406030204" charset="0"/>
+                          <a:cs typeface="Cambria Math" panose="02040503050406030204" charset="0"/>
+                        </a:rPr>
+                        <m:t>4</m:t>
+                      </m:r>
+                      <m:r>
+                        <a:rPr lang="en-US" altLang="zh-CN" sz="2000" i="1">
+                          <a:latin typeface="Cambria Math" panose="02040503050406030204" charset="0"/>
+                          <a:cs typeface="Cambria Math" panose="02040503050406030204" charset="0"/>
+                        </a:rPr>
+                        <m:t>,</m:t>
+                      </m:r>
+                      <m:r>
+                        <a:rPr lang="en-US" altLang="zh-CN" sz="2000" i="1">
+                          <a:latin typeface="Cambria Math" panose="02040503050406030204" charset="0"/>
+                          <a:cs typeface="Cambria Math" panose="02040503050406030204" charset="0"/>
+                        </a:rPr>
+                        <m:t>𝛼</m:t>
+                      </m:r>
+                      <m:r>
+                        <a:rPr lang="en-US" altLang="zh-CN" sz="2000" i="1">
+                          <a:latin typeface="Cambria Math" panose="02040503050406030204" charset="0"/>
+                          <a:cs typeface="Cambria Math" panose="02040503050406030204" charset="0"/>
+                        </a:rPr>
+                        <m:t>=</m:t>
+                      </m:r>
+                      <m:r>
+                        <a:rPr lang="en-US" altLang="zh-CN" sz="2000" i="1">
+                          <a:latin typeface="Cambria Math" panose="02040503050406030204" charset="0"/>
+                          <a:cs typeface="Cambria Math" panose="02040503050406030204" charset="0"/>
+                        </a:rPr>
+                        <m:t>0</m:t>
+                      </m:r>
+                      <m:r>
+                        <a:rPr lang="en-US" altLang="zh-CN" sz="2000" i="1">
+                          <a:latin typeface="Cambria Math" panose="02040503050406030204" charset="0"/>
+                          <a:cs typeface="Cambria Math" panose="02040503050406030204" charset="0"/>
+                        </a:rPr>
+                        <m:t>.</m:t>
+                      </m:r>
+                      <m:r>
+                        <a:rPr lang="en-US" altLang="zh-CN" sz="2000" i="1">
+                          <a:latin typeface="Cambria Math" panose="02040503050406030204" charset="0"/>
+                          <a:cs typeface="Cambria Math" panose="02040503050406030204" charset="0"/>
+                        </a:rPr>
+                        <m:t>3</m:t>
+                      </m:r>
+                      <m:r>
+                        <a:rPr lang="en-US" altLang="zh-CN" sz="2000" i="1">
+                          <a:latin typeface="Cambria Math" panose="02040503050406030204" charset="0"/>
+                          <a:cs typeface="Cambria Math" panose="02040503050406030204" charset="0"/>
+                        </a:rPr>
+                        <m:t>,</m:t>
+                      </m:r>
+                      <m:r>
+                        <a:rPr lang="en-US" altLang="zh-CN" sz="2000" i="1">
+                          <a:latin typeface="Cambria Math" panose="02040503050406030204" charset="0"/>
+                          <a:cs typeface="Cambria Math" panose="02040503050406030204" charset="0"/>
+                        </a:rPr>
+                        <m:t>𝛽</m:t>
+                      </m:r>
+                      <m:r>
+                        <a:rPr lang="en-US" altLang="zh-CN" sz="2000" i="1">
+                          <a:latin typeface="Cambria Math" panose="02040503050406030204" charset="0"/>
+                          <a:cs typeface="Cambria Math" panose="02040503050406030204" charset="0"/>
+                        </a:rPr>
+                        <m:t>=</m:t>
+                      </m:r>
+                      <m:r>
+                        <a:rPr lang="en-US" altLang="zh-CN" sz="2000" i="1">
+                          <a:latin typeface="Cambria Math" panose="02040503050406030204" charset="0"/>
+                          <a:cs typeface="Cambria Math" panose="02040503050406030204" charset="0"/>
+                        </a:rPr>
+                        <m:t>0</m:t>
+                      </m:r>
+                      <m:r>
+                        <a:rPr lang="en-US" altLang="zh-CN" sz="2000" i="1">
+                          <a:latin typeface="Cambria Math" panose="02040503050406030204" charset="0"/>
+                          <a:cs typeface="Cambria Math" panose="02040503050406030204" charset="0"/>
+                        </a:rPr>
+                        <m:t>.</m:t>
+                      </m:r>
+                      <m:r>
+                        <a:rPr lang="en-US" altLang="zh-CN" sz="2000" i="1">
+                          <a:latin typeface="Cambria Math" panose="02040503050406030204" charset="0"/>
+                          <a:cs typeface="Cambria Math" panose="02040503050406030204" charset="0"/>
+                        </a:rPr>
+                        <m:t>5</m:t>
+                      </m:r>
+                      <m:r>
+                        <a:rPr lang="en-US" altLang="zh-CN" sz="2000" i="1">
+                          <a:latin typeface="Cambria Math" panose="02040503050406030204" charset="0"/>
+                          <a:cs typeface="Cambria Math" panose="02040503050406030204" charset="0"/>
+                        </a:rPr>
+                        <m:t>,</m:t>
+                      </m:r>
+                      <m:sSub>
+                        <m:sSubPr>
+                          <m:ctrlPr>
+                            <a:rPr lang="en-US" altLang="zh-CN" sz="2000" i="1">
+                              <a:latin typeface="Cambria Math" panose="02040503050406030204" charset="0"/>
+                              <a:cs typeface="Cambria Math" panose="02040503050406030204" charset="0"/>
+                            </a:rPr>
+                          </m:ctrlPr>
+                        </m:sSubPr>
+                        <m:e>
+                          <m:r>
+                            <a:rPr lang="en-US" altLang="zh-CN" sz="2000" i="1">
+                              <a:latin typeface="Cambria Math" panose="02040503050406030204" charset="0"/>
+                              <a:cs typeface="Cambria Math" panose="02040503050406030204" charset="0"/>
+                            </a:rPr>
+                            <m:t>𝜂</m:t>
+                          </m:r>
+                        </m:e>
+                        <m:sub>
+                          <m:r>
+                            <a:rPr lang="en-US" altLang="zh-CN" sz="2000" i="1">
+                              <a:latin typeface="Cambria Math" panose="02040503050406030204" charset="0"/>
+                              <a:cs typeface="Cambria Math" panose="02040503050406030204" charset="0"/>
+                            </a:rPr>
+                            <m:t>𝑚𝑎𝑥</m:t>
+                          </m:r>
+                        </m:sub>
+                      </m:sSub>
+                      <m:r>
+                        <a:rPr lang="en-US" altLang="zh-CN" sz="2000" i="1">
+                          <a:latin typeface="Cambria Math" panose="02040503050406030204" charset="0"/>
+                          <a:cs typeface="Cambria Math" panose="02040503050406030204" charset="0"/>
+                        </a:rPr>
+                        <m:t>=</m:t>
+                      </m:r>
+                      <m:r>
+                        <a:rPr lang="en-US" altLang="zh-CN" sz="2000" i="1">
+                          <a:latin typeface="Cambria Math" panose="02040503050406030204" charset="0"/>
+                          <a:cs typeface="Cambria Math" panose="02040503050406030204" charset="0"/>
+                        </a:rPr>
+                        <m:t>1</m:t>
+                      </m:r>
+                      <m:r>
+                        <a:rPr lang="en-US" altLang="zh-CN" sz="2000" i="1">
+                          <a:latin typeface="Cambria Math" panose="02040503050406030204" charset="0"/>
+                          <a:cs typeface="Cambria Math" panose="02040503050406030204" charset="0"/>
+                        </a:rPr>
+                        <m:t>,</m:t>
+                      </m:r>
+                      <m:sSub>
+                        <m:sSubPr>
+                          <m:ctrlPr>
+                            <a:rPr lang="en-US" altLang="zh-CN" sz="2000" i="1">
+                              <a:latin typeface="Cambria Math" panose="02040503050406030204" charset="0"/>
+                              <a:cs typeface="Cambria Math" panose="02040503050406030204" charset="0"/>
+                            </a:rPr>
+                          </m:ctrlPr>
+                        </m:sSubPr>
+                        <m:e>
+                          <m:r>
+                            <a:rPr lang="en-US" altLang="zh-CN" sz="2000" i="1">
+                              <a:latin typeface="Cambria Math" panose="02040503050406030204" charset="0"/>
+                              <a:cs typeface="Cambria Math" panose="02040503050406030204" charset="0"/>
+                            </a:rPr>
+                            <m:t>𝜂</m:t>
+                          </m:r>
+                        </m:e>
+                        <m:sub>
+                          <m:r>
+                            <a:rPr lang="en-US" altLang="zh-CN" sz="2000" i="1">
+                              <a:latin typeface="Cambria Math" panose="02040503050406030204" charset="0"/>
+                              <a:cs typeface="Cambria Math" panose="02040503050406030204" charset="0"/>
+                            </a:rPr>
+                            <m:t>𝑚𝑖𝑛</m:t>
+                          </m:r>
+                        </m:sub>
+                      </m:sSub>
+                      <m:r>
+                        <a:rPr lang="en-US" altLang="zh-CN" sz="2000" i="1">
+                          <a:latin typeface="Cambria Math" panose="02040503050406030204" charset="0"/>
+                          <a:cs typeface="Cambria Math" panose="02040503050406030204" charset="0"/>
+                        </a:rPr>
+                        <m:t>=</m:t>
+                      </m:r>
+                      <m:r>
+                        <a:rPr lang="en-US" altLang="zh-CN" sz="2000" i="1">
+                          <a:latin typeface="Cambria Math" panose="02040503050406030204" charset="0"/>
+                          <a:cs typeface="Cambria Math" panose="02040503050406030204" charset="0"/>
+                        </a:rPr>
+                        <m:t>0</m:t>
+                      </m:r>
+                      <m:r>
+                        <a:rPr lang="en-US" altLang="zh-CN" sz="2000" i="1">
+                          <a:latin typeface="Cambria Math" panose="02040503050406030204" charset="0"/>
+                          <a:cs typeface="Cambria Math" panose="02040503050406030204" charset="0"/>
+                        </a:rPr>
+                        <m:t>.</m:t>
+                      </m:r>
+                      <m:r>
+                        <a:rPr lang="en-US" altLang="zh-CN" sz="2000" i="1">
+                          <a:latin typeface="Cambria Math" panose="02040503050406030204" charset="0"/>
+                          <a:cs typeface="Cambria Math" panose="02040503050406030204" charset="0"/>
+                        </a:rPr>
+                        <m:t>005</m:t>
+                      </m:r>
+                    </m:oMath>
+                  </m:oMathPara>
+                </a14:m>
+                <a:endParaRPr lang="en-US" altLang="zh-CN" sz="2000" i="1">
+                  <a:latin typeface="Cambria Math" panose="02040503050406030204" charset="0"/>
+                  <a:cs typeface="Cambria Math" panose="02040503050406030204" charset="0"/>
+                </a:endParaRPr>
+              </a:p>
+            </p:txBody>
+          </p:sp>
+        </mc:Choice>
+        <mc:Fallback>
+          <p:sp>
+            <p:nvSpPr>
+              <p:cNvPr id="4" name="文本框 3"/>
+              <p:cNvSpPr txBox="1">
+                <a:spLocks noRot="1" noChangeAspect="1" noMove="1" noResize="1" noEditPoints="1" noAdjustHandles="1" noChangeArrowheads="1" noChangeShapeType="1" noTextEdit="1"/>
+              </p:cNvSpPr>
+              <p:nvPr/>
+            </p:nvSpPr>
+            <p:spPr>
+              <a:xfrm>
+                <a:off x="686371" y="1134364"/>
+                <a:ext cx="8366125" cy="398780"/>
+              </a:xfrm>
+              <a:prstGeom prst="rect">
+                <a:avLst/>
+              </a:prstGeom>
+              <a:blipFill rotWithShape="1">
+                <a:blip r:embed="rId1"/>
+                <a:stretch>
+                  <a:fillRect l="-7" t="-64" r="7" b="64"/>
+                </a:stretch>
+              </a:blipFill>
+            </p:spPr>
+            <p:txBody>
+              <a:bodyPr/>
+              <a:lstStyle/>
+              <a:p>
+                <a:r>
+                  <a:rPr lang="zh-CN" altLang="en-US">
+                    <a:noFill/>
+                  </a:rPr>
+                  <a:t> </a:t>
+                </a:r>
+              </a:p>
+            </p:txBody>
+          </p:sp>
+        </mc:Fallback>
+      </mc:AlternateContent>
+      <p:sp>
+        <p:nvSpPr>
+          <p:cNvPr id="6" name="文本框 5"/>
+          <p:cNvSpPr txBox="1"/>
+          <p:nvPr/>
+        </p:nvSpPr>
+        <p:spPr>
+          <a:xfrm>
+            <a:off x="7181215" y="3429000"/>
+            <a:ext cx="4820920" cy="398780"/>
+          </a:xfrm>
+          <a:prstGeom prst="rect">
+            <a:avLst/>
+          </a:prstGeom>
+          <a:noFill/>
+        </p:spPr>
+        <p:txBody>
+          <a:bodyPr wrap="square" rtlCol="0">
+            <a:spAutoFit/>
+          </a:bodyPr>
+          <a:p>
+            <a:r>
+              <a:rPr lang="en-US" altLang="zh-CN" sz="2000"/>
+              <a:t>GC </a:t>
+            </a:r>
+            <a:r>
+              <a:rPr lang="zh-CN" altLang="en-US" sz="2000"/>
+              <a:t>算法的表现明显优于纯模型自由算法</a:t>
+            </a:r>
+            <a:endParaRPr lang="zh-CN" altLang="en-US" sz="2000"/>
+          </a:p>
+        </p:txBody>
+      </p:sp>
+      <mc:AlternateContent xmlns:mc="http://schemas.openxmlformats.org/markup-compatibility/2006">
+        <mc:Choice xmlns:a14="http://schemas.microsoft.com/office/drawing/2010/main" Requires="a14">
+          <p:sp>
+            <p:nvSpPr>
+              <p:cNvPr id="10" name="文本框 9"/>
+              <p:cNvSpPr txBox="1"/>
+              <p:nvPr/>
+            </p:nvSpPr>
+            <p:spPr>
+              <a:xfrm>
+                <a:off x="7230681" y="3932174"/>
+                <a:ext cx="340995" cy="398780"/>
+              </a:xfrm>
+              <a:prstGeom prst="rect">
+                <a:avLst/>
+              </a:prstGeom>
+              <a:noFill/>
+            </p:spPr>
+            <p:txBody>
+              <a:bodyPr wrap="none" rtlCol="0" anchor="t">
+                <a:spAutoFit/>
+              </a:bodyPr>
+              <a:p>
+                <a:pPr algn="l"/>
+                <a14:m>
+                  <m:oMathPara xmlns:m="http://schemas.openxmlformats.org/officeDocument/2006/math">
+                    <m:oMathParaPr>
+                      <m:jc m:val="centerGroup"/>
+                    </m:oMathParaPr>
+                    <m:oMath xmlns:m="http://schemas.openxmlformats.org/officeDocument/2006/math">
+                      <m:r>
+                        <a:rPr lang="en-US" altLang="zh-CN" sz="2000" i="1">
+                          <a:latin typeface="Cambria Math" panose="02040503050406030204" charset="0"/>
+                          <a:ea typeface="MS Mincho" charset="0"/>
+                          <a:cs typeface="Cambria Math" panose="02040503050406030204" charset="0"/>
+                        </a:rPr>
+                        <m:t>𝛾</m:t>
+                      </m:r>
+                    </m:oMath>
+                  </m:oMathPara>
+                </a14:m>
+                <a:endParaRPr lang="en-US" altLang="zh-CN" sz="2000" i="1">
+                  <a:latin typeface="Cambria Math" panose="02040503050406030204" charset="0"/>
+                  <a:ea typeface="MS Mincho" charset="0"/>
+                  <a:cs typeface="Cambria Math" panose="02040503050406030204" charset="0"/>
+                </a:endParaRPr>
+              </a:p>
+            </p:txBody>
+          </p:sp>
+        </mc:Choice>
+        <mc:Fallback>
+          <p:sp>
+            <p:nvSpPr>
+              <p:cNvPr id="10" name="文本框 9"/>
+              <p:cNvSpPr txBox="1">
+                <a:spLocks noRot="1" noChangeAspect="1" noMove="1" noResize="1" noEditPoints="1" noAdjustHandles="1" noChangeArrowheads="1" noChangeShapeType="1" noTextEdit="1"/>
+              </p:cNvSpPr>
+              <p:nvPr/>
+            </p:nvSpPr>
+            <p:spPr>
+              <a:xfrm>
+                <a:off x="7230681" y="3932174"/>
+                <a:ext cx="340995" cy="398780"/>
+              </a:xfrm>
+              <a:prstGeom prst="rect">
+                <a:avLst/>
+              </a:prstGeom>
+              <a:blipFill rotWithShape="1">
+                <a:blip r:embed="rId2"/>
+                <a:stretch>
+                  <a:fillRect l="-167" t="-64" r="167" b="64"/>
+                </a:stretch>
+              </a:blipFill>
+            </p:spPr>
+            <p:txBody>
+              <a:bodyPr/>
+              <a:lstStyle/>
+              <a:p>
+                <a:r>
+                  <a:rPr lang="zh-CN" altLang="en-US">
+                    <a:noFill/>
+                  </a:rPr>
+                  <a:t> </a:t>
+                </a:r>
+              </a:p>
+            </p:txBody>
+          </p:sp>
+        </mc:Fallback>
+      </mc:AlternateContent>
+      <p:sp>
+        <p:nvSpPr>
+          <p:cNvPr id="11" name="文本框 10"/>
+          <p:cNvSpPr txBox="1"/>
+          <p:nvPr/>
+        </p:nvSpPr>
+        <p:spPr>
+          <a:xfrm>
+            <a:off x="7432040" y="3931920"/>
+            <a:ext cx="4064000" cy="398780"/>
+          </a:xfrm>
+          <a:prstGeom prst="rect">
+            <a:avLst/>
+          </a:prstGeom>
+          <a:noFill/>
+        </p:spPr>
+        <p:txBody>
+          <a:bodyPr wrap="square" rtlCol="0">
+            <a:spAutoFit/>
+          </a:bodyPr>
+          <a:p>
+            <a:r>
+              <a:rPr lang="zh-CN" altLang="en-US" sz="2000"/>
+              <a:t>的大小影响了函数评估次数</a:t>
+            </a:r>
+            <a:endParaRPr lang="zh-CN" altLang="en-US" sz="2000"/>
+          </a:p>
+        </p:txBody>
+      </p:sp>
+      <p:pic>
+        <p:nvPicPr>
+          <p:cNvPr id="13" name="图片 12" descr="convergence"/>
+          <p:cNvPicPr>
+            <a:picLocks noChangeAspect="1"/>
+          </p:cNvPicPr>
+          <p:nvPr/>
+        </p:nvPicPr>
+        <p:blipFill>
+          <a:blip r:embed="rId3"/>
+          <a:stretch>
+            <a:fillRect/>
+          </a:stretch>
+        </p:blipFill>
+        <p:spPr>
+          <a:xfrm>
+            <a:off x="686435" y="1845310"/>
+            <a:ext cx="6400800" cy="4572000"/>
+          </a:xfrm>
+          <a:prstGeom prst="rect">
+            <a:avLst/>
+          </a:prstGeom>
+        </p:spPr>
+      </p:pic>
+    </p:spTree>
+    <p:custDataLst>
+      <p:tags r:id="rId4"/>
+    </p:custDataLst>
+  </p:cSld>
+  <p:clrMapOvr>
+    <a:masterClrMapping/>
+  </p:clrMapOvr>
+</p:sld>
+</file>
+
+<file path=ppt/slides/slide18.xml><?xml version="1.0" encoding="utf-8"?>
+<p:sld xmlns:a="http://schemas.openxmlformats.org/drawingml/2006/main" xmlns:r="http://schemas.openxmlformats.org/officeDocument/2006/relationships" xmlns:p="http://schemas.openxmlformats.org/presentationml/2006/main">
+  <p:cSld>
+    <p:spTree>
+      <p:nvGrpSpPr>
+        <p:cNvPr id="1" name=""/>
+        <p:cNvGrpSpPr/>
+        <p:nvPr/>
+      </p:nvGrpSpPr>
+      <p:grpSpPr/>
+      <p:sp>
+        <p:nvSpPr>
+          <p:cNvPr id="3" name="文本框 2"/>
+          <p:cNvSpPr txBox="1"/>
+          <p:nvPr/>
+        </p:nvSpPr>
+        <p:spPr>
+          <a:xfrm>
+            <a:off x="1156335" y="2227580"/>
+            <a:ext cx="4857750" cy="398780"/>
+          </a:xfrm>
+          <a:prstGeom prst="rect">
+            <a:avLst/>
+          </a:prstGeom>
+          <a:noFill/>
+        </p:spPr>
+        <p:txBody>
+          <a:bodyPr wrap="square" rtlCol="0">
+            <a:spAutoFit/>
+          </a:bodyPr>
+          <a:p>
+            <a:r>
+              <a:rPr lang="en-US" altLang="zh-CN" sz="2000"/>
+              <a:t>GC </a:t>
+            </a:r>
+            <a:r>
+              <a:rPr lang="zh-CN" altLang="en-US" sz="2000"/>
+              <a:t>算法的费用确实小于纯模型自由算法。</a:t>
+            </a:r>
+            <a:endParaRPr lang="zh-CN" altLang="en-US" sz="2000"/>
+          </a:p>
+        </p:txBody>
+      </p:sp>
+      <p:sp>
+        <p:nvSpPr>
+          <p:cNvPr id="4" name="文本框 3"/>
+          <p:cNvSpPr txBox="1"/>
+          <p:nvPr/>
+        </p:nvSpPr>
+        <p:spPr>
+          <a:xfrm>
+            <a:off x="808990" y="1678305"/>
+            <a:ext cx="4064000" cy="398780"/>
+          </a:xfrm>
+          <a:prstGeom prst="rect">
+            <a:avLst/>
+          </a:prstGeom>
+          <a:noFill/>
+        </p:spPr>
+        <p:txBody>
+          <a:bodyPr wrap="square" rtlCol="0">
+            <a:spAutoFit/>
+          </a:bodyPr>
+          <a:p>
+            <a:r>
+              <a:rPr lang="zh-CN" altLang="en-US" sz="2000"/>
+              <a:t>通过复现结果，我们可以知道：</a:t>
+            </a:r>
+            <a:endParaRPr lang="zh-CN" altLang="en-US" sz="2000"/>
+          </a:p>
+        </p:txBody>
+      </p:sp>
+      <p:sp>
+        <p:nvSpPr>
+          <p:cNvPr id="5" name="文本框 4"/>
+          <p:cNvSpPr txBox="1"/>
+          <p:nvPr/>
+        </p:nvSpPr>
+        <p:spPr>
+          <a:xfrm>
+            <a:off x="1156335" y="2727325"/>
+            <a:ext cx="2712085" cy="398780"/>
+          </a:xfrm>
+          <a:prstGeom prst="rect">
+            <a:avLst/>
+          </a:prstGeom>
+          <a:noFill/>
+        </p:spPr>
+        <p:txBody>
+          <a:bodyPr wrap="square" rtlCol="0">
+            <a:spAutoFit/>
+          </a:bodyPr>
+          <a:p>
+            <a:r>
+              <a:rPr lang="zh-CN" altLang="en-US" sz="2000"/>
+              <a:t>函数参数会影响费用。</a:t>
+            </a:r>
+            <a:endParaRPr lang="zh-CN" altLang="en-US" sz="2000"/>
+          </a:p>
+        </p:txBody>
+      </p:sp>
+      <p:sp>
+        <p:nvSpPr>
+          <p:cNvPr id="7" name="文本框 6"/>
+          <p:cNvSpPr txBox="1"/>
+          <p:nvPr/>
+        </p:nvSpPr>
+        <p:spPr>
+          <a:xfrm>
+            <a:off x="860425" y="3959860"/>
+            <a:ext cx="10471150" cy="706755"/>
+          </a:xfrm>
+          <a:prstGeom prst="rect">
+            <a:avLst/>
+          </a:prstGeom>
+          <a:noFill/>
+        </p:spPr>
+        <p:txBody>
+          <a:bodyPr wrap="square" rtlCol="0">
+            <a:spAutoFit/>
+          </a:bodyPr>
+          <a:p>
+            <a:r>
+              <a:rPr lang="zh-CN" altLang="en-US" sz="2000"/>
+              <a:t>复现实验验证了补偿模型的核心机制：</a:t>
+            </a:r>
+            <a:endParaRPr lang="zh-CN" altLang="en-US" sz="2000"/>
+          </a:p>
+          <a:p>
+            <a:pPr indent="457200"/>
+            <a:r>
+              <a:rPr lang="zh-CN" altLang="en-US" sz="2000"/>
+              <a:t>少量真实梯度更新校准大量模型梯度更新，从而降低达到相同精度所需的函数评估次数。</a:t>
+            </a:r>
+            <a:endParaRPr lang="en-US" altLang="zh-CN" sz="2000"/>
+          </a:p>
+        </p:txBody>
+      </p:sp>
+    </p:spTree>
+    <p:custDataLst>
+      <p:tags r:id="rId1"/>
+    </p:custDataLst>
+  </p:cSld>
+  <p:clrMapOvr>
+    <a:masterClrMapping/>
+  </p:clrMapOvr>
+</p:sld>
+</file>
+
 <file path=ppt/slides/slide2.xml><?xml version="1.0" encoding="utf-8"?>
+<p:sld xmlns:a="http://schemas.openxmlformats.org/drawingml/2006/main" xmlns:r="http://schemas.openxmlformats.org/officeDocument/2006/relationships" xmlns:p="http://schemas.openxmlformats.org/presentationml/2006/main">
+  <p:cSld>
+    <p:spTree>
+      <p:nvGrpSpPr>
+        <p:cNvPr id="1" name=""/>
+        <p:cNvGrpSpPr/>
+        <p:nvPr/>
+      </p:nvGrpSpPr>
+      <p:grpSpPr/>
+      <p:sp>
+        <p:nvSpPr>
+          <p:cNvPr id="4" name="文本框 3"/>
+          <p:cNvSpPr txBox="1"/>
+          <p:nvPr/>
+        </p:nvSpPr>
+        <p:spPr>
+          <a:xfrm>
+            <a:off x="4682490" y="2235835"/>
+            <a:ext cx="3353435" cy="829945"/>
+          </a:xfrm>
+          <a:prstGeom prst="rect">
+            <a:avLst/>
+          </a:prstGeom>
+          <a:noFill/>
+        </p:spPr>
+        <p:txBody>
+          <a:bodyPr wrap="square" rtlCol="0">
+            <a:spAutoFit/>
+          </a:bodyPr>
+          <a:p>
+            <a:r>
+              <a:rPr lang="zh-CN" altLang="en-US" sz="4800"/>
+              <a:t>论文内容</a:t>
+            </a:r>
+            <a:endParaRPr lang="zh-CN" altLang="en-US" sz="4800"/>
+          </a:p>
+        </p:txBody>
+      </p:sp>
+      <p:sp>
+        <p:nvSpPr>
+          <p:cNvPr id="5" name="文本框 4"/>
+          <p:cNvSpPr txBox="1"/>
+          <p:nvPr/>
+        </p:nvSpPr>
+        <p:spPr>
+          <a:xfrm>
+            <a:off x="4682490" y="3117215"/>
+            <a:ext cx="3353435" cy="829945"/>
+          </a:xfrm>
+          <a:prstGeom prst="rect">
+            <a:avLst/>
+          </a:prstGeom>
+          <a:noFill/>
+        </p:spPr>
+        <p:txBody>
+          <a:bodyPr wrap="square" rtlCol="0">
+            <a:spAutoFit/>
+          </a:bodyPr>
+          <a:p>
+            <a:r>
+              <a:rPr lang="zh-CN" altLang="en-US" sz="4800">
+                <a:solidFill>
+                  <a:schemeClr val="bg2"/>
+                </a:solidFill>
+              </a:rPr>
+              <a:t>代码复现</a:t>
+            </a:r>
+            <a:endParaRPr lang="zh-CN" altLang="en-US" sz="4800">
+              <a:solidFill>
+                <a:schemeClr val="bg2"/>
+              </a:solidFill>
+            </a:endParaRPr>
+          </a:p>
+        </p:txBody>
+      </p:sp>
+      <p:sp>
+        <p:nvSpPr>
+          <p:cNvPr id="6" name="文本框 5"/>
+          <p:cNvSpPr txBox="1"/>
+          <p:nvPr/>
+        </p:nvSpPr>
+        <p:spPr>
+          <a:xfrm>
+            <a:off x="2037080" y="2137410"/>
+            <a:ext cx="990600" cy="1753235"/>
+          </a:xfrm>
+          <a:prstGeom prst="rect">
+            <a:avLst/>
+          </a:prstGeom>
+          <a:noFill/>
+        </p:spPr>
+        <p:txBody>
+          <a:bodyPr wrap="square" rtlCol="0">
+            <a:spAutoFit/>
+          </a:bodyPr>
+          <a:p>
+            <a:r>
+              <a:rPr lang="zh-CN" altLang="en-US" sz="5400">
+                <a:ln w="15875"/>
+                <a:gradFill>
+                  <a:gsLst>
+                    <a:gs pos="0">
+                      <a:schemeClr val="accent1">
+                        <a:lumOff val="-19998"/>
+                        <a:satOff val="20000"/>
+                      </a:schemeClr>
+                    </a:gs>
+                    <a:gs pos="100000">
+                      <a:schemeClr val="accent1">
+                        <a:lumOff val="15000"/>
+                        <a:satOff val="-14998"/>
+                      </a:schemeClr>
+                    </a:gs>
+                  </a:gsLst>
+                  <a:lin ang="0" scaled="0"/>
+                </a:gradFill>
+                <a:effectLst/>
+              </a:rPr>
+              <a:t>目录</a:t>
+            </a:r>
+            <a:endParaRPr lang="zh-CN" altLang="en-US" sz="5400">
+              <a:ln w="15875"/>
+              <a:gradFill>
+                <a:gsLst>
+                  <a:gs pos="0">
+                    <a:schemeClr val="accent1">
+                      <a:lumOff val="-19998"/>
+                      <a:satOff val="20000"/>
+                    </a:schemeClr>
+                  </a:gs>
+                  <a:gs pos="100000">
+                    <a:schemeClr val="accent1">
+                      <a:lumOff val="15000"/>
+                      <a:satOff val="-14998"/>
+                    </a:schemeClr>
+                  </a:gs>
+                </a:gsLst>
+                <a:lin ang="0" scaled="0"/>
+              </a:gradFill>
+              <a:effectLst/>
+            </a:endParaRPr>
+          </a:p>
+        </p:txBody>
+      </p:sp>
+    </p:spTree>
+    <p:custDataLst>
+      <p:tags r:id="rId1"/>
+    </p:custDataLst>
+  </p:cSld>
+  <p:clrMapOvr>
+    <a:masterClrMapping/>
+  </p:clrMapOvr>
+</p:sld>
+</file>
+
+<file path=ppt/slides/slide3.xml><?xml version="1.0" encoding="utf-8"?>
 <p:sld xmlns:a="http://schemas.openxmlformats.org/drawingml/2006/main" xmlns:r="http://schemas.openxmlformats.org/officeDocument/2006/relationships" xmlns:p="http://schemas.openxmlformats.org/presentationml/2006/main">
   <p:cSld>
     <p:spTree>
@@ -3176,30 +5431,6710 @@
           </a:p>
         </p:txBody>
       </p:sp>
+      <p:graphicFrame>
+        <p:nvGraphicFramePr>
+          <p:cNvPr id="5" name="表格 4"/>
+          <p:cNvGraphicFramePr/>
+          <p:nvPr/>
+        </p:nvGraphicFramePr>
+        <p:xfrm>
+          <a:off x="657860" y="1559560"/>
+          <a:ext cx="10698480" cy="3519805"/>
+        </p:xfrm>
+        <a:graphic>
+          <a:graphicData uri="http://schemas.openxmlformats.org/drawingml/2006/table">
+            <a:tbl>
+              <a:tblPr firstRow="1" bandRow="1">
+                <a:tableStyleId>{5C22544A-7EE6-4342-B048-85BDC9FD1C3A}</a:tableStyleId>
+              </a:tblPr>
+              <a:tblGrid>
+                <a:gridCol w="5408295"/>
+                <a:gridCol w="5290185"/>
+              </a:tblGrid>
+              <a:tr h="716915">
+                <a:tc>
+                  <a:txBody>
+                    <a:bodyPr/>
+                    <a:p>
+                      <a:pPr algn="ctr">
+                        <a:buNone/>
+                      </a:pPr>
+                      <a:r>
+                        <a:rPr lang="zh-CN" altLang="en-US" sz="4000"/>
+                        <a:t>模型自由</a:t>
+                      </a:r>
+                      <a:endParaRPr lang="zh-CN" altLang="en-US" sz="4000"/>
+                    </a:p>
+                  </a:txBody>
+                  <a:tcPr/>
+                </a:tc>
+                <a:tc>
+                  <a:txBody>
+                    <a:bodyPr/>
+                    <a:p>
+                      <a:pPr algn="ctr">
+                        <a:buNone/>
+                      </a:pPr>
+                      <a:r>
+                        <a:rPr lang="zh-CN" altLang="en-US" sz="4000"/>
+                        <a:t>模型基础</a:t>
+                      </a:r>
+                      <a:endParaRPr lang="zh-CN" altLang="en-US" sz="4000"/>
+                    </a:p>
+                  </a:txBody>
+                  <a:tcPr/>
+                </a:tc>
+              </a:tr>
+              <a:tr h="695325">
+                <a:tc>
+                  <a:txBody>
+                    <a:bodyPr/>
+                    <a:p>
+                      <a:pPr algn="ctr">
+                        <a:buNone/>
+                      </a:pPr>
+                      <a:r>
+                        <a:rPr lang="zh-CN" altLang="en-US" sz="2000"/>
+                        <a:t>不需要显式动力学模型</a:t>
+                      </a:r>
+                      <a:endParaRPr lang="zh-CN" altLang="en-US" sz="2000"/>
+                    </a:p>
+                  </a:txBody>
+                  <a:tcPr/>
+                </a:tc>
+                <a:tc>
+                  <a:txBody>
+                    <a:bodyPr/>
+                    <a:p>
+                      <a:pPr algn="ctr">
+                        <a:buNone/>
+                      </a:pPr>
+                      <a:r>
+                        <a:rPr lang="zh-CN" altLang="en-US" sz="2000"/>
+                        <a:t>使用显式动力学模型</a:t>
+                      </a:r>
+                      <a:endParaRPr lang="zh-CN" altLang="en-US" sz="2000"/>
+                    </a:p>
+                  </a:txBody>
+                  <a:tcPr/>
+                </a:tc>
+              </a:tr>
+              <a:tr h="695325">
+                <a:tc>
+                  <a:txBody>
+                    <a:bodyPr/>
+                    <a:p>
+                      <a:pPr algn="ctr">
+                        <a:buNone/>
+                      </a:pPr>
+                      <a:r>
+                        <a:rPr lang="zh-CN" altLang="en-US" sz="2000"/>
+                        <a:t>能处理未知、复杂的系统</a:t>
+                      </a:r>
+                      <a:endParaRPr lang="zh-CN" altLang="en-US" sz="2000"/>
+                    </a:p>
+                  </a:txBody>
+                  <a:tcPr/>
+                </a:tc>
+                <a:tc>
+                  <a:txBody>
+                    <a:bodyPr/>
+                    <a:p>
+                      <a:pPr algn="ctr">
+                        <a:buNone/>
+                      </a:pPr>
+                      <a:r>
+                        <a:rPr lang="zh-CN" altLang="en-US" sz="2000"/>
+                        <a:t>难以处理复杂的系统</a:t>
+                      </a:r>
+                      <a:endParaRPr lang="zh-CN" altLang="en-US" sz="2000"/>
+                    </a:p>
+                  </a:txBody>
+                  <a:tcPr/>
+                </a:tc>
+              </a:tr>
+              <a:tr h="716915">
+                <a:tc>
+                  <a:txBody>
+                    <a:bodyPr/>
+                    <a:p>
+                      <a:pPr algn="ctr">
+                        <a:buNone/>
+                      </a:pPr>
+                      <a:r>
+                        <a:rPr lang="zh-CN" altLang="en-US" sz="2000">
+                          <a:sym typeface="+mn-ea"/>
+                        </a:rPr>
+                        <a:t>数据需求高，数据采集所需费用高</a:t>
+                      </a:r>
+                      <a:endParaRPr lang="zh-CN" altLang="en-US" sz="2000"/>
+                    </a:p>
+                  </a:txBody>
+                  <a:tcPr/>
+                </a:tc>
+                <a:tc>
+                  <a:txBody>
+                    <a:bodyPr/>
+                    <a:p>
+                      <a:pPr algn="ctr">
+                        <a:buNone/>
+                      </a:pPr>
+                      <a:r>
+                        <a:rPr lang="zh-CN" altLang="en-US" sz="2000">
+                          <a:sym typeface="+mn-ea"/>
+                        </a:rPr>
+                        <a:t>数据需求低，数据采集所需费用低</a:t>
+                      </a:r>
+                      <a:endParaRPr lang="zh-CN" altLang="en-US" sz="2000"/>
+                    </a:p>
+                    <a:p>
+                      <a:pPr algn="ctr">
+                        <a:buNone/>
+                      </a:pPr>
+                      <a:endParaRPr lang="zh-CN" altLang="en-US" sz="2000"/>
+                    </a:p>
+                  </a:txBody>
+                  <a:tcPr/>
+                </a:tc>
+              </a:tr>
+              <a:tr h="695325">
+                <a:tc>
+                  <a:txBody>
+                    <a:bodyPr/>
+                    <a:p>
+                      <a:pPr algn="ctr">
+                        <a:buNone/>
+                      </a:pPr>
+                      <a:r>
+                        <a:rPr lang="zh-CN" altLang="en-US" sz="2000"/>
+                        <a:t>没有模型偏差</a:t>
+                      </a:r>
+                      <a:endParaRPr lang="zh-CN" altLang="en-US" sz="2000"/>
+                    </a:p>
+                  </a:txBody>
+                  <a:tcPr/>
+                </a:tc>
+                <a:tc>
+                  <a:txBody>
+                    <a:bodyPr/>
+                    <a:p>
+                      <a:pPr algn="ctr">
+                        <a:buNone/>
+                      </a:pPr>
+                      <a:r>
+                        <a:rPr lang="zh-CN" altLang="en-US" sz="2000"/>
+                        <a:t>模型不准确时，模型偏差大</a:t>
+                      </a:r>
+                      <a:endParaRPr lang="zh-CN" altLang="en-US" sz="2000"/>
+                    </a:p>
+                  </a:txBody>
+                  <a:tcPr/>
+                </a:tc>
+              </a:tr>
+            </a:tbl>
+          </a:graphicData>
+        </a:graphic>
+      </p:graphicFrame>
       <p:sp>
         <p:nvSpPr>
-          <p:cNvPr id="3" name="内容占位符 2"/>
-          <p:cNvSpPr>
-            <a:spLocks noGrp="1"/>
-          </p:cNvSpPr>
-          <p:nvPr>
-            <p:ph idx="1"/>
-            <p:custDataLst>
-              <p:tags r:id="rId2"/>
-            </p:custDataLst>
-          </p:nvPr>
+          <p:cNvPr id="7" name="文本框 6"/>
+          <p:cNvSpPr txBox="1"/>
+          <p:nvPr/>
         </p:nvSpPr>
-        <p:spPr/>
+        <p:spPr>
+          <a:xfrm>
+            <a:off x="659130" y="5427980"/>
+            <a:ext cx="10697210" cy="1014730"/>
+          </a:xfrm>
+          <a:prstGeom prst="rect">
+            <a:avLst/>
+          </a:prstGeom>
+          <a:noFill/>
+        </p:spPr>
         <p:txBody>
-          <a:bodyPr/>
-          <a:p>
-            <a:endParaRPr lang="zh-CN" altLang="en-US"/>
+          <a:bodyPr wrap="square" rtlCol="0">
+            <a:spAutoFit/>
+          </a:bodyPr>
+          <a:p>
+            <a:r>
+              <a:rPr lang="zh-CN" altLang="en-US" sz="2000"/>
+              <a:t>两种模型各有利弊，像是两个极端</a:t>
+            </a:r>
+            <a:r>
+              <a:rPr lang="en-US" altLang="zh-CN" sz="2000"/>
+              <a:t>——</a:t>
+            </a:r>
+            <a:r>
+              <a:rPr lang="zh-CN" altLang="en-US" sz="2000"/>
+              <a:t>不妨考虑，将二者结合起来：利用便宜的模型基础得到初步解，再利用模型自由调整解和模型基础的某些参数，然后重复求解和调整模型的过程。这样说不定既能保证最终答案的准确性，又能降低费用。</a:t>
+            </a:r>
+            <a:endParaRPr lang="zh-CN" altLang="en-US" sz="2000"/>
+          </a:p>
+        </p:txBody>
+      </p:sp>
+    </p:spTree>
+    <p:custDataLst>
+      <p:tags r:id="rId2"/>
+    </p:custDataLst>
+  </p:cSld>
+  <p:clrMapOvr>
+    <a:masterClrMapping/>
+  </p:clrMapOvr>
+  <p:timing>
+    <p:tnLst>
+      <p:par>
+        <p:cTn id="1" dur="indefinite" restart="never" nodeType="tmRoot">
+          <p:childTnLst>
+            <p:seq concurrent="1" nextAc="seek">
+              <p:cTn id="2" dur="indefinite" nodeType="mainSeq">
+                <p:childTnLst>
+                  <p:par>
+                    <p:cTn id="3" fill="hold">
+                      <p:stCondLst>
+                        <p:cond delay="indefinite"/>
+                      </p:stCondLst>
+                      <p:childTnLst>
+                        <p:par>
+                          <p:cTn id="4" fill="hold">
+                            <p:stCondLst>
+                              <p:cond delay="0"/>
+                            </p:stCondLst>
+                            <p:childTnLst>
+                              <p:par>
+                                <p:cTn id="5" presetID="2" presetClass="entr" presetSubtype="4" fill="hold" grpId="0" nodeType="clickEffect">
+                                  <p:stCondLst>
+                                    <p:cond delay="0"/>
+                                  </p:stCondLst>
+                                  <p:childTnLst>
+                                    <p:set>
+                                      <p:cBhvr>
+                                        <p:cTn id="6" dur="1" fill="hold">
+                                          <p:stCondLst>
+                                            <p:cond delay="0"/>
+                                          </p:stCondLst>
+                                        </p:cTn>
+                                        <p:tgtEl>
+                                          <p:spTgt spid="7"/>
+                                        </p:tgtEl>
+                                        <p:attrNameLst>
+                                          <p:attrName>style.visibility</p:attrName>
+                                        </p:attrNameLst>
+                                      </p:cBhvr>
+                                      <p:to>
+                                        <p:strVal val="visible"/>
+                                      </p:to>
+                                    </p:set>
+                                    <p:anim calcmode="lin" valueType="num">
+                                      <p:cBhvr additive="base">
+                                        <p:cTn id="7" dur="500" fill="hold"/>
+                                        <p:tgtEl>
+                                          <p:spTgt spid="7"/>
+                                        </p:tgtEl>
+                                        <p:attrNameLst>
+                                          <p:attrName>ppt_x</p:attrName>
+                                        </p:attrNameLst>
+                                      </p:cBhvr>
+                                      <p:tavLst>
+                                        <p:tav tm="0">
+                                          <p:val>
+                                            <p:strVal val="#ppt_x"/>
+                                          </p:val>
+                                        </p:tav>
+                                        <p:tav tm="100000">
+                                          <p:val>
+                                            <p:strVal val="#ppt_x"/>
+                                          </p:val>
+                                        </p:tav>
+                                      </p:tavLst>
+                                    </p:anim>
+                                    <p:anim calcmode="lin" valueType="num">
+                                      <p:cBhvr additive="base">
+                                        <p:cTn id="8" dur="500" fill="hold"/>
+                                        <p:tgtEl>
+                                          <p:spTgt spid="7"/>
+                                        </p:tgtEl>
+                                        <p:attrNameLst>
+                                          <p:attrName>ppt_y</p:attrName>
+                                        </p:attrNameLst>
+                                      </p:cBhvr>
+                                      <p:tavLst>
+                                        <p:tav tm="0">
+                                          <p:val>
+                                            <p:strVal val="1+#ppt_h/2"/>
+                                          </p:val>
+                                        </p:tav>
+                                        <p:tav tm="100000">
+                                          <p:val>
+                                            <p:strVal val="#ppt_y"/>
+                                          </p:val>
+                                        </p:tav>
+                                      </p:tavLst>
+                                    </p:anim>
+                                  </p:childTnLst>
+                                </p:cTn>
+                              </p:par>
+                            </p:childTnLst>
+                          </p:cTn>
+                        </p:par>
+                      </p:childTnLst>
+                    </p:cTn>
+                  </p:par>
+                </p:childTnLst>
+              </p:cTn>
+              <p:prevCondLst>
+                <p:cond evt="onPrev" delay="0">
+                  <p:tgtEl>
+                    <p:sldTgt/>
+                  </p:tgtEl>
+                </p:cond>
+              </p:prevCondLst>
+              <p:nextCondLst>
+                <p:cond evt="onNext" delay="0">
+                  <p:tgtEl>
+                    <p:sldTgt/>
+                  </p:tgtEl>
+                </p:cond>
+              </p:nextCondLst>
+            </p:seq>
+          </p:childTnLst>
+        </p:cTn>
+      </p:par>
+    </p:tnLst>
+    <p:bldLst>
+      <p:bldP spid="7" grpId="0"/>
+      <p:bldP spid="7" grpId="1"/>
+    </p:bldLst>
+  </p:timing>
+</p:sld>
+</file>
+
+<file path=ppt/slides/slide4.xml><?xml version="1.0" encoding="utf-8"?>
+<p:sld xmlns:a="http://schemas.openxmlformats.org/drawingml/2006/main" xmlns:r="http://schemas.openxmlformats.org/officeDocument/2006/relationships" xmlns:p="http://schemas.openxmlformats.org/presentationml/2006/main">
+  <p:cSld>
+    <p:bg>
+      <p:bgPr>
+        <a:noFill/>
+        <a:effectLst/>
+      </p:bgPr>
+    </p:bg>
+    <p:spTree>
+      <p:nvGrpSpPr>
+        <p:cNvPr id="1" name=""/>
+        <p:cNvGrpSpPr/>
+        <p:nvPr/>
+      </p:nvGrpSpPr>
+      <p:grpSpPr/>
+      <p:sp>
+        <p:nvSpPr>
+          <p:cNvPr id="4" name="文本框 3"/>
+          <p:cNvSpPr txBox="1"/>
+          <p:nvPr/>
+        </p:nvSpPr>
+        <p:spPr>
+          <a:xfrm>
+            <a:off x="859790" y="1819910"/>
+            <a:ext cx="5121275" cy="398780"/>
+          </a:xfrm>
+          <a:prstGeom prst="rect">
+            <a:avLst/>
+          </a:prstGeom>
+          <a:noFill/>
+        </p:spPr>
+        <p:txBody>
+          <a:bodyPr wrap="square" rtlCol="0">
+            <a:spAutoFit/>
+          </a:bodyPr>
+          <a:p>
+            <a:r>
+              <a:rPr lang="zh-CN" altLang="en-US" sz="2000"/>
+              <a:t>研究对象是非线性的动力系统，表示为：</a:t>
+            </a:r>
+            <a:endParaRPr lang="zh-CN" altLang="en-US" sz="2000"/>
+          </a:p>
+        </p:txBody>
+      </p:sp>
+      <mc:AlternateContent xmlns:mc="http://schemas.openxmlformats.org/markup-compatibility/2006">
+        <mc:Choice xmlns:a14="http://schemas.microsoft.com/office/drawing/2010/main" Requires="a14">
+          <p:sp>
+            <p:nvSpPr>
+              <p:cNvPr id="5" name="文本框 4"/>
+              <p:cNvSpPr txBox="1"/>
+              <p:nvPr/>
+            </p:nvSpPr>
+            <p:spPr>
+              <a:xfrm>
+                <a:off x="4221480" y="2188210"/>
+                <a:ext cx="3801110" cy="368300"/>
+              </a:xfrm>
+              <a:prstGeom prst="rect">
+                <a:avLst/>
+              </a:prstGeom>
+              <a:noFill/>
+            </p:spPr>
+            <p:txBody>
+              <a:bodyPr wrap="none" rtlCol="0" anchor="t">
+                <a:noAutofit/>
+              </a:bodyPr>
+              <a:p>
+                <a:pPr algn="l"/>
+                <a14:m>
+                  <m:oMathPara xmlns:m="http://schemas.openxmlformats.org/officeDocument/2006/math">
+                    <m:oMathParaPr>
+                      <m:jc m:val="centerGroup"/>
+                    </m:oMathParaPr>
+                    <m:oMath xmlns:m="http://schemas.openxmlformats.org/officeDocument/2006/math">
+                      <m:sSub>
+                        <m:sSubPr>
+                          <m:ctrlPr>
+                            <a:rPr lang="en-US" altLang="zh-CN" sz="2000" i="1">
+                              <a:latin typeface="Cambria Math" panose="02040503050406030204" charset="0"/>
+                              <a:cs typeface="Cambria Math" panose="02040503050406030204" charset="0"/>
+                            </a:rPr>
+                          </m:ctrlPr>
+                        </m:sSubPr>
+                        <m:e>
+                          <m:r>
+                            <a:rPr lang="en-US" altLang="zh-CN" sz="2000" i="1">
+                              <a:latin typeface="Cambria Math" panose="02040503050406030204" charset="0"/>
+                              <a:cs typeface="Cambria Math" panose="02040503050406030204" charset="0"/>
+                            </a:rPr>
+                            <m:t>𝑥</m:t>
+                          </m:r>
+                        </m:e>
+                        <m:sub>
+                          <m:r>
+                            <a:rPr lang="en-US" altLang="zh-CN" sz="2000" i="1">
+                              <a:latin typeface="Cambria Math" panose="02040503050406030204" charset="0"/>
+                              <a:cs typeface="Cambria Math" panose="02040503050406030204" charset="0"/>
+                            </a:rPr>
+                            <m:t>𝑡</m:t>
+                          </m:r>
+                          <m:r>
+                            <a:rPr lang="en-US" altLang="zh-CN" sz="2000" i="1">
+                              <a:latin typeface="Cambria Math" panose="02040503050406030204" charset="0"/>
+                              <a:cs typeface="Cambria Math" panose="02040503050406030204" charset="0"/>
+                            </a:rPr>
+                            <m:t>+</m:t>
+                          </m:r>
+                          <m:r>
+                            <a:rPr lang="en-US" altLang="zh-CN" sz="2000" i="1">
+                              <a:latin typeface="Cambria Math" panose="02040503050406030204" charset="0"/>
+                              <a:cs typeface="Cambria Math" panose="02040503050406030204" charset="0"/>
+                            </a:rPr>
+                            <m:t>1</m:t>
+                          </m:r>
+                        </m:sub>
+                      </m:sSub>
+                      <m:r>
+                        <a:rPr lang="en-US" altLang="zh-CN" sz="2000" i="1">
+                          <a:latin typeface="Cambria Math" panose="02040503050406030204" charset="0"/>
+                          <a:cs typeface="Cambria Math" panose="02040503050406030204" charset="0"/>
+                        </a:rPr>
+                        <m:t>=</m:t>
+                      </m:r>
+                      <m:r>
+                        <a:rPr lang="en-US" altLang="zh-CN" sz="2000" i="1">
+                          <a:latin typeface="Cambria Math" panose="02040503050406030204" charset="0"/>
+                          <a:cs typeface="Cambria Math" panose="02040503050406030204" charset="0"/>
+                        </a:rPr>
+                        <m:t>𝐴</m:t>
+                      </m:r>
+                      <m:sSub>
+                        <m:sSubPr>
+                          <m:ctrlPr>
+                            <a:rPr lang="en-US" altLang="zh-CN" sz="2000" i="1">
+                              <a:latin typeface="Cambria Math" panose="02040503050406030204" charset="0"/>
+                              <a:cs typeface="Cambria Math" panose="02040503050406030204" charset="0"/>
+                            </a:rPr>
+                          </m:ctrlPr>
+                        </m:sSubPr>
+                        <m:e>
+                          <m:r>
+                            <a:rPr lang="en-US" altLang="zh-CN" sz="2000" i="1">
+                              <a:latin typeface="Cambria Math" panose="02040503050406030204" charset="0"/>
+                              <a:cs typeface="Cambria Math" panose="02040503050406030204" charset="0"/>
+                            </a:rPr>
+                            <m:t>𝑥</m:t>
+                          </m:r>
+                        </m:e>
+                        <m:sub>
+                          <m:r>
+                            <a:rPr lang="en-US" altLang="zh-CN" sz="2000" i="1">
+                              <a:latin typeface="Cambria Math" panose="02040503050406030204" charset="0"/>
+                              <a:cs typeface="Cambria Math" panose="02040503050406030204" charset="0"/>
+                            </a:rPr>
+                            <m:t>𝑡</m:t>
+                          </m:r>
+                        </m:sub>
+                      </m:sSub>
+                      <m:r>
+                        <a:rPr lang="en-US" altLang="zh-CN" sz="2000" i="1">
+                          <a:latin typeface="Cambria Math" panose="02040503050406030204" charset="0"/>
+                          <a:cs typeface="Cambria Math" panose="02040503050406030204" charset="0"/>
+                        </a:rPr>
+                        <m:t>+</m:t>
+                      </m:r>
+                      <m:r>
+                        <a:rPr lang="en-US" altLang="zh-CN" sz="2000" i="1">
+                          <a:latin typeface="Cambria Math" panose="02040503050406030204" charset="0"/>
+                          <a:cs typeface="Cambria Math" panose="02040503050406030204" charset="0"/>
+                        </a:rPr>
+                        <m:t>𝐵</m:t>
+                      </m:r>
+                      <m:sSub>
+                        <m:sSubPr>
+                          <m:ctrlPr>
+                            <a:rPr lang="en-US" altLang="zh-CN" sz="2000" i="1">
+                              <a:latin typeface="Cambria Math" panose="02040503050406030204" charset="0"/>
+                              <a:cs typeface="Cambria Math" panose="02040503050406030204" charset="0"/>
+                            </a:rPr>
+                          </m:ctrlPr>
+                        </m:sSubPr>
+                        <m:e>
+                          <m:r>
+                            <a:rPr lang="en-US" altLang="zh-CN" sz="2000" i="1">
+                              <a:latin typeface="Cambria Math" panose="02040503050406030204" charset="0"/>
+                              <a:cs typeface="Cambria Math" panose="02040503050406030204" charset="0"/>
+                            </a:rPr>
+                            <m:t>𝑢</m:t>
+                          </m:r>
+                        </m:e>
+                        <m:sub>
+                          <m:r>
+                            <a:rPr lang="en-US" altLang="zh-CN" sz="2000" i="1">
+                              <a:latin typeface="Cambria Math" panose="02040503050406030204" charset="0"/>
+                              <a:cs typeface="Cambria Math" panose="02040503050406030204" charset="0"/>
+                            </a:rPr>
+                            <m:t>𝑡</m:t>
+                          </m:r>
+                        </m:sub>
+                      </m:sSub>
+                      <m:r>
+                        <a:rPr lang="en-US" altLang="zh-CN" sz="2000" i="1">
+                          <a:latin typeface="Cambria Math" panose="02040503050406030204" charset="0"/>
+                          <a:cs typeface="Cambria Math" panose="02040503050406030204" charset="0"/>
+                        </a:rPr>
+                        <m:t>+</m:t>
+                      </m:r>
+                      <m:r>
+                        <a:rPr lang="en-US" altLang="zh-CN" sz="2000" i="1">
+                          <a:latin typeface="Cambria Math" panose="02040503050406030204" charset="0"/>
+                          <a:cs typeface="Cambria Math" panose="02040503050406030204" charset="0"/>
+                        </a:rPr>
+                        <m:t>ℎ</m:t>
+                      </m:r>
+                      <m:r>
+                        <a:rPr lang="en-US" altLang="zh-CN" sz="2000" i="1">
+                          <a:latin typeface="Cambria Math" panose="02040503050406030204" charset="0"/>
+                          <a:cs typeface="Cambria Math" panose="02040503050406030204" charset="0"/>
+                        </a:rPr>
+                        <m:t>(</m:t>
+                      </m:r>
+                      <m:sSub>
+                        <m:sSubPr>
+                          <m:ctrlPr>
+                            <a:rPr lang="en-US" altLang="zh-CN" sz="2000" i="1">
+                              <a:latin typeface="Cambria Math" panose="02040503050406030204" charset="0"/>
+                              <a:cs typeface="Cambria Math" panose="02040503050406030204" charset="0"/>
+                            </a:rPr>
+                          </m:ctrlPr>
+                        </m:sSubPr>
+                        <m:e>
+                          <m:r>
+                            <a:rPr lang="en-US" altLang="zh-CN" sz="2000" i="1">
+                              <a:latin typeface="Cambria Math" panose="02040503050406030204" charset="0"/>
+                              <a:cs typeface="Cambria Math" panose="02040503050406030204" charset="0"/>
+                            </a:rPr>
+                            <m:t>𝑥</m:t>
+                          </m:r>
+                        </m:e>
+                        <m:sub>
+                          <m:r>
+                            <a:rPr lang="en-US" altLang="zh-CN" sz="2000" i="1">
+                              <a:latin typeface="Cambria Math" panose="02040503050406030204" charset="0"/>
+                              <a:cs typeface="Cambria Math" panose="02040503050406030204" charset="0"/>
+                            </a:rPr>
+                            <m:t>𝑡</m:t>
+                          </m:r>
+                        </m:sub>
+                      </m:sSub>
+                      <m:r>
+                        <a:rPr lang="en-US" altLang="zh-CN" sz="2000" i="1">
+                          <a:latin typeface="Cambria Math" panose="02040503050406030204" charset="0"/>
+                          <a:cs typeface="Cambria Math" panose="02040503050406030204" charset="0"/>
+                        </a:rPr>
+                        <m:t>,</m:t>
+                      </m:r>
+                      <m:sSub>
+                        <m:sSubPr>
+                          <m:ctrlPr>
+                            <a:rPr lang="en-US" altLang="zh-CN" sz="2000" i="1">
+                              <a:latin typeface="Cambria Math" panose="02040503050406030204" charset="0"/>
+                              <a:cs typeface="Cambria Math" panose="02040503050406030204" charset="0"/>
+                            </a:rPr>
+                          </m:ctrlPr>
+                        </m:sSubPr>
+                        <m:e>
+                          <m:r>
+                            <a:rPr lang="en-US" altLang="zh-CN" sz="2000" i="1">
+                              <a:latin typeface="Cambria Math" panose="02040503050406030204" charset="0"/>
+                              <a:cs typeface="Cambria Math" panose="02040503050406030204" charset="0"/>
+                            </a:rPr>
+                            <m:t>𝑢</m:t>
+                          </m:r>
+                        </m:e>
+                        <m:sub>
+                          <m:r>
+                            <a:rPr lang="en-US" altLang="zh-CN" sz="2000" i="1">
+                              <a:latin typeface="Cambria Math" panose="02040503050406030204" charset="0"/>
+                              <a:cs typeface="Cambria Math" panose="02040503050406030204" charset="0"/>
+                            </a:rPr>
+                            <m:t>𝑡</m:t>
+                          </m:r>
+                        </m:sub>
+                      </m:sSub>
+                      <m:r>
+                        <a:rPr lang="en-US" altLang="zh-CN" sz="2000" i="1">
+                          <a:latin typeface="Cambria Math" panose="02040503050406030204" charset="0"/>
+                          <a:cs typeface="Cambria Math" panose="02040503050406030204" charset="0"/>
+                        </a:rPr>
+                        <m:t>)</m:t>
+                      </m:r>
+                    </m:oMath>
+                  </m:oMathPara>
+                </a14:m>
+                <a:endParaRPr lang="en-US" altLang="zh-CN" sz="2000" i="1">
+                  <a:latin typeface="Cambria Math" panose="02040503050406030204" charset="0"/>
+                  <a:cs typeface="Cambria Math" panose="02040503050406030204" charset="0"/>
+                </a:endParaRPr>
+              </a:p>
+            </p:txBody>
+          </p:sp>
+        </mc:Choice>
+        <mc:Fallback>
+          <p:sp>
+            <p:nvSpPr>
+              <p:cNvPr id="5" name="文本框 4"/>
+              <p:cNvSpPr txBox="1">
+                <a:spLocks noRot="1" noChangeAspect="1" noMove="1" noResize="1" noEditPoints="1" noAdjustHandles="1" noChangeArrowheads="1" noChangeShapeType="1" noTextEdit="1"/>
+              </p:cNvSpPr>
+              <p:nvPr/>
+            </p:nvSpPr>
+            <p:spPr>
+              <a:xfrm>
+                <a:off x="4221480" y="2188210"/>
+                <a:ext cx="3801110" cy="368300"/>
+              </a:xfrm>
+              <a:prstGeom prst="rect">
+                <a:avLst/>
+              </a:prstGeom>
+              <a:blipFill rotWithShape="1">
+                <a:blip r:embed="rId1"/>
+                <a:stretch>
+                  <a:fillRect/>
+                </a:stretch>
+              </a:blipFill>
+            </p:spPr>
+            <p:txBody>
+              <a:bodyPr/>
+              <a:lstStyle/>
+              <a:p>
+                <a:r>
+                  <a:rPr lang="zh-CN" altLang="en-US">
+                    <a:noFill/>
+                  </a:rPr>
+                  <a:t> </a:t>
+                </a:r>
+              </a:p>
+            </p:txBody>
+          </p:sp>
+        </mc:Fallback>
+      </mc:AlternateContent>
+      <mc:AlternateContent xmlns:mc="http://schemas.openxmlformats.org/markup-compatibility/2006">
+        <mc:Choice xmlns:a14="http://schemas.microsoft.com/office/drawing/2010/main" Requires="a14">
+          <p:sp>
+            <p:nvSpPr>
+              <p:cNvPr id="7" name="文本框 6"/>
+              <p:cNvSpPr txBox="1"/>
+              <p:nvPr/>
+            </p:nvSpPr>
+            <p:spPr>
+              <a:xfrm>
+                <a:off x="5417756" y="2556764"/>
+                <a:ext cx="1395095" cy="406400"/>
+              </a:xfrm>
+              <a:prstGeom prst="rect">
+                <a:avLst/>
+              </a:prstGeom>
+              <a:noFill/>
+            </p:spPr>
+            <p:txBody>
+              <a:bodyPr wrap="none" rtlCol="0" anchor="t">
+                <a:spAutoFit/>
+              </a:bodyPr>
+              <a:p>
+                <a:pPr algn="l"/>
+                <a14:m>
+                  <m:oMathPara xmlns:m="http://schemas.openxmlformats.org/officeDocument/2006/math">
+                    <m:oMathParaPr>
+                      <m:jc m:val="centerGroup"/>
+                    </m:oMathParaPr>
+                    <m:oMath xmlns:m="http://schemas.openxmlformats.org/officeDocument/2006/math">
+                      <m:sSub>
+                        <m:sSubPr>
+                          <m:ctrlPr>
+                            <a:rPr lang="en-US" altLang="zh-CN" sz="2000" i="1">
+                              <a:latin typeface="Cambria Math" panose="02040503050406030204" charset="0"/>
+                              <a:cs typeface="Cambria Math" panose="02040503050406030204" charset="0"/>
+                            </a:rPr>
+                          </m:ctrlPr>
+                        </m:sSubPr>
+                        <m:e>
+                          <m:r>
+                            <a:rPr lang="en-US" altLang="zh-CN" sz="2000" i="1">
+                              <a:latin typeface="Cambria Math" panose="02040503050406030204" charset="0"/>
+                              <a:cs typeface="Cambria Math" panose="02040503050406030204" charset="0"/>
+                            </a:rPr>
+                            <m:t>𝑢</m:t>
+                          </m:r>
+                        </m:e>
+                        <m:sub>
+                          <m:r>
+                            <a:rPr lang="en-US" altLang="zh-CN" sz="2000" i="1">
+                              <a:latin typeface="Cambria Math" panose="02040503050406030204" charset="0"/>
+                              <a:cs typeface="Cambria Math" panose="02040503050406030204" charset="0"/>
+                            </a:rPr>
+                            <m:t>𝑡</m:t>
+                          </m:r>
+                        </m:sub>
+                      </m:sSub>
+                      <m:r>
+                        <a:rPr lang="en-US" altLang="zh-CN" sz="2000" i="1">
+                          <a:latin typeface="Cambria Math" panose="02040503050406030204" charset="0"/>
+                          <a:cs typeface="Cambria Math" panose="02040503050406030204" charset="0"/>
+                        </a:rPr>
+                        <m:t>=−</m:t>
+                      </m:r>
+                      <m:r>
+                        <a:rPr lang="en-US" altLang="zh-CN" sz="2000" i="1">
+                          <a:latin typeface="Cambria Math" panose="02040503050406030204" charset="0"/>
+                          <a:cs typeface="Cambria Math" panose="02040503050406030204" charset="0"/>
+                        </a:rPr>
+                        <m:t>𝐾</m:t>
+                      </m:r>
+                      <m:sSub>
+                        <m:sSubPr>
+                          <m:ctrlPr>
+                            <a:rPr lang="en-US" altLang="zh-CN" sz="2000" i="1">
+                              <a:latin typeface="Cambria Math" panose="02040503050406030204" charset="0"/>
+                              <a:cs typeface="Cambria Math" panose="02040503050406030204" charset="0"/>
+                            </a:rPr>
+                          </m:ctrlPr>
+                        </m:sSubPr>
+                        <m:e>
+                          <m:r>
+                            <a:rPr lang="en-US" altLang="zh-CN" sz="2000" i="1">
+                              <a:latin typeface="Cambria Math" panose="02040503050406030204" charset="0"/>
+                              <a:cs typeface="Cambria Math" panose="02040503050406030204" charset="0"/>
+                            </a:rPr>
+                            <m:t>𝑥</m:t>
+                          </m:r>
+                        </m:e>
+                        <m:sub>
+                          <m:r>
+                            <a:rPr lang="en-US" altLang="zh-CN" sz="2000" i="1">
+                              <a:latin typeface="Cambria Math" panose="02040503050406030204" charset="0"/>
+                              <a:cs typeface="Cambria Math" panose="02040503050406030204" charset="0"/>
+                            </a:rPr>
+                            <m:t>𝑡</m:t>
+                          </m:r>
+                        </m:sub>
+                      </m:sSub>
+                    </m:oMath>
+                  </m:oMathPara>
+                </a14:m>
+                <a:endParaRPr lang="en-US" altLang="zh-CN" sz="2000" i="1">
+                  <a:latin typeface="Cambria Math" panose="02040503050406030204" charset="0"/>
+                  <a:cs typeface="Cambria Math" panose="02040503050406030204" charset="0"/>
+                </a:endParaRPr>
+              </a:p>
+            </p:txBody>
+          </p:sp>
+        </mc:Choice>
+        <mc:Fallback>
+          <p:sp>
+            <p:nvSpPr>
+              <p:cNvPr id="7" name="文本框 6"/>
+              <p:cNvSpPr txBox="1">
+                <a:spLocks noRot="1" noChangeAspect="1" noMove="1" noResize="1" noEditPoints="1" noAdjustHandles="1" noChangeArrowheads="1" noChangeShapeType="1" noTextEdit="1"/>
+              </p:cNvSpPr>
+              <p:nvPr/>
+            </p:nvSpPr>
+            <p:spPr>
+              <a:xfrm>
+                <a:off x="5417756" y="2556764"/>
+                <a:ext cx="1395095" cy="406400"/>
+              </a:xfrm>
+              <a:prstGeom prst="rect">
+                <a:avLst/>
+              </a:prstGeom>
+              <a:blipFill rotWithShape="1">
+                <a:blip r:embed="rId2"/>
+                <a:stretch>
+                  <a:fillRect l="-41" t="-63" r="41" b="62"/>
+                </a:stretch>
+              </a:blipFill>
+            </p:spPr>
+            <p:txBody>
+              <a:bodyPr/>
+              <a:lstStyle/>
+              <a:p>
+                <a:r>
+                  <a:rPr lang="zh-CN" altLang="en-US">
+                    <a:noFill/>
+                  </a:rPr>
+                  <a:t> </a:t>
+                </a:r>
+              </a:p>
+            </p:txBody>
+          </p:sp>
+        </mc:Fallback>
+      </mc:AlternateContent>
+      <p:sp>
+        <p:nvSpPr>
+          <p:cNvPr id="10" name="文本框 9"/>
+          <p:cNvSpPr txBox="1"/>
+          <p:nvPr/>
+        </p:nvSpPr>
+        <p:spPr>
+          <a:xfrm>
+            <a:off x="859790" y="2924810"/>
+            <a:ext cx="4672330" cy="398780"/>
+          </a:xfrm>
+          <a:prstGeom prst="rect">
+            <a:avLst/>
+          </a:prstGeom>
+          <a:noFill/>
+        </p:spPr>
+        <p:txBody>
+          <a:bodyPr wrap="square" rtlCol="0">
+            <a:spAutoFit/>
+          </a:bodyPr>
+          <a:p>
+            <a:r>
+              <a:rPr lang="zh-CN" altLang="en-US" sz="2000"/>
+              <a:t>我们的目标是最小化代价，代价表示为：</a:t>
+            </a:r>
+            <a:endParaRPr lang="zh-CN" altLang="en-US" sz="2000"/>
+          </a:p>
+        </p:txBody>
+      </p:sp>
+      <p:sp>
+        <p:nvSpPr>
+          <p:cNvPr id="13" name="双括号 12"/>
+          <p:cNvSpPr/>
+          <p:nvPr/>
+        </p:nvSpPr>
+        <p:spPr>
+          <a:xfrm>
+            <a:off x="5294630" y="2251075"/>
+            <a:ext cx="1184910" cy="305435"/>
+          </a:xfrm>
+          <a:prstGeom prst="bracketPair">
+            <a:avLst/>
+          </a:prstGeom>
+          <a:ln w="31750" cap="rnd">
+            <a:solidFill>
+              <a:schemeClr val="accent6"/>
+            </a:solidFill>
+            <a:round/>
+          </a:ln>
+        </p:spPr>
+        <p:style>
+          <a:lnRef idx="0">
+            <a:srgbClr val="FFFFFF"/>
+          </a:lnRef>
+          <a:fillRef idx="0">
+            <a:srgbClr val="FFFFFF"/>
+          </a:fillRef>
+          <a:effectRef idx="0">
+            <a:srgbClr val="FFFFFF"/>
+          </a:effectRef>
+          <a:fontRef idx="minor">
+            <a:schemeClr val="tx1"/>
+          </a:fontRef>
+        </p:style>
+        <p:txBody>
+          <a:bodyPr rtlCol="0" anchor="ctr"/>
+          <a:p>
+            <a:pPr algn="ctr"/>
+            <a:endParaRPr lang="zh-CN" altLang="en-US" sz="2000"/>
+          </a:p>
+        </p:txBody>
+      </p:sp>
+      <p:cxnSp>
+        <p:nvCxnSpPr>
+          <p:cNvPr id="16" name="直接箭头连接符 15"/>
+          <p:cNvCxnSpPr/>
+          <p:nvPr/>
+        </p:nvCxnSpPr>
+        <p:spPr>
+          <a:xfrm flipH="1" flipV="1">
+            <a:off x="5438140" y="1537335"/>
+            <a:ext cx="446405" cy="650875"/>
+          </a:xfrm>
+          <a:prstGeom prst="straightConnector1">
+            <a:avLst/>
+          </a:prstGeom>
+          <a:ln w="31750" cap="rnd">
+            <a:solidFill>
+              <a:schemeClr val="accent6"/>
+            </a:solidFill>
+            <a:round/>
+            <a:tailEnd type="arrow" w="med" len="med"/>
+          </a:ln>
+        </p:spPr>
+        <p:style>
+          <a:lnRef idx="0">
+            <a:srgbClr val="FFFFFF"/>
+          </a:lnRef>
+          <a:fillRef idx="0">
+            <a:srgbClr val="FFFFFF"/>
+          </a:fillRef>
+          <a:effectRef idx="0">
+            <a:srgbClr val="FFFFFF"/>
+          </a:effectRef>
+          <a:fontRef idx="minor">
+            <a:schemeClr val="tx1"/>
+          </a:fontRef>
+        </p:style>
+      </p:cxnSp>
+      <p:sp>
+        <p:nvSpPr>
+          <p:cNvPr id="17" name="文本框 16"/>
+          <p:cNvSpPr txBox="1"/>
+          <p:nvPr/>
+        </p:nvSpPr>
+        <p:spPr>
+          <a:xfrm>
+            <a:off x="3870325" y="1075690"/>
+            <a:ext cx="2557780" cy="398780"/>
+          </a:xfrm>
+          <a:prstGeom prst="rect">
+            <a:avLst/>
+          </a:prstGeom>
+          <a:noFill/>
+        </p:spPr>
+        <p:txBody>
+          <a:bodyPr wrap="square" rtlCol="0">
+            <a:spAutoFit/>
+          </a:bodyPr>
+          <a:p>
+            <a:r>
+              <a:rPr lang="zh-CN" altLang="en-US" sz="2000"/>
+              <a:t>线性部分，可以建模</a:t>
+            </a:r>
+            <a:endParaRPr lang="zh-CN" altLang="en-US" sz="2000"/>
+          </a:p>
+        </p:txBody>
+      </p:sp>
+      <p:sp>
+        <p:nvSpPr>
+          <p:cNvPr id="19" name="双括号 18"/>
+          <p:cNvSpPr/>
+          <p:nvPr/>
+        </p:nvSpPr>
+        <p:spPr>
+          <a:xfrm>
+            <a:off x="6727825" y="2258060"/>
+            <a:ext cx="1045845" cy="263525"/>
+          </a:xfrm>
+          <a:prstGeom prst="bracketPair">
+            <a:avLst/>
+          </a:prstGeom>
+          <a:ln w="31750" cap="rnd">
+            <a:solidFill>
+              <a:schemeClr val="accent6"/>
+            </a:solidFill>
+            <a:round/>
+          </a:ln>
+        </p:spPr>
+        <p:style>
+          <a:lnRef idx="0">
+            <a:srgbClr val="FFFFFF"/>
+          </a:lnRef>
+          <a:fillRef idx="0">
+            <a:srgbClr val="FFFFFF"/>
+          </a:fillRef>
+          <a:effectRef idx="0">
+            <a:srgbClr val="FFFFFF"/>
+          </a:effectRef>
+          <a:fontRef idx="minor">
+            <a:schemeClr val="tx1"/>
+          </a:fontRef>
+        </p:style>
+        <p:txBody>
+          <a:bodyPr rtlCol="0" anchor="ctr"/>
+          <a:p>
+            <a:pPr algn="ctr"/>
+            <a:endParaRPr lang="zh-CN" altLang="en-US" sz="2000"/>
+          </a:p>
+        </p:txBody>
+      </p:sp>
+      <p:cxnSp>
+        <p:nvCxnSpPr>
+          <p:cNvPr id="23" name="直接箭头连接符 22"/>
+          <p:cNvCxnSpPr/>
+          <p:nvPr/>
+        </p:nvCxnSpPr>
+        <p:spPr>
+          <a:xfrm flipV="1">
+            <a:off x="7181850" y="1599565"/>
+            <a:ext cx="497205" cy="592455"/>
+          </a:xfrm>
+          <a:prstGeom prst="straightConnector1">
+            <a:avLst/>
+          </a:prstGeom>
+          <a:ln w="31750" cap="rnd">
+            <a:solidFill>
+              <a:schemeClr val="accent6"/>
+            </a:solidFill>
+            <a:round/>
+            <a:tailEnd type="arrow" w="med" len="med"/>
+          </a:ln>
+        </p:spPr>
+        <p:style>
+          <a:lnRef idx="0">
+            <a:srgbClr val="FFFFFF"/>
+          </a:lnRef>
+          <a:fillRef idx="0">
+            <a:srgbClr val="FFFFFF"/>
+          </a:fillRef>
+          <a:effectRef idx="0">
+            <a:srgbClr val="FFFFFF"/>
+          </a:effectRef>
+          <a:fontRef idx="minor">
+            <a:schemeClr val="tx1"/>
+          </a:fontRef>
+        </p:style>
+      </p:cxnSp>
+      <p:sp>
+        <p:nvSpPr>
+          <p:cNvPr id="24" name="文本框 23"/>
+          <p:cNvSpPr txBox="1"/>
+          <p:nvPr/>
+        </p:nvSpPr>
+        <p:spPr>
+          <a:xfrm>
+            <a:off x="6826250" y="1075690"/>
+            <a:ext cx="3391535" cy="398780"/>
+          </a:xfrm>
+          <a:prstGeom prst="rect">
+            <a:avLst/>
+          </a:prstGeom>
+          <a:noFill/>
+        </p:spPr>
+        <p:txBody>
+          <a:bodyPr wrap="square" rtlCol="0">
+            <a:spAutoFit/>
+          </a:bodyPr>
+          <a:p>
+            <a:r>
+              <a:rPr lang="zh-CN" altLang="en-US" sz="2000"/>
+              <a:t>非线性扰动，未知但很小</a:t>
+            </a:r>
+            <a:endParaRPr lang="zh-CN" altLang="en-US" sz="2000"/>
+          </a:p>
+        </p:txBody>
+      </p:sp>
+      <p:sp>
+        <p:nvSpPr>
+          <p:cNvPr id="25" name="文本框 24"/>
+          <p:cNvSpPr txBox="1"/>
+          <p:nvPr/>
+        </p:nvSpPr>
+        <p:spPr>
+          <a:xfrm>
+            <a:off x="3815715" y="4363720"/>
+            <a:ext cx="4559935" cy="398780"/>
+          </a:xfrm>
+          <a:prstGeom prst="rect">
+            <a:avLst/>
+          </a:prstGeom>
+          <a:noFill/>
+        </p:spPr>
+        <p:txBody>
+          <a:bodyPr wrap="square" rtlCol="0">
+            <a:spAutoFit/>
+          </a:bodyPr>
+          <a:p>
+            <a:r>
+              <a:rPr lang="zh-CN" altLang="en-US" sz="2000"/>
+              <a:t>我们的目标其实是找到最优反馈矩阵</a:t>
+            </a:r>
+            <a:r>
+              <a:rPr lang="en-US" altLang="zh-CN" sz="2000"/>
+              <a:t> K</a:t>
+            </a:r>
+            <a:endParaRPr lang="en-US" altLang="zh-CN" sz="2000"/>
+          </a:p>
+        </p:txBody>
+      </p:sp>
+      <p:pic>
+        <p:nvPicPr>
+          <p:cNvPr id="27" name="图片 26"/>
+          <p:cNvPicPr>
+            <a:picLocks noChangeAspect="1"/>
+          </p:cNvPicPr>
+          <p:nvPr/>
+        </p:nvPicPr>
+        <p:blipFill>
+          <a:blip r:embed="rId3"/>
+          <a:stretch>
+            <a:fillRect/>
+          </a:stretch>
+        </p:blipFill>
+        <p:spPr>
+          <a:xfrm>
+            <a:off x="3995420" y="3333115"/>
+            <a:ext cx="4252595" cy="882650"/>
+          </a:xfrm>
+          <a:prstGeom prst="rect">
+            <a:avLst/>
+          </a:prstGeom>
+        </p:spPr>
+      </p:pic>
+    </p:spTree>
+    <p:custDataLst>
+      <p:tags r:id="rId4"/>
+    </p:custDataLst>
+  </p:cSld>
+  <p:clrMapOvr>
+    <a:masterClrMapping/>
+  </p:clrMapOvr>
+  <p:timing>
+    <p:tnLst>
+      <p:par>
+        <p:cTn id="1" dur="indefinite" restart="never" nodeType="tmRoot">
+          <p:childTnLst>
+            <p:seq concurrent="1" nextAc="seek">
+              <p:cTn id="2" dur="indefinite" nodeType="mainSeq">
+                <p:childTnLst>
+                  <p:par>
+                    <p:cTn id="3" fill="hold">
+                      <p:stCondLst>
+                        <p:cond delay="indefinite"/>
+                      </p:stCondLst>
+                      <p:childTnLst>
+                        <p:par>
+                          <p:cTn id="4" fill="hold">
+                            <p:stCondLst>
+                              <p:cond delay="0"/>
+                            </p:stCondLst>
+                            <p:childTnLst>
+                              <p:par>
+                                <p:cTn id="5" presetID="2" presetClass="entr" presetSubtype="4" fill="hold" grpId="0" nodeType="clickEffect">
+                                  <p:stCondLst>
+                                    <p:cond delay="0"/>
+                                  </p:stCondLst>
+                                  <p:childTnLst>
+                                    <p:set>
+                                      <p:cBhvr>
+                                        <p:cTn id="6" dur="1" fill="hold">
+                                          <p:stCondLst>
+                                            <p:cond delay="0"/>
+                                          </p:stCondLst>
+                                        </p:cTn>
+                                        <p:tgtEl>
+                                          <p:spTgt spid="10"/>
+                                        </p:tgtEl>
+                                        <p:attrNameLst>
+                                          <p:attrName>style.visibility</p:attrName>
+                                        </p:attrNameLst>
+                                      </p:cBhvr>
+                                      <p:to>
+                                        <p:strVal val="visible"/>
+                                      </p:to>
+                                    </p:set>
+                                    <p:anim calcmode="lin" valueType="num">
+                                      <p:cBhvr additive="base">
+                                        <p:cTn id="7" dur="500" fill="hold"/>
+                                        <p:tgtEl>
+                                          <p:spTgt spid="10"/>
+                                        </p:tgtEl>
+                                        <p:attrNameLst>
+                                          <p:attrName>ppt_x</p:attrName>
+                                        </p:attrNameLst>
+                                      </p:cBhvr>
+                                      <p:tavLst>
+                                        <p:tav tm="0">
+                                          <p:val>
+                                            <p:strVal val="#ppt_x"/>
+                                          </p:val>
+                                        </p:tav>
+                                        <p:tav tm="100000">
+                                          <p:val>
+                                            <p:strVal val="#ppt_x"/>
+                                          </p:val>
+                                        </p:tav>
+                                      </p:tavLst>
+                                    </p:anim>
+                                    <p:anim calcmode="lin" valueType="num">
+                                      <p:cBhvr additive="base">
+                                        <p:cTn id="8" dur="500" fill="hold"/>
+                                        <p:tgtEl>
+                                          <p:spTgt spid="10"/>
+                                        </p:tgtEl>
+                                        <p:attrNameLst>
+                                          <p:attrName>ppt_y</p:attrName>
+                                        </p:attrNameLst>
+                                      </p:cBhvr>
+                                      <p:tavLst>
+                                        <p:tav tm="0">
+                                          <p:val>
+                                            <p:strVal val="1+#ppt_h/2"/>
+                                          </p:val>
+                                        </p:tav>
+                                        <p:tav tm="100000">
+                                          <p:val>
+                                            <p:strVal val="#ppt_y"/>
+                                          </p:val>
+                                        </p:tav>
+                                      </p:tavLst>
+                                    </p:anim>
+                                  </p:childTnLst>
+                                </p:cTn>
+                              </p:par>
+                              <p:par>
+                                <p:cTn id="9" presetID="2" presetClass="entr" presetSubtype="4" fill="hold" nodeType="withEffect">
+                                  <p:stCondLst>
+                                    <p:cond delay="0"/>
+                                  </p:stCondLst>
+                                  <p:childTnLst>
+                                    <p:set>
+                                      <p:cBhvr>
+                                        <p:cTn id="10" dur="1" fill="hold">
+                                          <p:stCondLst>
+                                            <p:cond delay="0"/>
+                                          </p:stCondLst>
+                                        </p:cTn>
+                                        <p:tgtEl>
+                                          <p:spTgt spid="27"/>
+                                        </p:tgtEl>
+                                        <p:attrNameLst>
+                                          <p:attrName>style.visibility</p:attrName>
+                                        </p:attrNameLst>
+                                      </p:cBhvr>
+                                      <p:to>
+                                        <p:strVal val="visible"/>
+                                      </p:to>
+                                    </p:set>
+                                    <p:anim calcmode="lin" valueType="num">
+                                      <p:cBhvr additive="base">
+                                        <p:cTn id="11" dur="500" fill="hold"/>
+                                        <p:tgtEl>
+                                          <p:spTgt spid="27"/>
+                                        </p:tgtEl>
+                                        <p:attrNameLst>
+                                          <p:attrName>ppt_x</p:attrName>
+                                        </p:attrNameLst>
+                                      </p:cBhvr>
+                                      <p:tavLst>
+                                        <p:tav tm="0">
+                                          <p:val>
+                                            <p:strVal val="#ppt_x"/>
+                                          </p:val>
+                                        </p:tav>
+                                        <p:tav tm="100000">
+                                          <p:val>
+                                            <p:strVal val="#ppt_x"/>
+                                          </p:val>
+                                        </p:tav>
+                                      </p:tavLst>
+                                    </p:anim>
+                                    <p:anim calcmode="lin" valueType="num">
+                                      <p:cBhvr additive="base">
+                                        <p:cTn id="12" dur="500" fill="hold"/>
+                                        <p:tgtEl>
+                                          <p:spTgt spid="27"/>
+                                        </p:tgtEl>
+                                        <p:attrNameLst>
+                                          <p:attrName>ppt_y</p:attrName>
+                                        </p:attrNameLst>
+                                      </p:cBhvr>
+                                      <p:tavLst>
+                                        <p:tav tm="0">
+                                          <p:val>
+                                            <p:strVal val="1+#ppt_h/2"/>
+                                          </p:val>
+                                        </p:tav>
+                                        <p:tav tm="100000">
+                                          <p:val>
+                                            <p:strVal val="#ppt_y"/>
+                                          </p:val>
+                                        </p:tav>
+                                      </p:tavLst>
+                                    </p:anim>
+                                  </p:childTnLst>
+                                </p:cTn>
+                              </p:par>
+                            </p:childTnLst>
+                          </p:cTn>
+                        </p:par>
+                      </p:childTnLst>
+                    </p:cTn>
+                  </p:par>
+                  <p:par>
+                    <p:cTn id="13" fill="hold">
+                      <p:stCondLst>
+                        <p:cond delay="indefinite"/>
+                      </p:stCondLst>
+                      <p:childTnLst>
+                        <p:par>
+                          <p:cTn id="14" fill="hold">
+                            <p:stCondLst>
+                              <p:cond delay="0"/>
+                            </p:stCondLst>
+                            <p:childTnLst>
+                              <p:par>
+                                <p:cTn id="15" presetID="2" presetClass="entr" presetSubtype="4" fill="hold" grpId="0" nodeType="clickEffect">
+                                  <p:stCondLst>
+                                    <p:cond delay="0"/>
+                                  </p:stCondLst>
+                                  <p:childTnLst>
+                                    <p:set>
+                                      <p:cBhvr>
+                                        <p:cTn id="16" dur="1" fill="hold">
+                                          <p:stCondLst>
+                                            <p:cond delay="0"/>
+                                          </p:stCondLst>
+                                        </p:cTn>
+                                        <p:tgtEl>
+                                          <p:spTgt spid="25"/>
+                                        </p:tgtEl>
+                                        <p:attrNameLst>
+                                          <p:attrName>style.visibility</p:attrName>
+                                        </p:attrNameLst>
+                                      </p:cBhvr>
+                                      <p:to>
+                                        <p:strVal val="visible"/>
+                                      </p:to>
+                                    </p:set>
+                                    <p:anim calcmode="lin" valueType="num">
+                                      <p:cBhvr additive="base">
+                                        <p:cTn id="17" dur="500" fill="hold"/>
+                                        <p:tgtEl>
+                                          <p:spTgt spid="25"/>
+                                        </p:tgtEl>
+                                        <p:attrNameLst>
+                                          <p:attrName>ppt_x</p:attrName>
+                                        </p:attrNameLst>
+                                      </p:cBhvr>
+                                      <p:tavLst>
+                                        <p:tav tm="0">
+                                          <p:val>
+                                            <p:strVal val="#ppt_x"/>
+                                          </p:val>
+                                        </p:tav>
+                                        <p:tav tm="100000">
+                                          <p:val>
+                                            <p:strVal val="#ppt_x"/>
+                                          </p:val>
+                                        </p:tav>
+                                      </p:tavLst>
+                                    </p:anim>
+                                    <p:anim calcmode="lin" valueType="num">
+                                      <p:cBhvr additive="base">
+                                        <p:cTn id="18" dur="500" fill="hold"/>
+                                        <p:tgtEl>
+                                          <p:spTgt spid="25"/>
+                                        </p:tgtEl>
+                                        <p:attrNameLst>
+                                          <p:attrName>ppt_y</p:attrName>
+                                        </p:attrNameLst>
+                                      </p:cBhvr>
+                                      <p:tavLst>
+                                        <p:tav tm="0">
+                                          <p:val>
+                                            <p:strVal val="1+#ppt_h/2"/>
+                                          </p:val>
+                                        </p:tav>
+                                        <p:tav tm="100000">
+                                          <p:val>
+                                            <p:strVal val="#ppt_y"/>
+                                          </p:val>
+                                        </p:tav>
+                                      </p:tavLst>
+                                    </p:anim>
+                                  </p:childTnLst>
+                                </p:cTn>
+                              </p:par>
+                            </p:childTnLst>
+                          </p:cTn>
+                        </p:par>
+                      </p:childTnLst>
+                    </p:cTn>
+                  </p:par>
+                  <p:par>
+                    <p:cTn id="19" fill="hold">
+                      <p:stCondLst>
+                        <p:cond delay="indefinite"/>
+                      </p:stCondLst>
+                      <p:childTnLst>
+                        <p:par>
+                          <p:cTn id="20" fill="hold">
+                            <p:stCondLst>
+                              <p:cond delay="0"/>
+                            </p:stCondLst>
+                            <p:childTnLst>
+                              <p:par>
+                                <p:cTn id="21" presetID="2" presetClass="entr" presetSubtype="4" fill="hold" grpId="0" nodeType="clickEffect">
+                                  <p:stCondLst>
+                                    <p:cond delay="0"/>
+                                  </p:stCondLst>
+                                  <p:childTnLst>
+                                    <p:set>
+                                      <p:cBhvr>
+                                        <p:cTn id="22" dur="1" fill="hold">
+                                          <p:stCondLst>
+                                            <p:cond delay="0"/>
+                                          </p:stCondLst>
+                                        </p:cTn>
+                                        <p:tgtEl>
+                                          <p:spTgt spid="13"/>
+                                        </p:tgtEl>
+                                        <p:attrNameLst>
+                                          <p:attrName>style.visibility</p:attrName>
+                                        </p:attrNameLst>
+                                      </p:cBhvr>
+                                      <p:to>
+                                        <p:strVal val="visible"/>
+                                      </p:to>
+                                    </p:set>
+                                    <p:anim calcmode="lin" valueType="num">
+                                      <p:cBhvr additive="base">
+                                        <p:cTn id="23" dur="500" fill="hold"/>
+                                        <p:tgtEl>
+                                          <p:spTgt spid="13"/>
+                                        </p:tgtEl>
+                                        <p:attrNameLst>
+                                          <p:attrName>ppt_x</p:attrName>
+                                        </p:attrNameLst>
+                                      </p:cBhvr>
+                                      <p:tavLst>
+                                        <p:tav tm="0">
+                                          <p:val>
+                                            <p:strVal val="#ppt_x"/>
+                                          </p:val>
+                                        </p:tav>
+                                        <p:tav tm="100000">
+                                          <p:val>
+                                            <p:strVal val="#ppt_x"/>
+                                          </p:val>
+                                        </p:tav>
+                                      </p:tavLst>
+                                    </p:anim>
+                                    <p:anim calcmode="lin" valueType="num">
+                                      <p:cBhvr additive="base">
+                                        <p:cTn id="24" dur="500" fill="hold"/>
+                                        <p:tgtEl>
+                                          <p:spTgt spid="13"/>
+                                        </p:tgtEl>
+                                        <p:attrNameLst>
+                                          <p:attrName>ppt_y</p:attrName>
+                                        </p:attrNameLst>
+                                      </p:cBhvr>
+                                      <p:tavLst>
+                                        <p:tav tm="0">
+                                          <p:val>
+                                            <p:strVal val="1+#ppt_h/2"/>
+                                          </p:val>
+                                        </p:tav>
+                                        <p:tav tm="100000">
+                                          <p:val>
+                                            <p:strVal val="#ppt_y"/>
+                                          </p:val>
+                                        </p:tav>
+                                      </p:tavLst>
+                                    </p:anim>
+                                  </p:childTnLst>
+                                </p:cTn>
+                              </p:par>
+                              <p:par>
+                                <p:cTn id="25" presetID="2" presetClass="entr" presetSubtype="4" fill="hold" nodeType="withEffect">
+                                  <p:stCondLst>
+                                    <p:cond delay="0"/>
+                                  </p:stCondLst>
+                                  <p:childTnLst>
+                                    <p:set>
+                                      <p:cBhvr>
+                                        <p:cTn id="26" dur="1" fill="hold">
+                                          <p:stCondLst>
+                                            <p:cond delay="0"/>
+                                          </p:stCondLst>
+                                        </p:cTn>
+                                        <p:tgtEl>
+                                          <p:spTgt spid="16"/>
+                                        </p:tgtEl>
+                                        <p:attrNameLst>
+                                          <p:attrName>style.visibility</p:attrName>
+                                        </p:attrNameLst>
+                                      </p:cBhvr>
+                                      <p:to>
+                                        <p:strVal val="visible"/>
+                                      </p:to>
+                                    </p:set>
+                                    <p:anim calcmode="lin" valueType="num">
+                                      <p:cBhvr additive="base">
+                                        <p:cTn id="27" dur="500" fill="hold"/>
+                                        <p:tgtEl>
+                                          <p:spTgt spid="16"/>
+                                        </p:tgtEl>
+                                        <p:attrNameLst>
+                                          <p:attrName>ppt_x</p:attrName>
+                                        </p:attrNameLst>
+                                      </p:cBhvr>
+                                      <p:tavLst>
+                                        <p:tav tm="0">
+                                          <p:val>
+                                            <p:strVal val="#ppt_x"/>
+                                          </p:val>
+                                        </p:tav>
+                                        <p:tav tm="100000">
+                                          <p:val>
+                                            <p:strVal val="#ppt_x"/>
+                                          </p:val>
+                                        </p:tav>
+                                      </p:tavLst>
+                                    </p:anim>
+                                    <p:anim calcmode="lin" valueType="num">
+                                      <p:cBhvr additive="base">
+                                        <p:cTn id="28" dur="500" fill="hold"/>
+                                        <p:tgtEl>
+                                          <p:spTgt spid="16"/>
+                                        </p:tgtEl>
+                                        <p:attrNameLst>
+                                          <p:attrName>ppt_y</p:attrName>
+                                        </p:attrNameLst>
+                                      </p:cBhvr>
+                                      <p:tavLst>
+                                        <p:tav tm="0">
+                                          <p:val>
+                                            <p:strVal val="1+#ppt_h/2"/>
+                                          </p:val>
+                                        </p:tav>
+                                        <p:tav tm="100000">
+                                          <p:val>
+                                            <p:strVal val="#ppt_y"/>
+                                          </p:val>
+                                        </p:tav>
+                                      </p:tavLst>
+                                    </p:anim>
+                                  </p:childTnLst>
+                                </p:cTn>
+                              </p:par>
+                              <p:par>
+                                <p:cTn id="29" presetID="2" presetClass="entr" presetSubtype="4" fill="hold" grpId="0" nodeType="withEffect">
+                                  <p:stCondLst>
+                                    <p:cond delay="0"/>
+                                  </p:stCondLst>
+                                  <p:childTnLst>
+                                    <p:set>
+                                      <p:cBhvr>
+                                        <p:cTn id="30" dur="1" fill="hold">
+                                          <p:stCondLst>
+                                            <p:cond delay="0"/>
+                                          </p:stCondLst>
+                                        </p:cTn>
+                                        <p:tgtEl>
+                                          <p:spTgt spid="17"/>
+                                        </p:tgtEl>
+                                        <p:attrNameLst>
+                                          <p:attrName>style.visibility</p:attrName>
+                                        </p:attrNameLst>
+                                      </p:cBhvr>
+                                      <p:to>
+                                        <p:strVal val="visible"/>
+                                      </p:to>
+                                    </p:set>
+                                    <p:anim calcmode="lin" valueType="num">
+                                      <p:cBhvr additive="base">
+                                        <p:cTn id="31" dur="500" fill="hold"/>
+                                        <p:tgtEl>
+                                          <p:spTgt spid="17"/>
+                                        </p:tgtEl>
+                                        <p:attrNameLst>
+                                          <p:attrName>ppt_x</p:attrName>
+                                        </p:attrNameLst>
+                                      </p:cBhvr>
+                                      <p:tavLst>
+                                        <p:tav tm="0">
+                                          <p:val>
+                                            <p:strVal val="#ppt_x"/>
+                                          </p:val>
+                                        </p:tav>
+                                        <p:tav tm="100000">
+                                          <p:val>
+                                            <p:strVal val="#ppt_x"/>
+                                          </p:val>
+                                        </p:tav>
+                                      </p:tavLst>
+                                    </p:anim>
+                                    <p:anim calcmode="lin" valueType="num">
+                                      <p:cBhvr additive="base">
+                                        <p:cTn id="32" dur="500" fill="hold"/>
+                                        <p:tgtEl>
+                                          <p:spTgt spid="17"/>
+                                        </p:tgtEl>
+                                        <p:attrNameLst>
+                                          <p:attrName>ppt_y</p:attrName>
+                                        </p:attrNameLst>
+                                      </p:cBhvr>
+                                      <p:tavLst>
+                                        <p:tav tm="0">
+                                          <p:val>
+                                            <p:strVal val="1+#ppt_h/2"/>
+                                          </p:val>
+                                        </p:tav>
+                                        <p:tav tm="100000">
+                                          <p:val>
+                                            <p:strVal val="#ppt_y"/>
+                                          </p:val>
+                                        </p:tav>
+                                      </p:tavLst>
+                                    </p:anim>
+                                  </p:childTnLst>
+                                </p:cTn>
+                              </p:par>
+                            </p:childTnLst>
+                          </p:cTn>
+                        </p:par>
+                      </p:childTnLst>
+                    </p:cTn>
+                  </p:par>
+                  <p:par>
+                    <p:cTn id="33" fill="hold">
+                      <p:stCondLst>
+                        <p:cond delay="indefinite"/>
+                      </p:stCondLst>
+                      <p:childTnLst>
+                        <p:par>
+                          <p:cTn id="34" fill="hold">
+                            <p:stCondLst>
+                              <p:cond delay="0"/>
+                            </p:stCondLst>
+                            <p:childTnLst>
+                              <p:par>
+                                <p:cTn id="35" presetID="2" presetClass="entr" presetSubtype="4" fill="hold" grpId="0" nodeType="clickEffect">
+                                  <p:stCondLst>
+                                    <p:cond delay="0"/>
+                                  </p:stCondLst>
+                                  <p:childTnLst>
+                                    <p:set>
+                                      <p:cBhvr>
+                                        <p:cTn id="36" dur="1" fill="hold">
+                                          <p:stCondLst>
+                                            <p:cond delay="0"/>
+                                          </p:stCondLst>
+                                        </p:cTn>
+                                        <p:tgtEl>
+                                          <p:spTgt spid="19"/>
+                                        </p:tgtEl>
+                                        <p:attrNameLst>
+                                          <p:attrName>style.visibility</p:attrName>
+                                        </p:attrNameLst>
+                                      </p:cBhvr>
+                                      <p:to>
+                                        <p:strVal val="visible"/>
+                                      </p:to>
+                                    </p:set>
+                                    <p:anim calcmode="lin" valueType="num">
+                                      <p:cBhvr additive="base">
+                                        <p:cTn id="37" dur="500" fill="hold"/>
+                                        <p:tgtEl>
+                                          <p:spTgt spid="19"/>
+                                        </p:tgtEl>
+                                        <p:attrNameLst>
+                                          <p:attrName>ppt_x</p:attrName>
+                                        </p:attrNameLst>
+                                      </p:cBhvr>
+                                      <p:tavLst>
+                                        <p:tav tm="0">
+                                          <p:val>
+                                            <p:strVal val="#ppt_x"/>
+                                          </p:val>
+                                        </p:tav>
+                                        <p:tav tm="100000">
+                                          <p:val>
+                                            <p:strVal val="#ppt_x"/>
+                                          </p:val>
+                                        </p:tav>
+                                      </p:tavLst>
+                                    </p:anim>
+                                    <p:anim calcmode="lin" valueType="num">
+                                      <p:cBhvr additive="base">
+                                        <p:cTn id="38" dur="500" fill="hold"/>
+                                        <p:tgtEl>
+                                          <p:spTgt spid="19"/>
+                                        </p:tgtEl>
+                                        <p:attrNameLst>
+                                          <p:attrName>ppt_y</p:attrName>
+                                        </p:attrNameLst>
+                                      </p:cBhvr>
+                                      <p:tavLst>
+                                        <p:tav tm="0">
+                                          <p:val>
+                                            <p:strVal val="1+#ppt_h/2"/>
+                                          </p:val>
+                                        </p:tav>
+                                        <p:tav tm="100000">
+                                          <p:val>
+                                            <p:strVal val="#ppt_y"/>
+                                          </p:val>
+                                        </p:tav>
+                                      </p:tavLst>
+                                    </p:anim>
+                                  </p:childTnLst>
+                                </p:cTn>
+                              </p:par>
+                              <p:par>
+                                <p:cTn id="39" presetID="2" presetClass="entr" presetSubtype="4" fill="hold" nodeType="withEffect">
+                                  <p:stCondLst>
+                                    <p:cond delay="0"/>
+                                  </p:stCondLst>
+                                  <p:childTnLst>
+                                    <p:set>
+                                      <p:cBhvr>
+                                        <p:cTn id="40" dur="1" fill="hold">
+                                          <p:stCondLst>
+                                            <p:cond delay="0"/>
+                                          </p:stCondLst>
+                                        </p:cTn>
+                                        <p:tgtEl>
+                                          <p:spTgt spid="23"/>
+                                        </p:tgtEl>
+                                        <p:attrNameLst>
+                                          <p:attrName>style.visibility</p:attrName>
+                                        </p:attrNameLst>
+                                      </p:cBhvr>
+                                      <p:to>
+                                        <p:strVal val="visible"/>
+                                      </p:to>
+                                    </p:set>
+                                    <p:anim calcmode="lin" valueType="num">
+                                      <p:cBhvr additive="base">
+                                        <p:cTn id="41" dur="500" fill="hold"/>
+                                        <p:tgtEl>
+                                          <p:spTgt spid="23"/>
+                                        </p:tgtEl>
+                                        <p:attrNameLst>
+                                          <p:attrName>ppt_x</p:attrName>
+                                        </p:attrNameLst>
+                                      </p:cBhvr>
+                                      <p:tavLst>
+                                        <p:tav tm="0">
+                                          <p:val>
+                                            <p:strVal val="#ppt_x"/>
+                                          </p:val>
+                                        </p:tav>
+                                        <p:tav tm="100000">
+                                          <p:val>
+                                            <p:strVal val="#ppt_x"/>
+                                          </p:val>
+                                        </p:tav>
+                                      </p:tavLst>
+                                    </p:anim>
+                                    <p:anim calcmode="lin" valueType="num">
+                                      <p:cBhvr additive="base">
+                                        <p:cTn id="42" dur="500" fill="hold"/>
+                                        <p:tgtEl>
+                                          <p:spTgt spid="23"/>
+                                        </p:tgtEl>
+                                        <p:attrNameLst>
+                                          <p:attrName>ppt_y</p:attrName>
+                                        </p:attrNameLst>
+                                      </p:cBhvr>
+                                      <p:tavLst>
+                                        <p:tav tm="0">
+                                          <p:val>
+                                            <p:strVal val="1+#ppt_h/2"/>
+                                          </p:val>
+                                        </p:tav>
+                                        <p:tav tm="100000">
+                                          <p:val>
+                                            <p:strVal val="#ppt_y"/>
+                                          </p:val>
+                                        </p:tav>
+                                      </p:tavLst>
+                                    </p:anim>
+                                  </p:childTnLst>
+                                </p:cTn>
+                              </p:par>
+                              <p:par>
+                                <p:cTn id="43" presetID="2" presetClass="entr" presetSubtype="4" fill="hold" grpId="0" nodeType="withEffect">
+                                  <p:stCondLst>
+                                    <p:cond delay="0"/>
+                                  </p:stCondLst>
+                                  <p:childTnLst>
+                                    <p:set>
+                                      <p:cBhvr>
+                                        <p:cTn id="44" dur="1" fill="hold">
+                                          <p:stCondLst>
+                                            <p:cond delay="0"/>
+                                          </p:stCondLst>
+                                        </p:cTn>
+                                        <p:tgtEl>
+                                          <p:spTgt spid="24"/>
+                                        </p:tgtEl>
+                                        <p:attrNameLst>
+                                          <p:attrName>style.visibility</p:attrName>
+                                        </p:attrNameLst>
+                                      </p:cBhvr>
+                                      <p:to>
+                                        <p:strVal val="visible"/>
+                                      </p:to>
+                                    </p:set>
+                                    <p:anim calcmode="lin" valueType="num">
+                                      <p:cBhvr additive="base">
+                                        <p:cTn id="45" dur="500" fill="hold"/>
+                                        <p:tgtEl>
+                                          <p:spTgt spid="24"/>
+                                        </p:tgtEl>
+                                        <p:attrNameLst>
+                                          <p:attrName>ppt_x</p:attrName>
+                                        </p:attrNameLst>
+                                      </p:cBhvr>
+                                      <p:tavLst>
+                                        <p:tav tm="0">
+                                          <p:val>
+                                            <p:strVal val="#ppt_x"/>
+                                          </p:val>
+                                        </p:tav>
+                                        <p:tav tm="100000">
+                                          <p:val>
+                                            <p:strVal val="#ppt_x"/>
+                                          </p:val>
+                                        </p:tav>
+                                      </p:tavLst>
+                                    </p:anim>
+                                    <p:anim calcmode="lin" valueType="num">
+                                      <p:cBhvr additive="base">
+                                        <p:cTn id="46" dur="500" fill="hold"/>
+                                        <p:tgtEl>
+                                          <p:spTgt spid="24"/>
+                                        </p:tgtEl>
+                                        <p:attrNameLst>
+                                          <p:attrName>ppt_y</p:attrName>
+                                        </p:attrNameLst>
+                                      </p:cBhvr>
+                                      <p:tavLst>
+                                        <p:tav tm="0">
+                                          <p:val>
+                                            <p:strVal val="1+#ppt_h/2"/>
+                                          </p:val>
+                                        </p:tav>
+                                        <p:tav tm="100000">
+                                          <p:val>
+                                            <p:strVal val="#ppt_y"/>
+                                          </p:val>
+                                        </p:tav>
+                                      </p:tavLst>
+                                    </p:anim>
+                                  </p:childTnLst>
+                                </p:cTn>
+                              </p:par>
+                            </p:childTnLst>
+                          </p:cTn>
+                        </p:par>
+                      </p:childTnLst>
+                    </p:cTn>
+                  </p:par>
+                </p:childTnLst>
+              </p:cTn>
+              <p:prevCondLst>
+                <p:cond evt="onPrev" delay="0">
+                  <p:tgtEl>
+                    <p:sldTgt/>
+                  </p:tgtEl>
+                </p:cond>
+              </p:prevCondLst>
+              <p:nextCondLst>
+                <p:cond evt="onNext" delay="0">
+                  <p:tgtEl>
+                    <p:sldTgt/>
+                  </p:tgtEl>
+                </p:cond>
+              </p:nextCondLst>
+            </p:seq>
+          </p:childTnLst>
+        </p:cTn>
+      </p:par>
+    </p:tnLst>
+    <p:bldLst>
+      <p:bldP spid="13" grpId="0" animBg="1"/>
+      <p:bldP spid="17" grpId="0"/>
+      <p:bldP spid="13" grpId="1" animBg="1"/>
+      <p:bldP spid="17" grpId="1"/>
+      <p:bldP spid="19" grpId="0" animBg="1"/>
+      <p:bldP spid="24" grpId="0"/>
+      <p:bldP spid="19" grpId="1" animBg="1"/>
+      <p:bldP spid="24" grpId="1"/>
+      <p:bldP spid="10" grpId="0"/>
+      <p:bldP spid="10" grpId="1"/>
+      <p:bldP spid="25" grpId="0"/>
+      <p:bldP spid="25" grpId="1"/>
+    </p:bldLst>
+  </p:timing>
+</p:sld>
+</file>
+
+<file path=ppt/slides/slide5.xml><?xml version="1.0" encoding="utf-8"?>
+<p:sld xmlns:a="http://schemas.openxmlformats.org/drawingml/2006/main" xmlns:r="http://schemas.openxmlformats.org/officeDocument/2006/relationships" xmlns:p="http://schemas.openxmlformats.org/presentationml/2006/main">
+  <p:cSld>
+    <p:spTree>
+      <p:nvGrpSpPr>
+        <p:cNvPr id="1" name=""/>
+        <p:cNvGrpSpPr/>
+        <p:nvPr/>
+      </p:nvGrpSpPr>
+      <p:grpSpPr/>
+      <p:cxnSp>
+        <p:nvCxnSpPr>
+          <p:cNvPr id="4" name="直接箭头连接符 3"/>
+          <p:cNvCxnSpPr>
+            <a:stCxn id="3" idx="2"/>
+            <a:endCxn id="5" idx="0"/>
+          </p:cNvCxnSpPr>
+          <p:nvPr/>
+        </p:nvCxnSpPr>
+        <p:spPr>
+          <a:xfrm flipH="1">
+            <a:off x="4547235" y="2904490"/>
+            <a:ext cx="1621790" cy="704850"/>
+          </a:xfrm>
+          <a:prstGeom prst="straightConnector1">
+            <a:avLst/>
+          </a:prstGeom>
+          <a:ln w="31750" cap="rnd">
+            <a:solidFill>
+              <a:schemeClr val="accent6"/>
+            </a:solidFill>
+            <a:round/>
+            <a:tailEnd type="arrow" w="med" len="med"/>
+          </a:ln>
+        </p:spPr>
+        <p:style>
+          <a:lnRef idx="0">
+            <a:srgbClr val="FFFFFF"/>
+          </a:lnRef>
+          <a:fillRef idx="0">
+            <a:srgbClr val="FFFFFF"/>
+          </a:fillRef>
+          <a:effectRef idx="0">
+            <a:srgbClr val="FFFFFF"/>
+          </a:effectRef>
+          <a:fontRef idx="minor">
+            <a:schemeClr val="tx1"/>
+          </a:fontRef>
+        </p:style>
+      </p:cxnSp>
+      <p:sp>
+        <p:nvSpPr>
+          <p:cNvPr id="5" name="文本框 4"/>
+          <p:cNvSpPr txBox="1"/>
+          <p:nvPr/>
+        </p:nvSpPr>
+        <p:spPr>
+          <a:xfrm>
+            <a:off x="2998470" y="3609340"/>
+            <a:ext cx="3244215" cy="706755"/>
+          </a:xfrm>
+          <a:prstGeom prst="rect">
+            <a:avLst/>
+          </a:prstGeom>
+          <a:noFill/>
+        </p:spPr>
+        <p:txBody>
+          <a:bodyPr wrap="square" rtlCol="0">
+            <a:spAutoFit/>
+          </a:bodyPr>
+          <a:p>
+            <a:r>
+              <a:rPr lang="zh-CN" altLang="en-US" sz="2000"/>
+              <a:t>近似线性模型对应的代价</a:t>
+            </a:r>
+            <a:endParaRPr lang="zh-CN" altLang="en-US" sz="2000"/>
+          </a:p>
+          <a:p>
+            <a:r>
+              <a:rPr lang="zh-CN" altLang="en-US" sz="2000"/>
+              <a:t>其梯度有解析表达式</a:t>
+            </a:r>
+            <a:endParaRPr lang="zh-CN" altLang="en-US" sz="2000"/>
+          </a:p>
+        </p:txBody>
+      </p:sp>
+      <p:cxnSp>
+        <p:nvCxnSpPr>
+          <p:cNvPr id="6" name="直接箭头连接符 5"/>
+          <p:cNvCxnSpPr>
+            <a:endCxn id="7" idx="0"/>
+          </p:cNvCxnSpPr>
+          <p:nvPr/>
+        </p:nvCxnSpPr>
+        <p:spPr>
+          <a:xfrm>
+            <a:off x="7021195" y="2904490"/>
+            <a:ext cx="1616710" cy="748030"/>
+          </a:xfrm>
+          <a:prstGeom prst="straightConnector1">
+            <a:avLst/>
+          </a:prstGeom>
+          <a:ln w="31750" cap="rnd">
+            <a:solidFill>
+              <a:schemeClr val="accent6"/>
+            </a:solidFill>
+            <a:round/>
+            <a:tailEnd type="arrow" w="med" len="med"/>
+          </a:ln>
+        </p:spPr>
+        <p:style>
+          <a:lnRef idx="0">
+            <a:srgbClr val="FFFFFF"/>
+          </a:lnRef>
+          <a:fillRef idx="0">
+            <a:srgbClr val="FFFFFF"/>
+          </a:fillRef>
+          <a:effectRef idx="0">
+            <a:srgbClr val="FFFFFF"/>
+          </a:effectRef>
+          <a:fontRef idx="minor">
+            <a:schemeClr val="tx1"/>
+          </a:fontRef>
+        </p:style>
+      </p:cxnSp>
+      <p:sp>
+        <p:nvSpPr>
+          <p:cNvPr id="7" name="文本框 6"/>
+          <p:cNvSpPr txBox="1"/>
+          <p:nvPr/>
+        </p:nvSpPr>
+        <p:spPr>
+          <a:xfrm>
+            <a:off x="7131685" y="3652520"/>
+            <a:ext cx="3001010" cy="398780"/>
+          </a:xfrm>
+          <a:prstGeom prst="rect">
+            <a:avLst/>
+          </a:prstGeom>
+          <a:noFill/>
+        </p:spPr>
+        <p:txBody>
+          <a:bodyPr wrap="square" rtlCol="0">
+            <a:spAutoFit/>
+          </a:bodyPr>
+          <a:p>
+            <a:r>
+              <a:rPr lang="zh-CN" altLang="en-US" sz="2000"/>
+              <a:t>未知模型误差造成的残差</a:t>
+            </a:r>
+            <a:endParaRPr lang="zh-CN" altLang="en-US" sz="2000"/>
+          </a:p>
+        </p:txBody>
+      </p:sp>
+      <p:sp>
+        <p:nvSpPr>
+          <p:cNvPr id="9" name="文本框 8"/>
+          <p:cNvSpPr txBox="1"/>
+          <p:nvPr/>
+        </p:nvSpPr>
+        <p:spPr>
+          <a:xfrm>
+            <a:off x="772795" y="1336675"/>
+            <a:ext cx="8171180" cy="706755"/>
+          </a:xfrm>
+          <a:prstGeom prst="rect">
+            <a:avLst/>
+          </a:prstGeom>
+          <a:noFill/>
+        </p:spPr>
+        <p:txBody>
+          <a:bodyPr wrap="square" rtlCol="0">
+            <a:spAutoFit/>
+          </a:bodyPr>
+          <a:p>
+            <a:r>
+              <a:rPr lang="zh-CN" altLang="en-US" sz="2000"/>
+              <a:t>在计算真实系统的代价时，函数评估昂贵。</a:t>
+            </a:r>
+            <a:endParaRPr lang="zh-CN" altLang="en-US" sz="2000"/>
+          </a:p>
+          <a:p>
+            <a:r>
+              <a:rPr lang="zh-CN" altLang="en-US" sz="2000"/>
+              <a:t>所以我们考虑把它分成两部分：线性部分和用于修正偏差的补偿。即：</a:t>
+            </a:r>
+            <a:endParaRPr lang="zh-CN" altLang="en-US" sz="2000"/>
+          </a:p>
+        </p:txBody>
+      </p:sp>
+      <p:pic>
+        <p:nvPicPr>
+          <p:cNvPr id="10" name="图片 9"/>
+          <p:cNvPicPr>
+            <a:picLocks noChangeAspect="1"/>
+          </p:cNvPicPr>
+          <p:nvPr/>
+        </p:nvPicPr>
+        <p:blipFill>
+          <a:blip r:embed="rId1"/>
+          <a:stretch>
+            <a:fillRect/>
+          </a:stretch>
+        </p:blipFill>
+        <p:spPr>
+          <a:xfrm>
+            <a:off x="4745355" y="2418715"/>
+            <a:ext cx="2798445" cy="441960"/>
+          </a:xfrm>
+          <a:prstGeom prst="rect">
+            <a:avLst/>
+          </a:prstGeom>
+        </p:spPr>
+      </p:pic>
+    </p:spTree>
+    <p:custDataLst>
+      <p:tags r:id="rId2"/>
+    </p:custDataLst>
+  </p:cSld>
+  <p:clrMapOvr>
+    <a:masterClrMapping/>
+  </p:clrMapOvr>
+  <p:timing>
+    <p:tnLst>
+      <p:par>
+        <p:cTn id="1" dur="indefinite" restart="never" nodeType="tmRoot">
+          <p:childTnLst>
+            <p:seq concurrent="1" nextAc="seek">
+              <p:cTn id="2" dur="indefinite" nodeType="mainSeq">
+                <p:childTnLst>
+                  <p:par>
+                    <p:cTn id="3" fill="hold">
+                      <p:stCondLst>
+                        <p:cond delay="indefinite"/>
+                      </p:stCondLst>
+                      <p:childTnLst>
+                        <p:par>
+                          <p:cTn id="4" fill="hold">
+                            <p:stCondLst>
+                              <p:cond delay="0"/>
+                            </p:stCondLst>
+                            <p:childTnLst>
+                              <p:par>
+                                <p:cTn id="5" presetID="2" presetClass="entr" presetSubtype="4" fill="hold" grpId="0" nodeType="clickEffect">
+                                  <p:stCondLst>
+                                    <p:cond delay="0"/>
+                                  </p:stCondLst>
+                                  <p:childTnLst>
+                                    <p:set>
+                                      <p:cBhvr>
+                                        <p:cTn id="6" dur="1" fill="hold">
+                                          <p:stCondLst>
+                                            <p:cond delay="0"/>
+                                          </p:stCondLst>
+                                        </p:cTn>
+                                        <p:tgtEl>
+                                          <p:spTgt spid="5"/>
+                                        </p:tgtEl>
+                                        <p:attrNameLst>
+                                          <p:attrName>style.visibility</p:attrName>
+                                        </p:attrNameLst>
+                                      </p:cBhvr>
+                                      <p:to>
+                                        <p:strVal val="visible"/>
+                                      </p:to>
+                                    </p:set>
+                                    <p:anim calcmode="lin" valueType="num">
+                                      <p:cBhvr additive="base">
+                                        <p:cTn id="7" dur="500" fill="hold"/>
+                                        <p:tgtEl>
+                                          <p:spTgt spid="5"/>
+                                        </p:tgtEl>
+                                        <p:attrNameLst>
+                                          <p:attrName>ppt_x</p:attrName>
+                                        </p:attrNameLst>
+                                      </p:cBhvr>
+                                      <p:tavLst>
+                                        <p:tav tm="0">
+                                          <p:val>
+                                            <p:strVal val="#ppt_x"/>
+                                          </p:val>
+                                        </p:tav>
+                                        <p:tav tm="100000">
+                                          <p:val>
+                                            <p:strVal val="#ppt_x"/>
+                                          </p:val>
+                                        </p:tav>
+                                      </p:tavLst>
+                                    </p:anim>
+                                    <p:anim calcmode="lin" valueType="num">
+                                      <p:cBhvr additive="base">
+                                        <p:cTn id="8" dur="500" fill="hold"/>
+                                        <p:tgtEl>
+                                          <p:spTgt spid="5"/>
+                                        </p:tgtEl>
+                                        <p:attrNameLst>
+                                          <p:attrName>ppt_y</p:attrName>
+                                        </p:attrNameLst>
+                                      </p:cBhvr>
+                                      <p:tavLst>
+                                        <p:tav tm="0">
+                                          <p:val>
+                                            <p:strVal val="1+#ppt_h/2"/>
+                                          </p:val>
+                                        </p:tav>
+                                        <p:tav tm="100000">
+                                          <p:val>
+                                            <p:strVal val="#ppt_y"/>
+                                          </p:val>
+                                        </p:tav>
+                                      </p:tavLst>
+                                    </p:anim>
+                                  </p:childTnLst>
+                                </p:cTn>
+                              </p:par>
+                              <p:par>
+                                <p:cTn id="9" presetID="2" presetClass="entr" presetSubtype="4" fill="hold" nodeType="withEffect">
+                                  <p:stCondLst>
+                                    <p:cond delay="0"/>
+                                  </p:stCondLst>
+                                  <p:childTnLst>
+                                    <p:set>
+                                      <p:cBhvr>
+                                        <p:cTn id="10" dur="1" fill="hold">
+                                          <p:stCondLst>
+                                            <p:cond delay="0"/>
+                                          </p:stCondLst>
+                                        </p:cTn>
+                                        <p:tgtEl>
+                                          <p:spTgt spid="4"/>
+                                        </p:tgtEl>
+                                        <p:attrNameLst>
+                                          <p:attrName>style.visibility</p:attrName>
+                                        </p:attrNameLst>
+                                      </p:cBhvr>
+                                      <p:to>
+                                        <p:strVal val="visible"/>
+                                      </p:to>
+                                    </p:set>
+                                    <p:anim calcmode="lin" valueType="num">
+                                      <p:cBhvr additive="base">
+                                        <p:cTn id="11" dur="500" fill="hold"/>
+                                        <p:tgtEl>
+                                          <p:spTgt spid="4"/>
+                                        </p:tgtEl>
+                                        <p:attrNameLst>
+                                          <p:attrName>ppt_x</p:attrName>
+                                        </p:attrNameLst>
+                                      </p:cBhvr>
+                                      <p:tavLst>
+                                        <p:tav tm="0">
+                                          <p:val>
+                                            <p:strVal val="#ppt_x"/>
+                                          </p:val>
+                                        </p:tav>
+                                        <p:tav tm="100000">
+                                          <p:val>
+                                            <p:strVal val="#ppt_x"/>
+                                          </p:val>
+                                        </p:tav>
+                                      </p:tavLst>
+                                    </p:anim>
+                                    <p:anim calcmode="lin" valueType="num">
+                                      <p:cBhvr additive="base">
+                                        <p:cTn id="12" dur="500" fill="hold"/>
+                                        <p:tgtEl>
+                                          <p:spTgt spid="4"/>
+                                        </p:tgtEl>
+                                        <p:attrNameLst>
+                                          <p:attrName>ppt_y</p:attrName>
+                                        </p:attrNameLst>
+                                      </p:cBhvr>
+                                      <p:tavLst>
+                                        <p:tav tm="0">
+                                          <p:val>
+                                            <p:strVal val="1+#ppt_h/2"/>
+                                          </p:val>
+                                        </p:tav>
+                                        <p:tav tm="100000">
+                                          <p:val>
+                                            <p:strVal val="#ppt_y"/>
+                                          </p:val>
+                                        </p:tav>
+                                      </p:tavLst>
+                                    </p:anim>
+                                  </p:childTnLst>
+                                </p:cTn>
+                              </p:par>
+                            </p:childTnLst>
+                          </p:cTn>
+                        </p:par>
+                      </p:childTnLst>
+                    </p:cTn>
+                  </p:par>
+                  <p:par>
+                    <p:cTn id="13" fill="hold">
+                      <p:stCondLst>
+                        <p:cond delay="indefinite"/>
+                      </p:stCondLst>
+                      <p:childTnLst>
+                        <p:par>
+                          <p:cTn id="14" fill="hold">
+                            <p:stCondLst>
+                              <p:cond delay="0"/>
+                            </p:stCondLst>
+                            <p:childTnLst>
+                              <p:par>
+                                <p:cTn id="15" presetID="2" presetClass="entr" presetSubtype="4" fill="hold" grpId="0" nodeType="clickEffect">
+                                  <p:stCondLst>
+                                    <p:cond delay="0"/>
+                                  </p:stCondLst>
+                                  <p:childTnLst>
+                                    <p:set>
+                                      <p:cBhvr>
+                                        <p:cTn id="16" dur="1" fill="hold">
+                                          <p:stCondLst>
+                                            <p:cond delay="0"/>
+                                          </p:stCondLst>
+                                        </p:cTn>
+                                        <p:tgtEl>
+                                          <p:spTgt spid="7"/>
+                                        </p:tgtEl>
+                                        <p:attrNameLst>
+                                          <p:attrName>style.visibility</p:attrName>
+                                        </p:attrNameLst>
+                                      </p:cBhvr>
+                                      <p:to>
+                                        <p:strVal val="visible"/>
+                                      </p:to>
+                                    </p:set>
+                                    <p:anim calcmode="lin" valueType="num">
+                                      <p:cBhvr additive="base">
+                                        <p:cTn id="17" dur="500" fill="hold"/>
+                                        <p:tgtEl>
+                                          <p:spTgt spid="7"/>
+                                        </p:tgtEl>
+                                        <p:attrNameLst>
+                                          <p:attrName>ppt_x</p:attrName>
+                                        </p:attrNameLst>
+                                      </p:cBhvr>
+                                      <p:tavLst>
+                                        <p:tav tm="0">
+                                          <p:val>
+                                            <p:strVal val="#ppt_x"/>
+                                          </p:val>
+                                        </p:tav>
+                                        <p:tav tm="100000">
+                                          <p:val>
+                                            <p:strVal val="#ppt_x"/>
+                                          </p:val>
+                                        </p:tav>
+                                      </p:tavLst>
+                                    </p:anim>
+                                    <p:anim calcmode="lin" valueType="num">
+                                      <p:cBhvr additive="base">
+                                        <p:cTn id="18" dur="500" fill="hold"/>
+                                        <p:tgtEl>
+                                          <p:spTgt spid="7"/>
+                                        </p:tgtEl>
+                                        <p:attrNameLst>
+                                          <p:attrName>ppt_y</p:attrName>
+                                        </p:attrNameLst>
+                                      </p:cBhvr>
+                                      <p:tavLst>
+                                        <p:tav tm="0">
+                                          <p:val>
+                                            <p:strVal val="1+#ppt_h/2"/>
+                                          </p:val>
+                                        </p:tav>
+                                        <p:tav tm="100000">
+                                          <p:val>
+                                            <p:strVal val="#ppt_y"/>
+                                          </p:val>
+                                        </p:tav>
+                                      </p:tavLst>
+                                    </p:anim>
+                                  </p:childTnLst>
+                                </p:cTn>
+                              </p:par>
+                              <p:par>
+                                <p:cTn id="19" presetID="2" presetClass="entr" presetSubtype="4" fill="hold" nodeType="withEffect">
+                                  <p:stCondLst>
+                                    <p:cond delay="0"/>
+                                  </p:stCondLst>
+                                  <p:childTnLst>
+                                    <p:set>
+                                      <p:cBhvr>
+                                        <p:cTn id="20" dur="1" fill="hold">
+                                          <p:stCondLst>
+                                            <p:cond delay="0"/>
+                                          </p:stCondLst>
+                                        </p:cTn>
+                                        <p:tgtEl>
+                                          <p:spTgt spid="6"/>
+                                        </p:tgtEl>
+                                        <p:attrNameLst>
+                                          <p:attrName>style.visibility</p:attrName>
+                                        </p:attrNameLst>
+                                      </p:cBhvr>
+                                      <p:to>
+                                        <p:strVal val="visible"/>
+                                      </p:to>
+                                    </p:set>
+                                    <p:anim calcmode="lin" valueType="num">
+                                      <p:cBhvr additive="base">
+                                        <p:cTn id="21" dur="500" fill="hold"/>
+                                        <p:tgtEl>
+                                          <p:spTgt spid="6"/>
+                                        </p:tgtEl>
+                                        <p:attrNameLst>
+                                          <p:attrName>ppt_x</p:attrName>
+                                        </p:attrNameLst>
+                                      </p:cBhvr>
+                                      <p:tavLst>
+                                        <p:tav tm="0">
+                                          <p:val>
+                                            <p:strVal val="#ppt_x"/>
+                                          </p:val>
+                                        </p:tav>
+                                        <p:tav tm="100000">
+                                          <p:val>
+                                            <p:strVal val="#ppt_x"/>
+                                          </p:val>
+                                        </p:tav>
+                                      </p:tavLst>
+                                    </p:anim>
+                                    <p:anim calcmode="lin" valueType="num">
+                                      <p:cBhvr additive="base">
+                                        <p:cTn id="22" dur="500" fill="hold"/>
+                                        <p:tgtEl>
+                                          <p:spTgt spid="6"/>
+                                        </p:tgtEl>
+                                        <p:attrNameLst>
+                                          <p:attrName>ppt_y</p:attrName>
+                                        </p:attrNameLst>
+                                      </p:cBhvr>
+                                      <p:tavLst>
+                                        <p:tav tm="0">
+                                          <p:val>
+                                            <p:strVal val="1+#ppt_h/2"/>
+                                          </p:val>
+                                        </p:tav>
+                                        <p:tav tm="100000">
+                                          <p:val>
+                                            <p:strVal val="#ppt_y"/>
+                                          </p:val>
+                                        </p:tav>
+                                      </p:tavLst>
+                                    </p:anim>
+                                  </p:childTnLst>
+                                </p:cTn>
+                              </p:par>
+                            </p:childTnLst>
+                          </p:cTn>
+                        </p:par>
+                      </p:childTnLst>
+                    </p:cTn>
+                  </p:par>
+                </p:childTnLst>
+              </p:cTn>
+              <p:prevCondLst>
+                <p:cond evt="onPrev" delay="0">
+                  <p:tgtEl>
+                    <p:sldTgt/>
+                  </p:tgtEl>
+                </p:cond>
+              </p:prevCondLst>
+              <p:nextCondLst>
+                <p:cond evt="onNext" delay="0">
+                  <p:tgtEl>
+                    <p:sldTgt/>
+                  </p:tgtEl>
+                </p:cond>
+              </p:nextCondLst>
+            </p:seq>
+          </p:childTnLst>
+        </p:cTn>
+      </p:par>
+    </p:tnLst>
+    <p:bldLst>
+      <p:bldP spid="5" grpId="0"/>
+      <p:bldP spid="5" grpId="1"/>
+      <p:bldP spid="7" grpId="0"/>
+      <p:bldP spid="7" grpId="1"/>
+    </p:bldLst>
+  </p:timing>
+</p:sld>
+</file>
+
+<file path=ppt/slides/slide6.xml><?xml version="1.0" encoding="utf-8"?>
+<p:sld xmlns:a="http://schemas.openxmlformats.org/drawingml/2006/main" xmlns:r="http://schemas.openxmlformats.org/officeDocument/2006/relationships" xmlns:p="http://schemas.openxmlformats.org/presentationml/2006/main">
+  <p:cSld>
+    <p:spTree>
+      <p:nvGrpSpPr>
+        <p:cNvPr id="1" name=""/>
+        <p:cNvGrpSpPr/>
+        <p:nvPr/>
+      </p:nvGrpSpPr>
+      <p:grpSpPr/>
+      <p:sp>
+        <p:nvSpPr>
+          <p:cNvPr id="2" name="文本框 1"/>
+          <p:cNvSpPr txBox="1"/>
+          <p:nvPr/>
+        </p:nvSpPr>
+        <p:spPr>
+          <a:xfrm>
+            <a:off x="859155" y="828675"/>
+            <a:ext cx="4064000" cy="398780"/>
+          </a:xfrm>
+          <a:prstGeom prst="rect">
+            <a:avLst/>
+          </a:prstGeom>
+          <a:noFill/>
+        </p:spPr>
+        <p:txBody>
+          <a:bodyPr wrap="square" rtlCol="0">
+            <a:spAutoFit/>
+          </a:bodyPr>
+          <a:p>
+            <a:r>
+              <a:rPr lang="zh-CN" altLang="en-US" sz="2000"/>
+              <a:t>使用的梯度也相应地分成两部分：</a:t>
+            </a:r>
+            <a:endParaRPr lang="zh-CN" altLang="en-US" sz="2000"/>
+          </a:p>
+        </p:txBody>
+      </p:sp>
+      <p:pic>
+        <p:nvPicPr>
+          <p:cNvPr id="3" name="图片 2"/>
+          <p:cNvPicPr>
+            <a:picLocks noChangeAspect="1"/>
+          </p:cNvPicPr>
+          <p:nvPr/>
+        </p:nvPicPr>
+        <p:blipFill>
+          <a:blip r:embed="rId1"/>
+          <a:stretch>
+            <a:fillRect/>
+          </a:stretch>
+        </p:blipFill>
+        <p:spPr>
+          <a:xfrm>
+            <a:off x="4923155" y="2496820"/>
+            <a:ext cx="2431415" cy="654685"/>
+          </a:xfrm>
+          <a:prstGeom prst="rect">
+            <a:avLst/>
+          </a:prstGeom>
+        </p:spPr>
+      </p:pic>
+      <p:pic>
+        <p:nvPicPr>
+          <p:cNvPr id="4" name="图片 3"/>
+          <p:cNvPicPr>
+            <a:picLocks noChangeAspect="1"/>
+          </p:cNvPicPr>
+          <p:nvPr/>
+        </p:nvPicPr>
+        <p:blipFill>
+          <a:blip r:embed="rId2"/>
+          <a:stretch>
+            <a:fillRect/>
+          </a:stretch>
+        </p:blipFill>
+        <p:spPr>
+          <a:xfrm>
+            <a:off x="3618865" y="3151505"/>
+            <a:ext cx="5040630" cy="654050"/>
+          </a:xfrm>
+          <a:prstGeom prst="rect">
+            <a:avLst/>
+          </a:prstGeom>
+        </p:spPr>
+      </p:pic>
+      <p:cxnSp>
+        <p:nvCxnSpPr>
+          <p:cNvPr id="5" name="直接箭头连接符 4"/>
+          <p:cNvCxnSpPr>
+            <a:stCxn id="3" idx="0"/>
+            <a:endCxn id="6" idx="2"/>
+          </p:cNvCxnSpPr>
+          <p:nvPr/>
+        </p:nvCxnSpPr>
+        <p:spPr>
+          <a:xfrm flipH="1" flipV="1">
+            <a:off x="5720080" y="2055495"/>
+            <a:ext cx="419100" cy="441325"/>
+          </a:xfrm>
+          <a:prstGeom prst="straightConnector1">
+            <a:avLst/>
+          </a:prstGeom>
+          <a:ln w="31750" cap="rnd">
+            <a:solidFill>
+              <a:schemeClr val="accent6"/>
+            </a:solidFill>
+            <a:round/>
+            <a:tailEnd type="arrow" w="med" len="med"/>
+          </a:ln>
+        </p:spPr>
+        <p:style>
+          <a:lnRef idx="0">
+            <a:srgbClr val="FFFFFF"/>
+          </a:lnRef>
+          <a:fillRef idx="0">
+            <a:srgbClr val="FFFFFF"/>
+          </a:fillRef>
+          <a:effectRef idx="0">
+            <a:srgbClr val="FFFFFF"/>
+          </a:effectRef>
+          <a:fontRef idx="minor">
+            <a:schemeClr val="tx1"/>
+          </a:fontRef>
+        </p:style>
+      </p:cxnSp>
+      <p:sp>
+        <p:nvSpPr>
+          <p:cNvPr id="6" name="文本框 5"/>
+          <p:cNvSpPr txBox="1"/>
+          <p:nvPr/>
+        </p:nvSpPr>
+        <p:spPr>
+          <a:xfrm>
+            <a:off x="5119370" y="1656715"/>
+            <a:ext cx="1201420" cy="398780"/>
+          </a:xfrm>
+          <a:prstGeom prst="rect">
+            <a:avLst/>
+          </a:prstGeom>
+          <a:noFill/>
+        </p:spPr>
+        <p:txBody>
+          <a:bodyPr wrap="square" rtlCol="0">
+            <a:spAutoFit/>
+          </a:bodyPr>
+          <a:p>
+            <a:r>
+              <a:rPr lang="zh-CN" altLang="en-US" sz="2000"/>
+              <a:t>模型梯度</a:t>
+            </a:r>
+            <a:endParaRPr lang="zh-CN" altLang="en-US" sz="2000"/>
+          </a:p>
+        </p:txBody>
+      </p:sp>
+      <p:sp>
+        <p:nvSpPr>
+          <p:cNvPr id="7" name="文本框 6"/>
+          <p:cNvSpPr txBox="1"/>
+          <p:nvPr/>
+        </p:nvSpPr>
+        <p:spPr>
+          <a:xfrm>
+            <a:off x="7100570" y="1656715"/>
+            <a:ext cx="1201420" cy="398780"/>
+          </a:xfrm>
+          <a:prstGeom prst="rect">
+            <a:avLst/>
+          </a:prstGeom>
+          <a:noFill/>
+        </p:spPr>
+        <p:txBody>
+          <a:bodyPr wrap="square" rtlCol="0">
+            <a:spAutoFit/>
+          </a:bodyPr>
+          <a:p>
+            <a:r>
+              <a:rPr lang="zh-CN" altLang="en-US" sz="2000"/>
+              <a:t>梯度误差</a:t>
+            </a:r>
+            <a:endParaRPr lang="zh-CN" altLang="en-US" sz="2000"/>
+          </a:p>
+        </p:txBody>
+      </p:sp>
+      <p:cxnSp>
+        <p:nvCxnSpPr>
+          <p:cNvPr id="8" name="直接箭头连接符 7"/>
+          <p:cNvCxnSpPr>
+            <a:endCxn id="7" idx="2"/>
+          </p:cNvCxnSpPr>
+          <p:nvPr/>
+        </p:nvCxnSpPr>
+        <p:spPr>
+          <a:xfrm flipV="1">
+            <a:off x="7265670" y="2055495"/>
+            <a:ext cx="435610" cy="441325"/>
+          </a:xfrm>
+          <a:prstGeom prst="straightConnector1">
+            <a:avLst/>
+          </a:prstGeom>
+          <a:ln w="31750" cap="rnd">
+            <a:solidFill>
+              <a:schemeClr val="accent6"/>
+            </a:solidFill>
+            <a:round/>
+            <a:tailEnd type="arrow" w="med" len="med"/>
+          </a:ln>
+        </p:spPr>
+        <p:style>
+          <a:lnRef idx="0">
+            <a:srgbClr val="FFFFFF"/>
+          </a:lnRef>
+          <a:fillRef idx="0">
+            <a:srgbClr val="FFFFFF"/>
+          </a:fillRef>
+          <a:effectRef idx="0">
+            <a:srgbClr val="FFFFFF"/>
+          </a:effectRef>
+          <a:fontRef idx="minor">
+            <a:schemeClr val="tx1"/>
+          </a:fontRef>
+        </p:style>
+      </p:cxnSp>
+      <p:cxnSp>
+        <p:nvCxnSpPr>
+          <p:cNvPr id="9" name="直接箭头连接符 8"/>
+          <p:cNvCxnSpPr>
+            <a:stCxn id="3" idx="1"/>
+            <a:endCxn id="10" idx="2"/>
+          </p:cNvCxnSpPr>
+          <p:nvPr/>
+        </p:nvCxnSpPr>
+        <p:spPr>
+          <a:xfrm flipH="1" flipV="1">
+            <a:off x="4047490" y="2496820"/>
+            <a:ext cx="875665" cy="327660"/>
+          </a:xfrm>
+          <a:prstGeom prst="straightConnector1">
+            <a:avLst/>
+          </a:prstGeom>
+          <a:ln w="31750" cap="rnd">
+            <a:solidFill>
+              <a:schemeClr val="accent6"/>
+            </a:solidFill>
+            <a:round/>
+            <a:tailEnd type="arrow" w="med" len="med"/>
+          </a:ln>
+        </p:spPr>
+        <p:style>
+          <a:lnRef idx="0">
+            <a:srgbClr val="FFFFFF"/>
+          </a:lnRef>
+          <a:fillRef idx="0">
+            <a:srgbClr val="FFFFFF"/>
+          </a:fillRef>
+          <a:effectRef idx="0">
+            <a:srgbClr val="FFFFFF"/>
+          </a:effectRef>
+          <a:fontRef idx="minor">
+            <a:schemeClr val="tx1"/>
+          </a:fontRef>
+        </p:style>
+      </p:cxnSp>
+      <p:sp>
+        <p:nvSpPr>
+          <p:cNvPr id="10" name="文本框 9"/>
+          <p:cNvSpPr txBox="1"/>
+          <p:nvPr/>
+        </p:nvSpPr>
+        <p:spPr>
+          <a:xfrm>
+            <a:off x="3171825" y="2128520"/>
+            <a:ext cx="1751330" cy="398780"/>
+          </a:xfrm>
+          <a:prstGeom prst="rect">
+            <a:avLst/>
+          </a:prstGeom>
+          <a:noFill/>
+        </p:spPr>
+        <p:txBody>
+          <a:bodyPr wrap="square" rtlCol="0">
+            <a:spAutoFit/>
+          </a:bodyPr>
+          <a:p>
+            <a:r>
+              <a:rPr lang="zh-CN" altLang="en-US" sz="2000"/>
+              <a:t>补偿模型梯度</a:t>
+            </a:r>
+            <a:endParaRPr lang="zh-CN" altLang="en-US" sz="2000"/>
+          </a:p>
+        </p:txBody>
+      </p:sp>
+      <p:sp>
+        <p:nvSpPr>
+          <p:cNvPr id="11" name="文本框 10"/>
+          <p:cNvSpPr txBox="1"/>
+          <p:nvPr/>
+        </p:nvSpPr>
+        <p:spPr>
+          <a:xfrm>
+            <a:off x="3689350" y="1227455"/>
+            <a:ext cx="4812665" cy="398780"/>
+          </a:xfrm>
+          <a:prstGeom prst="rect">
+            <a:avLst/>
+          </a:prstGeom>
+          <a:noFill/>
+        </p:spPr>
+        <p:txBody>
+          <a:bodyPr wrap="square" rtlCol="0">
+            <a:spAutoFit/>
+          </a:bodyPr>
+          <a:p>
+            <a:r>
+              <a:rPr lang="zh-CN" altLang="en-US" sz="2000"/>
+              <a:t>模型梯度</a:t>
+            </a:r>
+            <a:r>
+              <a:rPr lang="en-US" altLang="zh-CN" sz="2000"/>
+              <a:t>+</a:t>
+            </a:r>
+            <a:r>
+              <a:rPr lang="zh-CN" altLang="en-US" sz="2000"/>
+              <a:t>最新的梯度误差</a:t>
+            </a:r>
+            <a:r>
+              <a:rPr lang="en-US" altLang="zh-CN" sz="2000"/>
+              <a:t>=</a:t>
+            </a:r>
+            <a:r>
+              <a:rPr lang="zh-CN" altLang="en-US" sz="2000"/>
+              <a:t>补偿模型梯度</a:t>
+            </a:r>
+            <a:endParaRPr lang="zh-CN" altLang="en-US" sz="2000"/>
+          </a:p>
+        </p:txBody>
+      </p:sp>
+      <p:cxnSp>
+        <p:nvCxnSpPr>
+          <p:cNvPr id="13" name="直接箭头连接符 12"/>
+          <p:cNvCxnSpPr>
+            <a:endCxn id="14" idx="0"/>
+          </p:cNvCxnSpPr>
+          <p:nvPr/>
+        </p:nvCxnSpPr>
+        <p:spPr>
+          <a:xfrm flipH="1">
+            <a:off x="4422140" y="3685540"/>
+            <a:ext cx="782955" cy="336550"/>
+          </a:xfrm>
+          <a:prstGeom prst="straightConnector1">
+            <a:avLst/>
+          </a:prstGeom>
+          <a:ln w="31750" cap="rnd">
+            <a:solidFill>
+              <a:schemeClr val="accent6"/>
+            </a:solidFill>
+            <a:round/>
+            <a:tailEnd type="arrow" w="med" len="med"/>
+          </a:ln>
+        </p:spPr>
+        <p:style>
+          <a:lnRef idx="0">
+            <a:srgbClr val="FFFFFF"/>
+          </a:lnRef>
+          <a:fillRef idx="0">
+            <a:srgbClr val="FFFFFF"/>
+          </a:fillRef>
+          <a:effectRef idx="0">
+            <a:srgbClr val="FFFFFF"/>
+          </a:effectRef>
+          <a:fontRef idx="minor">
+            <a:schemeClr val="tx1"/>
+          </a:fontRef>
+        </p:style>
+      </p:cxnSp>
+      <p:sp>
+        <p:nvSpPr>
+          <p:cNvPr id="14" name="文本框 13"/>
+          <p:cNvSpPr txBox="1"/>
+          <p:nvPr/>
+        </p:nvSpPr>
+        <p:spPr>
+          <a:xfrm>
+            <a:off x="2522855" y="4022090"/>
+            <a:ext cx="3797935" cy="398780"/>
+          </a:xfrm>
+          <a:prstGeom prst="rect">
+            <a:avLst/>
+          </a:prstGeom>
+          <a:noFill/>
+        </p:spPr>
+        <p:txBody>
+          <a:bodyPr wrap="square" rtlCol="0">
+            <a:spAutoFit/>
+          </a:bodyPr>
+          <a:p>
+            <a:r>
+              <a:rPr lang="zh-CN" altLang="en-US" sz="2000"/>
+              <a:t>最近一次计算真实梯度的补偿点</a:t>
+            </a:r>
+            <a:endParaRPr lang="en-US" altLang="zh-CN" sz="2000"/>
+          </a:p>
+        </p:txBody>
+      </p:sp>
+      <p:sp>
+        <p:nvSpPr>
+          <p:cNvPr id="15" name="文本框 14"/>
+          <p:cNvSpPr txBox="1"/>
+          <p:nvPr/>
+        </p:nvSpPr>
+        <p:spPr>
+          <a:xfrm>
+            <a:off x="1793875" y="4556125"/>
+            <a:ext cx="8271510" cy="706755"/>
+          </a:xfrm>
+          <a:prstGeom prst="rect">
+            <a:avLst/>
+          </a:prstGeom>
+          <a:noFill/>
+        </p:spPr>
+        <p:txBody>
+          <a:bodyPr wrap="square" rtlCol="0">
+            <a:spAutoFit/>
+          </a:bodyPr>
+          <a:p>
+            <a:r>
+              <a:rPr lang="zh-CN" altLang="en-US" sz="2000"/>
+              <a:t>当目前使用的补偿不可信时，才使用模型自由策略更新误差。</a:t>
+            </a:r>
+            <a:endParaRPr lang="zh-CN" altLang="en-US" sz="2000"/>
+          </a:p>
+          <a:p>
+            <a:r>
+              <a:rPr lang="zh-CN" altLang="en-US" sz="2000"/>
+              <a:t>所以在整体算法中，两个阶段是交替的：模型基础阶段和模型自由阶段。</a:t>
+            </a:r>
+            <a:endParaRPr lang="zh-CN" altLang="en-US" sz="2000"/>
           </a:p>
         </p:txBody>
       </p:sp>
     </p:spTree>
     <p:custDataLst>
       <p:tags r:id="rId3"/>
+    </p:custDataLst>
+  </p:cSld>
+  <p:clrMapOvr>
+    <a:masterClrMapping/>
+  </p:clrMapOvr>
+  <p:timing>
+    <p:tnLst>
+      <p:par>
+        <p:cTn id="1" dur="indefinite" restart="never" nodeType="tmRoot">
+          <p:childTnLst>
+            <p:seq concurrent="1" nextAc="seek">
+              <p:cTn id="2" dur="indefinite" nodeType="mainSeq">
+                <p:childTnLst>
+                  <p:par>
+                    <p:cTn id="3" fill="hold">
+                      <p:stCondLst>
+                        <p:cond delay="indefinite"/>
+                      </p:stCondLst>
+                      <p:childTnLst>
+                        <p:par>
+                          <p:cTn id="4" fill="hold">
+                            <p:stCondLst>
+                              <p:cond delay="0"/>
+                            </p:stCondLst>
+                            <p:childTnLst>
+                              <p:par>
+                                <p:cTn id="5" presetID="2" presetClass="entr" presetSubtype="4" fill="hold" grpId="0" nodeType="clickEffect">
+                                  <p:stCondLst>
+                                    <p:cond delay="0"/>
+                                  </p:stCondLst>
+                                  <p:childTnLst>
+                                    <p:set>
+                                      <p:cBhvr>
+                                        <p:cTn id="6" dur="1" fill="hold">
+                                          <p:stCondLst>
+                                            <p:cond delay="0"/>
+                                          </p:stCondLst>
+                                        </p:cTn>
+                                        <p:tgtEl>
+                                          <p:spTgt spid="6"/>
+                                        </p:tgtEl>
+                                        <p:attrNameLst>
+                                          <p:attrName>style.visibility</p:attrName>
+                                        </p:attrNameLst>
+                                      </p:cBhvr>
+                                      <p:to>
+                                        <p:strVal val="visible"/>
+                                      </p:to>
+                                    </p:set>
+                                    <p:anim calcmode="lin" valueType="num">
+                                      <p:cBhvr additive="base">
+                                        <p:cTn id="7" dur="500" fill="hold"/>
+                                        <p:tgtEl>
+                                          <p:spTgt spid="6"/>
+                                        </p:tgtEl>
+                                        <p:attrNameLst>
+                                          <p:attrName>ppt_x</p:attrName>
+                                        </p:attrNameLst>
+                                      </p:cBhvr>
+                                      <p:tavLst>
+                                        <p:tav tm="0">
+                                          <p:val>
+                                            <p:strVal val="#ppt_x"/>
+                                          </p:val>
+                                        </p:tav>
+                                        <p:tav tm="100000">
+                                          <p:val>
+                                            <p:strVal val="#ppt_x"/>
+                                          </p:val>
+                                        </p:tav>
+                                      </p:tavLst>
+                                    </p:anim>
+                                    <p:anim calcmode="lin" valueType="num">
+                                      <p:cBhvr additive="base">
+                                        <p:cTn id="8" dur="500" fill="hold"/>
+                                        <p:tgtEl>
+                                          <p:spTgt spid="6"/>
+                                        </p:tgtEl>
+                                        <p:attrNameLst>
+                                          <p:attrName>ppt_y</p:attrName>
+                                        </p:attrNameLst>
+                                      </p:cBhvr>
+                                      <p:tavLst>
+                                        <p:tav tm="0">
+                                          <p:val>
+                                            <p:strVal val="1+#ppt_h/2"/>
+                                          </p:val>
+                                        </p:tav>
+                                        <p:tav tm="100000">
+                                          <p:val>
+                                            <p:strVal val="#ppt_y"/>
+                                          </p:val>
+                                        </p:tav>
+                                      </p:tavLst>
+                                    </p:anim>
+                                  </p:childTnLst>
+                                </p:cTn>
+                              </p:par>
+                              <p:par>
+                                <p:cTn id="9" presetID="2" presetClass="entr" presetSubtype="4" fill="hold" nodeType="withEffect">
+                                  <p:stCondLst>
+                                    <p:cond delay="0"/>
+                                  </p:stCondLst>
+                                  <p:childTnLst>
+                                    <p:set>
+                                      <p:cBhvr>
+                                        <p:cTn id="10" dur="1" fill="hold">
+                                          <p:stCondLst>
+                                            <p:cond delay="0"/>
+                                          </p:stCondLst>
+                                        </p:cTn>
+                                        <p:tgtEl>
+                                          <p:spTgt spid="5"/>
+                                        </p:tgtEl>
+                                        <p:attrNameLst>
+                                          <p:attrName>style.visibility</p:attrName>
+                                        </p:attrNameLst>
+                                      </p:cBhvr>
+                                      <p:to>
+                                        <p:strVal val="visible"/>
+                                      </p:to>
+                                    </p:set>
+                                    <p:anim calcmode="lin" valueType="num">
+                                      <p:cBhvr additive="base">
+                                        <p:cTn id="11" dur="500" fill="hold"/>
+                                        <p:tgtEl>
+                                          <p:spTgt spid="5"/>
+                                        </p:tgtEl>
+                                        <p:attrNameLst>
+                                          <p:attrName>ppt_x</p:attrName>
+                                        </p:attrNameLst>
+                                      </p:cBhvr>
+                                      <p:tavLst>
+                                        <p:tav tm="0">
+                                          <p:val>
+                                            <p:strVal val="#ppt_x"/>
+                                          </p:val>
+                                        </p:tav>
+                                        <p:tav tm="100000">
+                                          <p:val>
+                                            <p:strVal val="#ppt_x"/>
+                                          </p:val>
+                                        </p:tav>
+                                      </p:tavLst>
+                                    </p:anim>
+                                    <p:anim calcmode="lin" valueType="num">
+                                      <p:cBhvr additive="base">
+                                        <p:cTn id="12" dur="500" fill="hold"/>
+                                        <p:tgtEl>
+                                          <p:spTgt spid="5"/>
+                                        </p:tgtEl>
+                                        <p:attrNameLst>
+                                          <p:attrName>ppt_y</p:attrName>
+                                        </p:attrNameLst>
+                                      </p:cBhvr>
+                                      <p:tavLst>
+                                        <p:tav tm="0">
+                                          <p:val>
+                                            <p:strVal val="1+#ppt_h/2"/>
+                                          </p:val>
+                                        </p:tav>
+                                        <p:tav tm="100000">
+                                          <p:val>
+                                            <p:strVal val="#ppt_y"/>
+                                          </p:val>
+                                        </p:tav>
+                                      </p:tavLst>
+                                    </p:anim>
+                                  </p:childTnLst>
+                                </p:cTn>
+                              </p:par>
+                            </p:childTnLst>
+                          </p:cTn>
+                        </p:par>
+                      </p:childTnLst>
+                    </p:cTn>
+                  </p:par>
+                  <p:par>
+                    <p:cTn id="13" fill="hold">
+                      <p:stCondLst>
+                        <p:cond delay="indefinite"/>
+                      </p:stCondLst>
+                      <p:childTnLst>
+                        <p:par>
+                          <p:cTn id="14" fill="hold">
+                            <p:stCondLst>
+                              <p:cond delay="0"/>
+                            </p:stCondLst>
+                            <p:childTnLst>
+                              <p:par>
+                                <p:cTn id="15" presetID="2" presetClass="entr" presetSubtype="4" fill="hold" grpId="0" nodeType="clickEffect">
+                                  <p:stCondLst>
+                                    <p:cond delay="0"/>
+                                  </p:stCondLst>
+                                  <p:childTnLst>
+                                    <p:set>
+                                      <p:cBhvr>
+                                        <p:cTn id="16" dur="1" fill="hold">
+                                          <p:stCondLst>
+                                            <p:cond delay="0"/>
+                                          </p:stCondLst>
+                                        </p:cTn>
+                                        <p:tgtEl>
+                                          <p:spTgt spid="7"/>
+                                        </p:tgtEl>
+                                        <p:attrNameLst>
+                                          <p:attrName>style.visibility</p:attrName>
+                                        </p:attrNameLst>
+                                      </p:cBhvr>
+                                      <p:to>
+                                        <p:strVal val="visible"/>
+                                      </p:to>
+                                    </p:set>
+                                    <p:anim calcmode="lin" valueType="num">
+                                      <p:cBhvr additive="base">
+                                        <p:cTn id="17" dur="500" fill="hold"/>
+                                        <p:tgtEl>
+                                          <p:spTgt spid="7"/>
+                                        </p:tgtEl>
+                                        <p:attrNameLst>
+                                          <p:attrName>ppt_x</p:attrName>
+                                        </p:attrNameLst>
+                                      </p:cBhvr>
+                                      <p:tavLst>
+                                        <p:tav tm="0">
+                                          <p:val>
+                                            <p:strVal val="#ppt_x"/>
+                                          </p:val>
+                                        </p:tav>
+                                        <p:tav tm="100000">
+                                          <p:val>
+                                            <p:strVal val="#ppt_x"/>
+                                          </p:val>
+                                        </p:tav>
+                                      </p:tavLst>
+                                    </p:anim>
+                                    <p:anim calcmode="lin" valueType="num">
+                                      <p:cBhvr additive="base">
+                                        <p:cTn id="18" dur="500" fill="hold"/>
+                                        <p:tgtEl>
+                                          <p:spTgt spid="7"/>
+                                        </p:tgtEl>
+                                        <p:attrNameLst>
+                                          <p:attrName>ppt_y</p:attrName>
+                                        </p:attrNameLst>
+                                      </p:cBhvr>
+                                      <p:tavLst>
+                                        <p:tav tm="0">
+                                          <p:val>
+                                            <p:strVal val="1+#ppt_h/2"/>
+                                          </p:val>
+                                        </p:tav>
+                                        <p:tav tm="100000">
+                                          <p:val>
+                                            <p:strVal val="#ppt_y"/>
+                                          </p:val>
+                                        </p:tav>
+                                      </p:tavLst>
+                                    </p:anim>
+                                  </p:childTnLst>
+                                </p:cTn>
+                              </p:par>
+                              <p:par>
+                                <p:cTn id="19" presetID="2" presetClass="entr" presetSubtype="4" fill="hold" nodeType="withEffect">
+                                  <p:stCondLst>
+                                    <p:cond delay="0"/>
+                                  </p:stCondLst>
+                                  <p:childTnLst>
+                                    <p:set>
+                                      <p:cBhvr>
+                                        <p:cTn id="20" dur="1" fill="hold">
+                                          <p:stCondLst>
+                                            <p:cond delay="0"/>
+                                          </p:stCondLst>
+                                        </p:cTn>
+                                        <p:tgtEl>
+                                          <p:spTgt spid="8"/>
+                                        </p:tgtEl>
+                                        <p:attrNameLst>
+                                          <p:attrName>style.visibility</p:attrName>
+                                        </p:attrNameLst>
+                                      </p:cBhvr>
+                                      <p:to>
+                                        <p:strVal val="visible"/>
+                                      </p:to>
+                                    </p:set>
+                                    <p:anim calcmode="lin" valueType="num">
+                                      <p:cBhvr additive="base">
+                                        <p:cTn id="21" dur="500" fill="hold"/>
+                                        <p:tgtEl>
+                                          <p:spTgt spid="8"/>
+                                        </p:tgtEl>
+                                        <p:attrNameLst>
+                                          <p:attrName>ppt_x</p:attrName>
+                                        </p:attrNameLst>
+                                      </p:cBhvr>
+                                      <p:tavLst>
+                                        <p:tav tm="0">
+                                          <p:val>
+                                            <p:strVal val="#ppt_x"/>
+                                          </p:val>
+                                        </p:tav>
+                                        <p:tav tm="100000">
+                                          <p:val>
+                                            <p:strVal val="#ppt_x"/>
+                                          </p:val>
+                                        </p:tav>
+                                      </p:tavLst>
+                                    </p:anim>
+                                    <p:anim calcmode="lin" valueType="num">
+                                      <p:cBhvr additive="base">
+                                        <p:cTn id="22" dur="500" fill="hold"/>
+                                        <p:tgtEl>
+                                          <p:spTgt spid="8"/>
+                                        </p:tgtEl>
+                                        <p:attrNameLst>
+                                          <p:attrName>ppt_y</p:attrName>
+                                        </p:attrNameLst>
+                                      </p:cBhvr>
+                                      <p:tavLst>
+                                        <p:tav tm="0">
+                                          <p:val>
+                                            <p:strVal val="1+#ppt_h/2"/>
+                                          </p:val>
+                                        </p:tav>
+                                        <p:tav tm="100000">
+                                          <p:val>
+                                            <p:strVal val="#ppt_y"/>
+                                          </p:val>
+                                        </p:tav>
+                                      </p:tavLst>
+                                    </p:anim>
+                                  </p:childTnLst>
+                                </p:cTn>
+                              </p:par>
+                            </p:childTnLst>
+                          </p:cTn>
+                        </p:par>
+                      </p:childTnLst>
+                    </p:cTn>
+                  </p:par>
+                  <p:par>
+                    <p:cTn id="23" fill="hold">
+                      <p:stCondLst>
+                        <p:cond delay="indefinite"/>
+                      </p:stCondLst>
+                      <p:childTnLst>
+                        <p:par>
+                          <p:cTn id="24" fill="hold">
+                            <p:stCondLst>
+                              <p:cond delay="0"/>
+                            </p:stCondLst>
+                            <p:childTnLst>
+                              <p:par>
+                                <p:cTn id="25" presetID="2" presetClass="entr" presetSubtype="4" fill="hold" grpId="0" nodeType="clickEffect">
+                                  <p:stCondLst>
+                                    <p:cond delay="0"/>
+                                  </p:stCondLst>
+                                  <p:childTnLst>
+                                    <p:set>
+                                      <p:cBhvr>
+                                        <p:cTn id="26" dur="1" fill="hold">
+                                          <p:stCondLst>
+                                            <p:cond delay="0"/>
+                                          </p:stCondLst>
+                                        </p:cTn>
+                                        <p:tgtEl>
+                                          <p:spTgt spid="10"/>
+                                        </p:tgtEl>
+                                        <p:attrNameLst>
+                                          <p:attrName>style.visibility</p:attrName>
+                                        </p:attrNameLst>
+                                      </p:cBhvr>
+                                      <p:to>
+                                        <p:strVal val="visible"/>
+                                      </p:to>
+                                    </p:set>
+                                    <p:anim calcmode="lin" valueType="num">
+                                      <p:cBhvr additive="base">
+                                        <p:cTn id="27" dur="500" fill="hold"/>
+                                        <p:tgtEl>
+                                          <p:spTgt spid="10"/>
+                                        </p:tgtEl>
+                                        <p:attrNameLst>
+                                          <p:attrName>ppt_x</p:attrName>
+                                        </p:attrNameLst>
+                                      </p:cBhvr>
+                                      <p:tavLst>
+                                        <p:tav tm="0">
+                                          <p:val>
+                                            <p:strVal val="#ppt_x"/>
+                                          </p:val>
+                                        </p:tav>
+                                        <p:tav tm="100000">
+                                          <p:val>
+                                            <p:strVal val="#ppt_x"/>
+                                          </p:val>
+                                        </p:tav>
+                                      </p:tavLst>
+                                    </p:anim>
+                                    <p:anim calcmode="lin" valueType="num">
+                                      <p:cBhvr additive="base">
+                                        <p:cTn id="28" dur="500" fill="hold"/>
+                                        <p:tgtEl>
+                                          <p:spTgt spid="10"/>
+                                        </p:tgtEl>
+                                        <p:attrNameLst>
+                                          <p:attrName>ppt_y</p:attrName>
+                                        </p:attrNameLst>
+                                      </p:cBhvr>
+                                      <p:tavLst>
+                                        <p:tav tm="0">
+                                          <p:val>
+                                            <p:strVal val="1+#ppt_h/2"/>
+                                          </p:val>
+                                        </p:tav>
+                                        <p:tav tm="100000">
+                                          <p:val>
+                                            <p:strVal val="#ppt_y"/>
+                                          </p:val>
+                                        </p:tav>
+                                      </p:tavLst>
+                                    </p:anim>
+                                  </p:childTnLst>
+                                </p:cTn>
+                              </p:par>
+                              <p:par>
+                                <p:cTn id="29" presetID="2" presetClass="entr" presetSubtype="4" fill="hold" nodeType="withEffect">
+                                  <p:stCondLst>
+                                    <p:cond delay="0"/>
+                                  </p:stCondLst>
+                                  <p:childTnLst>
+                                    <p:set>
+                                      <p:cBhvr>
+                                        <p:cTn id="30" dur="1" fill="hold">
+                                          <p:stCondLst>
+                                            <p:cond delay="0"/>
+                                          </p:stCondLst>
+                                        </p:cTn>
+                                        <p:tgtEl>
+                                          <p:spTgt spid="9"/>
+                                        </p:tgtEl>
+                                        <p:attrNameLst>
+                                          <p:attrName>style.visibility</p:attrName>
+                                        </p:attrNameLst>
+                                      </p:cBhvr>
+                                      <p:to>
+                                        <p:strVal val="visible"/>
+                                      </p:to>
+                                    </p:set>
+                                    <p:anim calcmode="lin" valueType="num">
+                                      <p:cBhvr additive="base">
+                                        <p:cTn id="31" dur="500" fill="hold"/>
+                                        <p:tgtEl>
+                                          <p:spTgt spid="9"/>
+                                        </p:tgtEl>
+                                        <p:attrNameLst>
+                                          <p:attrName>ppt_x</p:attrName>
+                                        </p:attrNameLst>
+                                      </p:cBhvr>
+                                      <p:tavLst>
+                                        <p:tav tm="0">
+                                          <p:val>
+                                            <p:strVal val="#ppt_x"/>
+                                          </p:val>
+                                        </p:tav>
+                                        <p:tav tm="100000">
+                                          <p:val>
+                                            <p:strVal val="#ppt_x"/>
+                                          </p:val>
+                                        </p:tav>
+                                      </p:tavLst>
+                                    </p:anim>
+                                    <p:anim calcmode="lin" valueType="num">
+                                      <p:cBhvr additive="base">
+                                        <p:cTn id="32" dur="500" fill="hold"/>
+                                        <p:tgtEl>
+                                          <p:spTgt spid="9"/>
+                                        </p:tgtEl>
+                                        <p:attrNameLst>
+                                          <p:attrName>ppt_y</p:attrName>
+                                        </p:attrNameLst>
+                                      </p:cBhvr>
+                                      <p:tavLst>
+                                        <p:tav tm="0">
+                                          <p:val>
+                                            <p:strVal val="1+#ppt_h/2"/>
+                                          </p:val>
+                                        </p:tav>
+                                        <p:tav tm="100000">
+                                          <p:val>
+                                            <p:strVal val="#ppt_y"/>
+                                          </p:val>
+                                        </p:tav>
+                                      </p:tavLst>
+                                    </p:anim>
+                                  </p:childTnLst>
+                                </p:cTn>
+                              </p:par>
+                            </p:childTnLst>
+                          </p:cTn>
+                        </p:par>
+                      </p:childTnLst>
+                    </p:cTn>
+                  </p:par>
+                  <p:par>
+                    <p:cTn id="33" fill="hold">
+                      <p:stCondLst>
+                        <p:cond delay="indefinite"/>
+                      </p:stCondLst>
+                      <p:childTnLst>
+                        <p:par>
+                          <p:cTn id="34" fill="hold">
+                            <p:stCondLst>
+                              <p:cond delay="0"/>
+                            </p:stCondLst>
+                            <p:childTnLst>
+                              <p:par>
+                                <p:cTn id="35" presetID="2" presetClass="entr" presetSubtype="4" fill="hold" grpId="0" nodeType="clickEffect">
+                                  <p:stCondLst>
+                                    <p:cond delay="0"/>
+                                  </p:stCondLst>
+                                  <p:childTnLst>
+                                    <p:set>
+                                      <p:cBhvr>
+                                        <p:cTn id="36" dur="1" fill="hold">
+                                          <p:stCondLst>
+                                            <p:cond delay="0"/>
+                                          </p:stCondLst>
+                                        </p:cTn>
+                                        <p:tgtEl>
+                                          <p:spTgt spid="14"/>
+                                        </p:tgtEl>
+                                        <p:attrNameLst>
+                                          <p:attrName>style.visibility</p:attrName>
+                                        </p:attrNameLst>
+                                      </p:cBhvr>
+                                      <p:to>
+                                        <p:strVal val="visible"/>
+                                      </p:to>
+                                    </p:set>
+                                    <p:anim calcmode="lin" valueType="num">
+                                      <p:cBhvr additive="base">
+                                        <p:cTn id="37" dur="500" fill="hold"/>
+                                        <p:tgtEl>
+                                          <p:spTgt spid="14"/>
+                                        </p:tgtEl>
+                                        <p:attrNameLst>
+                                          <p:attrName>ppt_x</p:attrName>
+                                        </p:attrNameLst>
+                                      </p:cBhvr>
+                                      <p:tavLst>
+                                        <p:tav tm="0">
+                                          <p:val>
+                                            <p:strVal val="#ppt_x"/>
+                                          </p:val>
+                                        </p:tav>
+                                        <p:tav tm="100000">
+                                          <p:val>
+                                            <p:strVal val="#ppt_x"/>
+                                          </p:val>
+                                        </p:tav>
+                                      </p:tavLst>
+                                    </p:anim>
+                                    <p:anim calcmode="lin" valueType="num">
+                                      <p:cBhvr additive="base">
+                                        <p:cTn id="38" dur="500" fill="hold"/>
+                                        <p:tgtEl>
+                                          <p:spTgt spid="14"/>
+                                        </p:tgtEl>
+                                        <p:attrNameLst>
+                                          <p:attrName>ppt_y</p:attrName>
+                                        </p:attrNameLst>
+                                      </p:cBhvr>
+                                      <p:tavLst>
+                                        <p:tav tm="0">
+                                          <p:val>
+                                            <p:strVal val="1+#ppt_h/2"/>
+                                          </p:val>
+                                        </p:tav>
+                                        <p:tav tm="100000">
+                                          <p:val>
+                                            <p:strVal val="#ppt_y"/>
+                                          </p:val>
+                                        </p:tav>
+                                      </p:tavLst>
+                                    </p:anim>
+                                  </p:childTnLst>
+                                </p:cTn>
+                              </p:par>
+                              <p:par>
+                                <p:cTn id="39" presetID="2" presetClass="entr" presetSubtype="4" fill="hold" nodeType="withEffect">
+                                  <p:stCondLst>
+                                    <p:cond delay="0"/>
+                                  </p:stCondLst>
+                                  <p:childTnLst>
+                                    <p:set>
+                                      <p:cBhvr>
+                                        <p:cTn id="40" dur="1" fill="hold">
+                                          <p:stCondLst>
+                                            <p:cond delay="0"/>
+                                          </p:stCondLst>
+                                        </p:cTn>
+                                        <p:tgtEl>
+                                          <p:spTgt spid="13"/>
+                                        </p:tgtEl>
+                                        <p:attrNameLst>
+                                          <p:attrName>style.visibility</p:attrName>
+                                        </p:attrNameLst>
+                                      </p:cBhvr>
+                                      <p:to>
+                                        <p:strVal val="visible"/>
+                                      </p:to>
+                                    </p:set>
+                                    <p:anim calcmode="lin" valueType="num">
+                                      <p:cBhvr additive="base">
+                                        <p:cTn id="41" dur="500" fill="hold"/>
+                                        <p:tgtEl>
+                                          <p:spTgt spid="13"/>
+                                        </p:tgtEl>
+                                        <p:attrNameLst>
+                                          <p:attrName>ppt_x</p:attrName>
+                                        </p:attrNameLst>
+                                      </p:cBhvr>
+                                      <p:tavLst>
+                                        <p:tav tm="0">
+                                          <p:val>
+                                            <p:strVal val="#ppt_x"/>
+                                          </p:val>
+                                        </p:tav>
+                                        <p:tav tm="100000">
+                                          <p:val>
+                                            <p:strVal val="#ppt_x"/>
+                                          </p:val>
+                                        </p:tav>
+                                      </p:tavLst>
+                                    </p:anim>
+                                    <p:anim calcmode="lin" valueType="num">
+                                      <p:cBhvr additive="base">
+                                        <p:cTn id="42" dur="500" fill="hold"/>
+                                        <p:tgtEl>
+                                          <p:spTgt spid="13"/>
+                                        </p:tgtEl>
+                                        <p:attrNameLst>
+                                          <p:attrName>ppt_y</p:attrName>
+                                        </p:attrNameLst>
+                                      </p:cBhvr>
+                                      <p:tavLst>
+                                        <p:tav tm="0">
+                                          <p:val>
+                                            <p:strVal val="1+#ppt_h/2"/>
+                                          </p:val>
+                                        </p:tav>
+                                        <p:tav tm="100000">
+                                          <p:val>
+                                            <p:strVal val="#ppt_y"/>
+                                          </p:val>
+                                        </p:tav>
+                                      </p:tavLst>
+                                    </p:anim>
+                                  </p:childTnLst>
+                                </p:cTn>
+                              </p:par>
+                            </p:childTnLst>
+                          </p:cTn>
+                        </p:par>
+                      </p:childTnLst>
+                    </p:cTn>
+                  </p:par>
+                  <p:par>
+                    <p:cTn id="43" fill="hold">
+                      <p:stCondLst>
+                        <p:cond delay="indefinite"/>
+                      </p:stCondLst>
+                      <p:childTnLst>
+                        <p:par>
+                          <p:cTn id="44" fill="hold">
+                            <p:stCondLst>
+                              <p:cond delay="0"/>
+                            </p:stCondLst>
+                            <p:childTnLst>
+                              <p:par>
+                                <p:cTn id="45" presetID="2" presetClass="entr" presetSubtype="4" fill="hold" grpId="0" nodeType="clickEffect">
+                                  <p:stCondLst>
+                                    <p:cond delay="0"/>
+                                  </p:stCondLst>
+                                  <p:childTnLst>
+                                    <p:set>
+                                      <p:cBhvr>
+                                        <p:cTn id="46" dur="1" fill="hold">
+                                          <p:stCondLst>
+                                            <p:cond delay="0"/>
+                                          </p:stCondLst>
+                                        </p:cTn>
+                                        <p:tgtEl>
+                                          <p:spTgt spid="15"/>
+                                        </p:tgtEl>
+                                        <p:attrNameLst>
+                                          <p:attrName>style.visibility</p:attrName>
+                                        </p:attrNameLst>
+                                      </p:cBhvr>
+                                      <p:to>
+                                        <p:strVal val="visible"/>
+                                      </p:to>
+                                    </p:set>
+                                    <p:anim calcmode="lin" valueType="num">
+                                      <p:cBhvr additive="base">
+                                        <p:cTn id="47" dur="500" fill="hold"/>
+                                        <p:tgtEl>
+                                          <p:spTgt spid="15"/>
+                                        </p:tgtEl>
+                                        <p:attrNameLst>
+                                          <p:attrName>ppt_x</p:attrName>
+                                        </p:attrNameLst>
+                                      </p:cBhvr>
+                                      <p:tavLst>
+                                        <p:tav tm="0">
+                                          <p:val>
+                                            <p:strVal val="#ppt_x"/>
+                                          </p:val>
+                                        </p:tav>
+                                        <p:tav tm="100000">
+                                          <p:val>
+                                            <p:strVal val="#ppt_x"/>
+                                          </p:val>
+                                        </p:tav>
+                                      </p:tavLst>
+                                    </p:anim>
+                                    <p:anim calcmode="lin" valueType="num">
+                                      <p:cBhvr additive="base">
+                                        <p:cTn id="48" dur="500" fill="hold"/>
+                                        <p:tgtEl>
+                                          <p:spTgt spid="15"/>
+                                        </p:tgtEl>
+                                        <p:attrNameLst>
+                                          <p:attrName>ppt_y</p:attrName>
+                                        </p:attrNameLst>
+                                      </p:cBhvr>
+                                      <p:tavLst>
+                                        <p:tav tm="0">
+                                          <p:val>
+                                            <p:strVal val="1+#ppt_h/2"/>
+                                          </p:val>
+                                        </p:tav>
+                                        <p:tav tm="100000">
+                                          <p:val>
+                                            <p:strVal val="#ppt_y"/>
+                                          </p:val>
+                                        </p:tav>
+                                      </p:tavLst>
+                                    </p:anim>
+                                  </p:childTnLst>
+                                </p:cTn>
+                              </p:par>
+                            </p:childTnLst>
+                          </p:cTn>
+                        </p:par>
+                      </p:childTnLst>
+                    </p:cTn>
+                  </p:par>
+                </p:childTnLst>
+              </p:cTn>
+              <p:prevCondLst>
+                <p:cond evt="onPrev" delay="0">
+                  <p:tgtEl>
+                    <p:sldTgt/>
+                  </p:tgtEl>
+                </p:cond>
+              </p:prevCondLst>
+              <p:nextCondLst>
+                <p:cond evt="onNext" delay="0">
+                  <p:tgtEl>
+                    <p:sldTgt/>
+                  </p:tgtEl>
+                </p:cond>
+              </p:nextCondLst>
+            </p:seq>
+          </p:childTnLst>
+        </p:cTn>
+      </p:par>
+    </p:tnLst>
+    <p:bldLst>
+      <p:bldP spid="6" grpId="0"/>
+      <p:bldP spid="6" grpId="1"/>
+      <p:bldP spid="7" grpId="0"/>
+      <p:bldP spid="7" grpId="1"/>
+      <p:bldP spid="10" grpId="0"/>
+      <p:bldP spid="10" grpId="1"/>
+      <p:bldP spid="14" grpId="0"/>
+      <p:bldP spid="14" grpId="1"/>
+      <p:bldP spid="15" grpId="0"/>
+      <p:bldP spid="15" grpId="1"/>
+    </p:bldLst>
+  </p:timing>
+</p:sld>
+</file>
+
+<file path=ppt/slides/slide7.xml><?xml version="1.0" encoding="utf-8"?>
+<p:sld xmlns:a="http://schemas.openxmlformats.org/drawingml/2006/main" xmlns:r="http://schemas.openxmlformats.org/officeDocument/2006/relationships" xmlns:p="http://schemas.openxmlformats.org/presentationml/2006/main">
+  <p:cSld>
+    <p:spTree>
+      <p:nvGrpSpPr>
+        <p:cNvPr id="1" name=""/>
+        <p:cNvGrpSpPr/>
+        <p:nvPr/>
+      </p:nvGrpSpPr>
+      <p:grpSpPr/>
+      <p:sp>
+        <p:nvSpPr>
+          <p:cNvPr id="2" name="文本框 1"/>
+          <p:cNvSpPr txBox="1"/>
+          <p:nvPr/>
+        </p:nvSpPr>
+        <p:spPr>
+          <a:xfrm>
+            <a:off x="5279390" y="664845"/>
+            <a:ext cx="1682115" cy="398780"/>
+          </a:xfrm>
+          <a:prstGeom prst="rect">
+            <a:avLst/>
+          </a:prstGeom>
+          <a:noFill/>
+        </p:spPr>
+        <p:txBody>
+          <a:bodyPr wrap="square" rtlCol="0">
+            <a:spAutoFit/>
+          </a:bodyPr>
+          <a:p>
+            <a:r>
+              <a:rPr lang="en-US" altLang="zh-CN" sz="2000"/>
+              <a:t>GC </a:t>
+            </a:r>
+            <a:r>
+              <a:rPr lang="zh-CN" altLang="en-US" sz="2000"/>
+              <a:t>算法流程</a:t>
+            </a:r>
+            <a:endParaRPr lang="zh-CN" altLang="en-US" sz="2000"/>
+          </a:p>
+        </p:txBody>
+      </p:sp>
+      <p:sp>
+        <p:nvSpPr>
+          <p:cNvPr id="3" name="文本框 2"/>
+          <p:cNvSpPr txBox="1"/>
+          <p:nvPr/>
+        </p:nvSpPr>
+        <p:spPr>
+          <a:xfrm>
+            <a:off x="3829685" y="1957070"/>
+            <a:ext cx="1678305" cy="398780"/>
+          </a:xfrm>
+          <a:prstGeom prst="rect">
+            <a:avLst/>
+          </a:prstGeom>
+          <a:noFill/>
+        </p:spPr>
+        <p:txBody>
+          <a:bodyPr wrap="square" rtlCol="0">
+            <a:spAutoFit/>
+          </a:bodyPr>
+          <a:p>
+            <a:pPr algn="ctr"/>
+            <a:r>
+              <a:rPr lang="zh-CN" altLang="en-US" sz="2000"/>
+              <a:t>当前状态</a:t>
+            </a:r>
+            <a:endParaRPr lang="zh-CN" altLang="en-US" sz="2000"/>
+          </a:p>
+        </p:txBody>
+      </p:sp>
+      <p:sp>
+        <p:nvSpPr>
+          <p:cNvPr id="4" name="文本框 3"/>
+          <p:cNvSpPr txBox="1"/>
+          <p:nvPr/>
+        </p:nvSpPr>
+        <p:spPr>
+          <a:xfrm>
+            <a:off x="6652260" y="1803400"/>
+            <a:ext cx="1790065" cy="706755"/>
+          </a:xfrm>
+          <a:prstGeom prst="rect">
+            <a:avLst/>
+          </a:prstGeom>
+          <a:noFill/>
+        </p:spPr>
+        <p:txBody>
+          <a:bodyPr wrap="square" rtlCol="0">
+            <a:spAutoFit/>
+          </a:bodyPr>
+          <a:p>
+            <a:r>
+              <a:rPr lang="zh-CN" altLang="en-US" sz="2000"/>
+              <a:t>当前补偿模型</a:t>
+            </a:r>
+            <a:endParaRPr lang="zh-CN" altLang="en-US" sz="2000"/>
+          </a:p>
+          <a:p>
+            <a:r>
+              <a:rPr lang="zh-CN" altLang="en-US" sz="2000"/>
+              <a:t>的终止状态</a:t>
+            </a:r>
+            <a:endParaRPr lang="zh-CN" altLang="en-US" sz="2000"/>
+          </a:p>
+        </p:txBody>
+      </p:sp>
+      <p:cxnSp>
+        <p:nvCxnSpPr>
+          <p:cNvPr id="5" name="直接箭头连接符 4"/>
+          <p:cNvCxnSpPr>
+            <a:stCxn id="3" idx="3"/>
+            <a:endCxn id="4" idx="1"/>
+          </p:cNvCxnSpPr>
+          <p:nvPr/>
+        </p:nvCxnSpPr>
+        <p:spPr>
+          <a:xfrm>
+            <a:off x="5507990" y="2156460"/>
+            <a:ext cx="1144270" cy="635"/>
+          </a:xfrm>
+          <a:prstGeom prst="straightConnector1">
+            <a:avLst/>
+          </a:prstGeom>
+          <a:ln w="31750" cap="rnd">
+            <a:solidFill>
+              <a:schemeClr val="accent6"/>
+            </a:solidFill>
+            <a:round/>
+            <a:tailEnd type="arrow" w="med" len="med"/>
+          </a:ln>
+        </p:spPr>
+        <p:style>
+          <a:lnRef idx="0">
+            <a:srgbClr val="FFFFFF"/>
+          </a:lnRef>
+          <a:fillRef idx="0">
+            <a:srgbClr val="FFFFFF"/>
+          </a:fillRef>
+          <a:effectRef idx="0">
+            <a:srgbClr val="FFFFFF"/>
+          </a:effectRef>
+          <a:fontRef idx="minor">
+            <a:schemeClr val="tx1"/>
+          </a:fontRef>
+        </p:style>
+      </p:cxnSp>
+      <p:sp>
+        <p:nvSpPr>
+          <p:cNvPr id="6" name="文本框 5"/>
+          <p:cNvSpPr txBox="1"/>
+          <p:nvPr/>
+        </p:nvSpPr>
+        <p:spPr>
+          <a:xfrm>
+            <a:off x="5431790" y="1713230"/>
+            <a:ext cx="1221105" cy="398780"/>
+          </a:xfrm>
+          <a:prstGeom prst="rect">
+            <a:avLst/>
+          </a:prstGeom>
+          <a:noFill/>
+        </p:spPr>
+        <p:txBody>
+          <a:bodyPr wrap="square" rtlCol="0">
+            <a:spAutoFit/>
+          </a:bodyPr>
+          <a:p>
+            <a:pPr algn="r"/>
+            <a:r>
+              <a:rPr lang="zh-CN" altLang="en-US" sz="2000"/>
+              <a:t>梯度下降</a:t>
+            </a:r>
+            <a:endParaRPr lang="zh-CN" altLang="en-US" sz="2000"/>
+          </a:p>
+        </p:txBody>
+      </p:sp>
+      <p:sp>
+        <p:nvSpPr>
+          <p:cNvPr id="7" name="文本框 6"/>
+          <p:cNvSpPr txBox="1"/>
+          <p:nvPr/>
+        </p:nvSpPr>
+        <p:spPr>
+          <a:xfrm>
+            <a:off x="6657340" y="3800475"/>
+            <a:ext cx="1785620" cy="706755"/>
+          </a:xfrm>
+          <a:prstGeom prst="rect">
+            <a:avLst/>
+          </a:prstGeom>
+          <a:noFill/>
+        </p:spPr>
+        <p:txBody>
+          <a:bodyPr wrap="square" rtlCol="0">
+            <a:spAutoFit/>
+          </a:bodyPr>
+          <a:p>
+            <a:r>
+              <a:rPr lang="zh-CN" altLang="en-US" sz="2000"/>
+              <a:t>计算真实梯度</a:t>
+            </a:r>
+            <a:endParaRPr lang="zh-CN" altLang="en-US" sz="2000"/>
+          </a:p>
+          <a:p>
+            <a:r>
+              <a:rPr lang="zh-CN" altLang="en-US" sz="2000"/>
+              <a:t>并更新补偿量</a:t>
+            </a:r>
+            <a:endParaRPr lang="zh-CN" altLang="en-US" sz="2000"/>
+          </a:p>
+        </p:txBody>
+      </p:sp>
+      <p:sp>
+        <p:nvSpPr>
+          <p:cNvPr id="11" name="文本框 10"/>
+          <p:cNvSpPr txBox="1"/>
+          <p:nvPr/>
+        </p:nvSpPr>
+        <p:spPr>
+          <a:xfrm>
+            <a:off x="3753485" y="3800475"/>
+            <a:ext cx="1830705" cy="706755"/>
+          </a:xfrm>
+          <a:prstGeom prst="rect">
+            <a:avLst/>
+          </a:prstGeom>
+          <a:noFill/>
+        </p:spPr>
+        <p:txBody>
+          <a:bodyPr wrap="square" rtlCol="0">
+            <a:spAutoFit/>
+          </a:bodyPr>
+          <a:p>
+            <a:r>
+              <a:rPr lang="zh-CN" altLang="en-US" sz="2000"/>
+              <a:t>更新补偿模型</a:t>
+            </a:r>
+            <a:endParaRPr lang="zh-CN" altLang="en-US" sz="2000"/>
+          </a:p>
+          <a:p>
+            <a:r>
+              <a:rPr lang="zh-CN" altLang="en-US" sz="2000"/>
+              <a:t>和当前状态</a:t>
+            </a:r>
+            <a:endParaRPr lang="zh-CN" altLang="en-US" sz="2000"/>
+          </a:p>
+        </p:txBody>
+      </p:sp>
+      <p:cxnSp>
+        <p:nvCxnSpPr>
+          <p:cNvPr id="12" name="直接箭头连接符 11"/>
+          <p:cNvCxnSpPr>
+            <a:stCxn id="4" idx="2"/>
+            <a:endCxn id="7" idx="0"/>
+          </p:cNvCxnSpPr>
+          <p:nvPr/>
+        </p:nvCxnSpPr>
+        <p:spPr>
+          <a:xfrm>
+            <a:off x="7547610" y="2510155"/>
+            <a:ext cx="2540" cy="1290320"/>
+          </a:xfrm>
+          <a:prstGeom prst="straightConnector1">
+            <a:avLst/>
+          </a:prstGeom>
+          <a:ln w="31750" cap="rnd">
+            <a:solidFill>
+              <a:schemeClr val="accent1"/>
+            </a:solidFill>
+            <a:round/>
+            <a:tailEnd type="arrow" w="med" len="med"/>
+          </a:ln>
+        </p:spPr>
+        <p:style>
+          <a:lnRef idx="0">
+            <a:srgbClr val="FFFFFF"/>
+          </a:lnRef>
+          <a:fillRef idx="0">
+            <a:srgbClr val="FFFFFF"/>
+          </a:fillRef>
+          <a:effectRef idx="0">
+            <a:srgbClr val="FFFFFF"/>
+          </a:effectRef>
+          <a:fontRef idx="minor">
+            <a:schemeClr val="tx1"/>
+          </a:fontRef>
+        </p:style>
+      </p:cxnSp>
+      <p:sp>
+        <p:nvSpPr>
+          <p:cNvPr id="13" name="文本框 12"/>
+          <p:cNvSpPr txBox="1"/>
+          <p:nvPr/>
+        </p:nvSpPr>
+        <p:spPr>
+          <a:xfrm>
+            <a:off x="7623175" y="2647950"/>
+            <a:ext cx="819785" cy="1014730"/>
+          </a:xfrm>
+          <a:prstGeom prst="rect">
+            <a:avLst/>
+          </a:prstGeom>
+          <a:noFill/>
+        </p:spPr>
+        <p:txBody>
+          <a:bodyPr wrap="square" rtlCol="0">
+            <a:spAutoFit/>
+          </a:bodyPr>
+          <a:p>
+            <a:r>
+              <a:rPr lang="zh-CN" altLang="en-US" sz="2000"/>
+              <a:t>模型自由阶段</a:t>
+            </a:r>
+            <a:endParaRPr lang="zh-CN" altLang="en-US" sz="2000"/>
+          </a:p>
+        </p:txBody>
+      </p:sp>
+      <p:cxnSp>
+        <p:nvCxnSpPr>
+          <p:cNvPr id="14" name="直接箭头连接符 13"/>
+          <p:cNvCxnSpPr>
+            <a:stCxn id="7" idx="1"/>
+            <a:endCxn id="11" idx="3"/>
+          </p:cNvCxnSpPr>
+          <p:nvPr/>
+        </p:nvCxnSpPr>
+        <p:spPr>
+          <a:xfrm flipH="1">
+            <a:off x="5584190" y="4154170"/>
+            <a:ext cx="1073150" cy="0"/>
+          </a:xfrm>
+          <a:prstGeom prst="straightConnector1">
+            <a:avLst/>
+          </a:prstGeom>
+          <a:ln w="31750" cap="rnd">
+            <a:solidFill>
+              <a:schemeClr val="accent6"/>
+            </a:solidFill>
+            <a:round/>
+            <a:tailEnd type="arrow" w="med" len="med"/>
+          </a:ln>
+        </p:spPr>
+        <p:style>
+          <a:lnRef idx="0">
+            <a:srgbClr val="FFFFFF"/>
+          </a:lnRef>
+          <a:fillRef idx="0">
+            <a:srgbClr val="FFFFFF"/>
+          </a:fillRef>
+          <a:effectRef idx="0">
+            <a:srgbClr val="FFFFFF"/>
+          </a:effectRef>
+          <a:fontRef idx="minor">
+            <a:schemeClr val="tx1"/>
+          </a:fontRef>
+        </p:style>
+      </p:cxnSp>
+      <p:cxnSp>
+        <p:nvCxnSpPr>
+          <p:cNvPr id="15" name="直接箭头连接符 14"/>
+          <p:cNvCxnSpPr>
+            <a:stCxn id="11" idx="0"/>
+            <a:endCxn id="3" idx="2"/>
+          </p:cNvCxnSpPr>
+          <p:nvPr/>
+        </p:nvCxnSpPr>
+        <p:spPr>
+          <a:xfrm flipV="1">
+            <a:off x="4669155" y="2355850"/>
+            <a:ext cx="0" cy="1444625"/>
+          </a:xfrm>
+          <a:prstGeom prst="straightConnector1">
+            <a:avLst/>
+          </a:prstGeom>
+          <a:ln w="31750" cap="rnd">
+            <a:solidFill>
+              <a:schemeClr val="accent6"/>
+            </a:solidFill>
+            <a:round/>
+            <a:tailEnd type="arrow" w="med" len="med"/>
+          </a:ln>
+        </p:spPr>
+        <p:style>
+          <a:lnRef idx="0">
+            <a:srgbClr val="FFFFFF"/>
+          </a:lnRef>
+          <a:fillRef idx="0">
+            <a:srgbClr val="FFFFFF"/>
+          </a:fillRef>
+          <a:effectRef idx="0">
+            <a:srgbClr val="FFFFFF"/>
+          </a:effectRef>
+          <a:fontRef idx="minor">
+            <a:schemeClr val="tx1"/>
+          </a:fontRef>
+        </p:style>
+      </p:cxnSp>
+    </p:spTree>
+    <p:custDataLst>
+      <p:tags r:id="rId1"/>
+    </p:custDataLst>
+  </p:cSld>
+  <p:clrMapOvr>
+    <a:masterClrMapping/>
+  </p:clrMapOvr>
+  <p:timing>
+    <p:tnLst>
+      <p:par>
+        <p:cTn id="1" dur="indefinite" restart="never" nodeType="tmRoot">
+          <p:childTnLst>
+            <p:seq concurrent="1" nextAc="seek">
+              <p:cTn id="2" dur="indefinite" nodeType="mainSeq">
+                <p:childTnLst>
+                  <p:par>
+                    <p:cTn id="3" fill="hold">
+                      <p:stCondLst>
+                        <p:cond delay="indefinite"/>
+                      </p:stCondLst>
+                      <p:childTnLst>
+                        <p:par>
+                          <p:cTn id="4" fill="hold">
+                            <p:stCondLst>
+                              <p:cond delay="0"/>
+                            </p:stCondLst>
+                            <p:childTnLst>
+                              <p:par>
+                                <p:cTn id="5" presetID="2" presetClass="entr" presetSubtype="4" fill="hold" nodeType="clickEffect">
+                                  <p:stCondLst>
+                                    <p:cond delay="0"/>
+                                  </p:stCondLst>
+                                  <p:childTnLst>
+                                    <p:set>
+                                      <p:cBhvr>
+                                        <p:cTn id="6" dur="1" fill="hold">
+                                          <p:stCondLst>
+                                            <p:cond delay="0"/>
+                                          </p:stCondLst>
+                                        </p:cTn>
+                                        <p:tgtEl>
+                                          <p:spTgt spid="5"/>
+                                        </p:tgtEl>
+                                        <p:attrNameLst>
+                                          <p:attrName>style.visibility</p:attrName>
+                                        </p:attrNameLst>
+                                      </p:cBhvr>
+                                      <p:to>
+                                        <p:strVal val="visible"/>
+                                      </p:to>
+                                    </p:set>
+                                    <p:anim calcmode="lin" valueType="num">
+                                      <p:cBhvr additive="base">
+                                        <p:cTn id="7" dur="500" fill="hold"/>
+                                        <p:tgtEl>
+                                          <p:spTgt spid="5"/>
+                                        </p:tgtEl>
+                                        <p:attrNameLst>
+                                          <p:attrName>ppt_x</p:attrName>
+                                        </p:attrNameLst>
+                                      </p:cBhvr>
+                                      <p:tavLst>
+                                        <p:tav tm="0">
+                                          <p:val>
+                                            <p:strVal val="#ppt_x"/>
+                                          </p:val>
+                                        </p:tav>
+                                        <p:tav tm="100000">
+                                          <p:val>
+                                            <p:strVal val="#ppt_x"/>
+                                          </p:val>
+                                        </p:tav>
+                                      </p:tavLst>
+                                    </p:anim>
+                                    <p:anim calcmode="lin" valueType="num">
+                                      <p:cBhvr additive="base">
+                                        <p:cTn id="8" dur="500" fill="hold"/>
+                                        <p:tgtEl>
+                                          <p:spTgt spid="5"/>
+                                        </p:tgtEl>
+                                        <p:attrNameLst>
+                                          <p:attrName>ppt_y</p:attrName>
+                                        </p:attrNameLst>
+                                      </p:cBhvr>
+                                      <p:tavLst>
+                                        <p:tav tm="0">
+                                          <p:val>
+                                            <p:strVal val="1+#ppt_h/2"/>
+                                          </p:val>
+                                        </p:tav>
+                                        <p:tav tm="100000">
+                                          <p:val>
+                                            <p:strVal val="#ppt_y"/>
+                                          </p:val>
+                                        </p:tav>
+                                      </p:tavLst>
+                                    </p:anim>
+                                  </p:childTnLst>
+                                </p:cTn>
+                              </p:par>
+                              <p:par>
+                                <p:cTn id="9" presetID="2" presetClass="entr" presetSubtype="4" fill="hold" grpId="0" nodeType="withEffect">
+                                  <p:stCondLst>
+                                    <p:cond delay="0"/>
+                                  </p:stCondLst>
+                                  <p:childTnLst>
+                                    <p:set>
+                                      <p:cBhvr>
+                                        <p:cTn id="10" dur="1" fill="hold">
+                                          <p:stCondLst>
+                                            <p:cond delay="0"/>
+                                          </p:stCondLst>
+                                        </p:cTn>
+                                        <p:tgtEl>
+                                          <p:spTgt spid="6"/>
+                                        </p:tgtEl>
+                                        <p:attrNameLst>
+                                          <p:attrName>style.visibility</p:attrName>
+                                        </p:attrNameLst>
+                                      </p:cBhvr>
+                                      <p:to>
+                                        <p:strVal val="visible"/>
+                                      </p:to>
+                                    </p:set>
+                                    <p:anim calcmode="lin" valueType="num">
+                                      <p:cBhvr additive="base">
+                                        <p:cTn id="11" dur="500" fill="hold"/>
+                                        <p:tgtEl>
+                                          <p:spTgt spid="6"/>
+                                        </p:tgtEl>
+                                        <p:attrNameLst>
+                                          <p:attrName>ppt_x</p:attrName>
+                                        </p:attrNameLst>
+                                      </p:cBhvr>
+                                      <p:tavLst>
+                                        <p:tav tm="0">
+                                          <p:val>
+                                            <p:strVal val="#ppt_x"/>
+                                          </p:val>
+                                        </p:tav>
+                                        <p:tav tm="100000">
+                                          <p:val>
+                                            <p:strVal val="#ppt_x"/>
+                                          </p:val>
+                                        </p:tav>
+                                      </p:tavLst>
+                                    </p:anim>
+                                    <p:anim calcmode="lin" valueType="num">
+                                      <p:cBhvr additive="base">
+                                        <p:cTn id="12" dur="500" fill="hold"/>
+                                        <p:tgtEl>
+                                          <p:spTgt spid="6"/>
+                                        </p:tgtEl>
+                                        <p:attrNameLst>
+                                          <p:attrName>ppt_y</p:attrName>
+                                        </p:attrNameLst>
+                                      </p:cBhvr>
+                                      <p:tavLst>
+                                        <p:tav tm="0">
+                                          <p:val>
+                                            <p:strVal val="1+#ppt_h/2"/>
+                                          </p:val>
+                                        </p:tav>
+                                        <p:tav tm="100000">
+                                          <p:val>
+                                            <p:strVal val="#ppt_y"/>
+                                          </p:val>
+                                        </p:tav>
+                                      </p:tavLst>
+                                    </p:anim>
+                                  </p:childTnLst>
+                                </p:cTn>
+                              </p:par>
+                            </p:childTnLst>
+                          </p:cTn>
+                        </p:par>
+                      </p:childTnLst>
+                    </p:cTn>
+                  </p:par>
+                  <p:par>
+                    <p:cTn id="13" fill="hold">
+                      <p:stCondLst>
+                        <p:cond delay="indefinite"/>
+                      </p:stCondLst>
+                      <p:childTnLst>
+                        <p:par>
+                          <p:cTn id="14" fill="hold">
+                            <p:stCondLst>
+                              <p:cond delay="0"/>
+                            </p:stCondLst>
+                            <p:childTnLst>
+                              <p:par>
+                                <p:cTn id="15" presetID="2" presetClass="entr" presetSubtype="4" fill="hold" grpId="0" nodeType="clickEffect">
+                                  <p:stCondLst>
+                                    <p:cond delay="0"/>
+                                  </p:stCondLst>
+                                  <p:childTnLst>
+                                    <p:set>
+                                      <p:cBhvr>
+                                        <p:cTn id="16" dur="1" fill="hold">
+                                          <p:stCondLst>
+                                            <p:cond delay="0"/>
+                                          </p:stCondLst>
+                                        </p:cTn>
+                                        <p:tgtEl>
+                                          <p:spTgt spid="4"/>
+                                        </p:tgtEl>
+                                        <p:attrNameLst>
+                                          <p:attrName>style.visibility</p:attrName>
+                                        </p:attrNameLst>
+                                      </p:cBhvr>
+                                      <p:to>
+                                        <p:strVal val="visible"/>
+                                      </p:to>
+                                    </p:set>
+                                    <p:anim calcmode="lin" valueType="num">
+                                      <p:cBhvr additive="base">
+                                        <p:cTn id="17" dur="500" fill="hold"/>
+                                        <p:tgtEl>
+                                          <p:spTgt spid="4"/>
+                                        </p:tgtEl>
+                                        <p:attrNameLst>
+                                          <p:attrName>ppt_x</p:attrName>
+                                        </p:attrNameLst>
+                                      </p:cBhvr>
+                                      <p:tavLst>
+                                        <p:tav tm="0">
+                                          <p:val>
+                                            <p:strVal val="#ppt_x"/>
+                                          </p:val>
+                                        </p:tav>
+                                        <p:tav tm="100000">
+                                          <p:val>
+                                            <p:strVal val="#ppt_x"/>
+                                          </p:val>
+                                        </p:tav>
+                                      </p:tavLst>
+                                    </p:anim>
+                                    <p:anim calcmode="lin" valueType="num">
+                                      <p:cBhvr additive="base">
+                                        <p:cTn id="18" dur="500" fill="hold"/>
+                                        <p:tgtEl>
+                                          <p:spTgt spid="4"/>
+                                        </p:tgtEl>
+                                        <p:attrNameLst>
+                                          <p:attrName>ppt_y</p:attrName>
+                                        </p:attrNameLst>
+                                      </p:cBhvr>
+                                      <p:tavLst>
+                                        <p:tav tm="0">
+                                          <p:val>
+                                            <p:strVal val="1+#ppt_h/2"/>
+                                          </p:val>
+                                        </p:tav>
+                                        <p:tav tm="100000">
+                                          <p:val>
+                                            <p:strVal val="#ppt_y"/>
+                                          </p:val>
+                                        </p:tav>
+                                      </p:tavLst>
+                                    </p:anim>
+                                  </p:childTnLst>
+                                </p:cTn>
+                              </p:par>
+                            </p:childTnLst>
+                          </p:cTn>
+                        </p:par>
+                      </p:childTnLst>
+                    </p:cTn>
+                  </p:par>
+                  <p:par>
+                    <p:cTn id="19" fill="hold">
+                      <p:stCondLst>
+                        <p:cond delay="indefinite"/>
+                      </p:stCondLst>
+                      <p:childTnLst>
+                        <p:par>
+                          <p:cTn id="20" fill="hold">
+                            <p:stCondLst>
+                              <p:cond delay="0"/>
+                            </p:stCondLst>
+                            <p:childTnLst>
+                              <p:par>
+                                <p:cTn id="21" presetID="2" presetClass="entr" presetSubtype="4" fill="hold" nodeType="clickEffect">
+                                  <p:stCondLst>
+                                    <p:cond delay="0"/>
+                                  </p:stCondLst>
+                                  <p:childTnLst>
+                                    <p:set>
+                                      <p:cBhvr>
+                                        <p:cTn id="22" dur="1" fill="hold">
+                                          <p:stCondLst>
+                                            <p:cond delay="0"/>
+                                          </p:stCondLst>
+                                        </p:cTn>
+                                        <p:tgtEl>
+                                          <p:spTgt spid="12"/>
+                                        </p:tgtEl>
+                                        <p:attrNameLst>
+                                          <p:attrName>style.visibility</p:attrName>
+                                        </p:attrNameLst>
+                                      </p:cBhvr>
+                                      <p:to>
+                                        <p:strVal val="visible"/>
+                                      </p:to>
+                                    </p:set>
+                                    <p:anim calcmode="lin" valueType="num">
+                                      <p:cBhvr additive="base">
+                                        <p:cTn id="23" dur="500" fill="hold"/>
+                                        <p:tgtEl>
+                                          <p:spTgt spid="12"/>
+                                        </p:tgtEl>
+                                        <p:attrNameLst>
+                                          <p:attrName>ppt_x</p:attrName>
+                                        </p:attrNameLst>
+                                      </p:cBhvr>
+                                      <p:tavLst>
+                                        <p:tav tm="0">
+                                          <p:val>
+                                            <p:strVal val="#ppt_x"/>
+                                          </p:val>
+                                        </p:tav>
+                                        <p:tav tm="100000">
+                                          <p:val>
+                                            <p:strVal val="#ppt_x"/>
+                                          </p:val>
+                                        </p:tav>
+                                      </p:tavLst>
+                                    </p:anim>
+                                    <p:anim calcmode="lin" valueType="num">
+                                      <p:cBhvr additive="base">
+                                        <p:cTn id="24" dur="500" fill="hold"/>
+                                        <p:tgtEl>
+                                          <p:spTgt spid="12"/>
+                                        </p:tgtEl>
+                                        <p:attrNameLst>
+                                          <p:attrName>ppt_y</p:attrName>
+                                        </p:attrNameLst>
+                                      </p:cBhvr>
+                                      <p:tavLst>
+                                        <p:tav tm="0">
+                                          <p:val>
+                                            <p:strVal val="1+#ppt_h/2"/>
+                                          </p:val>
+                                        </p:tav>
+                                        <p:tav tm="100000">
+                                          <p:val>
+                                            <p:strVal val="#ppt_y"/>
+                                          </p:val>
+                                        </p:tav>
+                                      </p:tavLst>
+                                    </p:anim>
+                                  </p:childTnLst>
+                                </p:cTn>
+                              </p:par>
+                              <p:par>
+                                <p:cTn id="25" presetID="2" presetClass="entr" presetSubtype="4" fill="hold" grpId="0" nodeType="withEffect">
+                                  <p:stCondLst>
+                                    <p:cond delay="0"/>
+                                  </p:stCondLst>
+                                  <p:childTnLst>
+                                    <p:set>
+                                      <p:cBhvr>
+                                        <p:cTn id="26" dur="1" fill="hold">
+                                          <p:stCondLst>
+                                            <p:cond delay="0"/>
+                                          </p:stCondLst>
+                                        </p:cTn>
+                                        <p:tgtEl>
+                                          <p:spTgt spid="13"/>
+                                        </p:tgtEl>
+                                        <p:attrNameLst>
+                                          <p:attrName>style.visibility</p:attrName>
+                                        </p:attrNameLst>
+                                      </p:cBhvr>
+                                      <p:to>
+                                        <p:strVal val="visible"/>
+                                      </p:to>
+                                    </p:set>
+                                    <p:anim calcmode="lin" valueType="num">
+                                      <p:cBhvr additive="base">
+                                        <p:cTn id="27" dur="500" fill="hold"/>
+                                        <p:tgtEl>
+                                          <p:spTgt spid="13"/>
+                                        </p:tgtEl>
+                                        <p:attrNameLst>
+                                          <p:attrName>ppt_x</p:attrName>
+                                        </p:attrNameLst>
+                                      </p:cBhvr>
+                                      <p:tavLst>
+                                        <p:tav tm="0">
+                                          <p:val>
+                                            <p:strVal val="#ppt_x"/>
+                                          </p:val>
+                                        </p:tav>
+                                        <p:tav tm="100000">
+                                          <p:val>
+                                            <p:strVal val="#ppt_x"/>
+                                          </p:val>
+                                        </p:tav>
+                                      </p:tavLst>
+                                    </p:anim>
+                                    <p:anim calcmode="lin" valueType="num">
+                                      <p:cBhvr additive="base">
+                                        <p:cTn id="28" dur="500" fill="hold"/>
+                                        <p:tgtEl>
+                                          <p:spTgt spid="13"/>
+                                        </p:tgtEl>
+                                        <p:attrNameLst>
+                                          <p:attrName>ppt_y</p:attrName>
+                                        </p:attrNameLst>
+                                      </p:cBhvr>
+                                      <p:tavLst>
+                                        <p:tav tm="0">
+                                          <p:val>
+                                            <p:strVal val="1+#ppt_h/2"/>
+                                          </p:val>
+                                        </p:tav>
+                                        <p:tav tm="100000">
+                                          <p:val>
+                                            <p:strVal val="#ppt_y"/>
+                                          </p:val>
+                                        </p:tav>
+                                      </p:tavLst>
+                                    </p:anim>
+                                  </p:childTnLst>
+                                </p:cTn>
+                              </p:par>
+                            </p:childTnLst>
+                          </p:cTn>
+                        </p:par>
+                      </p:childTnLst>
+                    </p:cTn>
+                  </p:par>
+                  <p:par>
+                    <p:cTn id="29" fill="hold">
+                      <p:stCondLst>
+                        <p:cond delay="indefinite"/>
+                      </p:stCondLst>
+                      <p:childTnLst>
+                        <p:par>
+                          <p:cTn id="30" fill="hold">
+                            <p:stCondLst>
+                              <p:cond delay="0"/>
+                            </p:stCondLst>
+                            <p:childTnLst>
+                              <p:par>
+                                <p:cTn id="31" presetID="2" presetClass="entr" presetSubtype="4" fill="hold" grpId="0" nodeType="clickEffect">
+                                  <p:stCondLst>
+                                    <p:cond delay="0"/>
+                                  </p:stCondLst>
+                                  <p:childTnLst>
+                                    <p:set>
+                                      <p:cBhvr>
+                                        <p:cTn id="32" dur="1" fill="hold">
+                                          <p:stCondLst>
+                                            <p:cond delay="0"/>
+                                          </p:stCondLst>
+                                        </p:cTn>
+                                        <p:tgtEl>
+                                          <p:spTgt spid="7"/>
+                                        </p:tgtEl>
+                                        <p:attrNameLst>
+                                          <p:attrName>style.visibility</p:attrName>
+                                        </p:attrNameLst>
+                                      </p:cBhvr>
+                                      <p:to>
+                                        <p:strVal val="visible"/>
+                                      </p:to>
+                                    </p:set>
+                                    <p:anim calcmode="lin" valueType="num">
+                                      <p:cBhvr additive="base">
+                                        <p:cTn id="33" dur="500" fill="hold"/>
+                                        <p:tgtEl>
+                                          <p:spTgt spid="7"/>
+                                        </p:tgtEl>
+                                        <p:attrNameLst>
+                                          <p:attrName>ppt_x</p:attrName>
+                                        </p:attrNameLst>
+                                      </p:cBhvr>
+                                      <p:tavLst>
+                                        <p:tav tm="0">
+                                          <p:val>
+                                            <p:strVal val="#ppt_x"/>
+                                          </p:val>
+                                        </p:tav>
+                                        <p:tav tm="100000">
+                                          <p:val>
+                                            <p:strVal val="#ppt_x"/>
+                                          </p:val>
+                                        </p:tav>
+                                      </p:tavLst>
+                                    </p:anim>
+                                    <p:anim calcmode="lin" valueType="num">
+                                      <p:cBhvr additive="base">
+                                        <p:cTn id="34" dur="500" fill="hold"/>
+                                        <p:tgtEl>
+                                          <p:spTgt spid="7"/>
+                                        </p:tgtEl>
+                                        <p:attrNameLst>
+                                          <p:attrName>ppt_y</p:attrName>
+                                        </p:attrNameLst>
+                                      </p:cBhvr>
+                                      <p:tavLst>
+                                        <p:tav tm="0">
+                                          <p:val>
+                                            <p:strVal val="1+#ppt_h/2"/>
+                                          </p:val>
+                                        </p:tav>
+                                        <p:tav tm="100000">
+                                          <p:val>
+                                            <p:strVal val="#ppt_y"/>
+                                          </p:val>
+                                        </p:tav>
+                                      </p:tavLst>
+                                    </p:anim>
+                                  </p:childTnLst>
+                                </p:cTn>
+                              </p:par>
+                            </p:childTnLst>
+                          </p:cTn>
+                        </p:par>
+                      </p:childTnLst>
+                    </p:cTn>
+                  </p:par>
+                  <p:par>
+                    <p:cTn id="35" fill="hold">
+                      <p:stCondLst>
+                        <p:cond delay="indefinite"/>
+                      </p:stCondLst>
+                      <p:childTnLst>
+                        <p:par>
+                          <p:cTn id="36" fill="hold">
+                            <p:stCondLst>
+                              <p:cond delay="0"/>
+                            </p:stCondLst>
+                            <p:childTnLst>
+                              <p:par>
+                                <p:cTn id="37" presetID="2" presetClass="entr" presetSubtype="4" fill="hold" grpId="0" nodeType="clickEffect">
+                                  <p:stCondLst>
+                                    <p:cond delay="0"/>
+                                  </p:stCondLst>
+                                  <p:childTnLst>
+                                    <p:set>
+                                      <p:cBhvr>
+                                        <p:cTn id="38" dur="1" fill="hold">
+                                          <p:stCondLst>
+                                            <p:cond delay="0"/>
+                                          </p:stCondLst>
+                                        </p:cTn>
+                                        <p:tgtEl>
+                                          <p:spTgt spid="11"/>
+                                        </p:tgtEl>
+                                        <p:attrNameLst>
+                                          <p:attrName>style.visibility</p:attrName>
+                                        </p:attrNameLst>
+                                      </p:cBhvr>
+                                      <p:to>
+                                        <p:strVal val="visible"/>
+                                      </p:to>
+                                    </p:set>
+                                    <p:anim calcmode="lin" valueType="num">
+                                      <p:cBhvr additive="base">
+                                        <p:cTn id="39" dur="500" fill="hold"/>
+                                        <p:tgtEl>
+                                          <p:spTgt spid="11"/>
+                                        </p:tgtEl>
+                                        <p:attrNameLst>
+                                          <p:attrName>ppt_x</p:attrName>
+                                        </p:attrNameLst>
+                                      </p:cBhvr>
+                                      <p:tavLst>
+                                        <p:tav tm="0">
+                                          <p:val>
+                                            <p:strVal val="#ppt_x"/>
+                                          </p:val>
+                                        </p:tav>
+                                        <p:tav tm="100000">
+                                          <p:val>
+                                            <p:strVal val="#ppt_x"/>
+                                          </p:val>
+                                        </p:tav>
+                                      </p:tavLst>
+                                    </p:anim>
+                                    <p:anim calcmode="lin" valueType="num">
+                                      <p:cBhvr additive="base">
+                                        <p:cTn id="40" dur="500" fill="hold"/>
+                                        <p:tgtEl>
+                                          <p:spTgt spid="11"/>
+                                        </p:tgtEl>
+                                        <p:attrNameLst>
+                                          <p:attrName>ppt_y</p:attrName>
+                                        </p:attrNameLst>
+                                      </p:cBhvr>
+                                      <p:tavLst>
+                                        <p:tav tm="0">
+                                          <p:val>
+                                            <p:strVal val="1+#ppt_h/2"/>
+                                          </p:val>
+                                        </p:tav>
+                                        <p:tav tm="100000">
+                                          <p:val>
+                                            <p:strVal val="#ppt_y"/>
+                                          </p:val>
+                                        </p:tav>
+                                      </p:tavLst>
+                                    </p:anim>
+                                  </p:childTnLst>
+                                </p:cTn>
+                              </p:par>
+                              <p:par>
+                                <p:cTn id="41" presetID="2" presetClass="entr" presetSubtype="4" fill="hold" nodeType="withEffect">
+                                  <p:stCondLst>
+                                    <p:cond delay="0"/>
+                                  </p:stCondLst>
+                                  <p:childTnLst>
+                                    <p:set>
+                                      <p:cBhvr>
+                                        <p:cTn id="42" dur="1" fill="hold">
+                                          <p:stCondLst>
+                                            <p:cond delay="0"/>
+                                          </p:stCondLst>
+                                        </p:cTn>
+                                        <p:tgtEl>
+                                          <p:spTgt spid="14"/>
+                                        </p:tgtEl>
+                                        <p:attrNameLst>
+                                          <p:attrName>style.visibility</p:attrName>
+                                        </p:attrNameLst>
+                                      </p:cBhvr>
+                                      <p:to>
+                                        <p:strVal val="visible"/>
+                                      </p:to>
+                                    </p:set>
+                                    <p:anim calcmode="lin" valueType="num">
+                                      <p:cBhvr additive="base">
+                                        <p:cTn id="43" dur="500" fill="hold"/>
+                                        <p:tgtEl>
+                                          <p:spTgt spid="14"/>
+                                        </p:tgtEl>
+                                        <p:attrNameLst>
+                                          <p:attrName>ppt_x</p:attrName>
+                                        </p:attrNameLst>
+                                      </p:cBhvr>
+                                      <p:tavLst>
+                                        <p:tav tm="0">
+                                          <p:val>
+                                            <p:strVal val="#ppt_x"/>
+                                          </p:val>
+                                        </p:tav>
+                                        <p:tav tm="100000">
+                                          <p:val>
+                                            <p:strVal val="#ppt_x"/>
+                                          </p:val>
+                                        </p:tav>
+                                      </p:tavLst>
+                                    </p:anim>
+                                    <p:anim calcmode="lin" valueType="num">
+                                      <p:cBhvr additive="base">
+                                        <p:cTn id="44" dur="500" fill="hold"/>
+                                        <p:tgtEl>
+                                          <p:spTgt spid="14"/>
+                                        </p:tgtEl>
+                                        <p:attrNameLst>
+                                          <p:attrName>ppt_y</p:attrName>
+                                        </p:attrNameLst>
+                                      </p:cBhvr>
+                                      <p:tavLst>
+                                        <p:tav tm="0">
+                                          <p:val>
+                                            <p:strVal val="1+#ppt_h/2"/>
+                                          </p:val>
+                                        </p:tav>
+                                        <p:tav tm="100000">
+                                          <p:val>
+                                            <p:strVal val="#ppt_y"/>
+                                          </p:val>
+                                        </p:tav>
+                                      </p:tavLst>
+                                    </p:anim>
+                                  </p:childTnLst>
+                                </p:cTn>
+                              </p:par>
+                            </p:childTnLst>
+                          </p:cTn>
+                        </p:par>
+                      </p:childTnLst>
+                    </p:cTn>
+                  </p:par>
+                  <p:par>
+                    <p:cTn id="45" fill="hold">
+                      <p:stCondLst>
+                        <p:cond delay="indefinite"/>
+                      </p:stCondLst>
+                      <p:childTnLst>
+                        <p:par>
+                          <p:cTn id="46" fill="hold">
+                            <p:stCondLst>
+                              <p:cond delay="0"/>
+                            </p:stCondLst>
+                            <p:childTnLst>
+                              <p:par>
+                                <p:cTn id="47" presetID="2" presetClass="entr" presetSubtype="4" fill="hold" nodeType="clickEffect">
+                                  <p:stCondLst>
+                                    <p:cond delay="0"/>
+                                  </p:stCondLst>
+                                  <p:childTnLst>
+                                    <p:set>
+                                      <p:cBhvr>
+                                        <p:cTn id="48" dur="1" fill="hold">
+                                          <p:stCondLst>
+                                            <p:cond delay="0"/>
+                                          </p:stCondLst>
+                                        </p:cTn>
+                                        <p:tgtEl>
+                                          <p:spTgt spid="15"/>
+                                        </p:tgtEl>
+                                        <p:attrNameLst>
+                                          <p:attrName>style.visibility</p:attrName>
+                                        </p:attrNameLst>
+                                      </p:cBhvr>
+                                      <p:to>
+                                        <p:strVal val="visible"/>
+                                      </p:to>
+                                    </p:set>
+                                    <p:anim calcmode="lin" valueType="num">
+                                      <p:cBhvr additive="base">
+                                        <p:cTn id="49" dur="500" fill="hold"/>
+                                        <p:tgtEl>
+                                          <p:spTgt spid="15"/>
+                                        </p:tgtEl>
+                                        <p:attrNameLst>
+                                          <p:attrName>ppt_x</p:attrName>
+                                        </p:attrNameLst>
+                                      </p:cBhvr>
+                                      <p:tavLst>
+                                        <p:tav tm="0">
+                                          <p:val>
+                                            <p:strVal val="#ppt_x"/>
+                                          </p:val>
+                                        </p:tav>
+                                        <p:tav tm="100000">
+                                          <p:val>
+                                            <p:strVal val="#ppt_x"/>
+                                          </p:val>
+                                        </p:tav>
+                                      </p:tavLst>
+                                    </p:anim>
+                                    <p:anim calcmode="lin" valueType="num">
+                                      <p:cBhvr additive="base">
+                                        <p:cTn id="50" dur="500" fill="hold"/>
+                                        <p:tgtEl>
+                                          <p:spTgt spid="15"/>
+                                        </p:tgtEl>
+                                        <p:attrNameLst>
+                                          <p:attrName>ppt_y</p:attrName>
+                                        </p:attrNameLst>
+                                      </p:cBhvr>
+                                      <p:tavLst>
+                                        <p:tav tm="0">
+                                          <p:val>
+                                            <p:strVal val="1+#ppt_h/2"/>
+                                          </p:val>
+                                        </p:tav>
+                                        <p:tav tm="100000">
+                                          <p:val>
+                                            <p:strVal val="#ppt_y"/>
+                                          </p:val>
+                                        </p:tav>
+                                      </p:tavLst>
+                                    </p:anim>
+                                  </p:childTnLst>
+                                </p:cTn>
+                              </p:par>
+                            </p:childTnLst>
+                          </p:cTn>
+                        </p:par>
+                      </p:childTnLst>
+                    </p:cTn>
+                  </p:par>
+                </p:childTnLst>
+              </p:cTn>
+              <p:prevCondLst>
+                <p:cond evt="onPrev" delay="0">
+                  <p:tgtEl>
+                    <p:sldTgt/>
+                  </p:tgtEl>
+                </p:cond>
+              </p:prevCondLst>
+              <p:nextCondLst>
+                <p:cond evt="onNext" delay="0">
+                  <p:tgtEl>
+                    <p:sldTgt/>
+                  </p:tgtEl>
+                </p:cond>
+              </p:nextCondLst>
+            </p:seq>
+          </p:childTnLst>
+        </p:cTn>
+      </p:par>
+    </p:tnLst>
+    <p:bldLst>
+      <p:bldP spid="6" grpId="0"/>
+      <p:bldP spid="6" grpId="1"/>
+      <p:bldP spid="4" grpId="0"/>
+      <p:bldP spid="4" grpId="1"/>
+      <p:bldP spid="13" grpId="0"/>
+      <p:bldP spid="13" grpId="1"/>
+      <p:bldP spid="7" grpId="0"/>
+      <p:bldP spid="7" grpId="1"/>
+      <p:bldP spid="11" grpId="0"/>
+      <p:bldP spid="11" grpId="1"/>
+    </p:bldLst>
+  </p:timing>
+</p:sld>
+</file>
+
+<file path=ppt/slides/slide8.xml><?xml version="1.0" encoding="utf-8"?>
+<p:sld xmlns:a="http://schemas.openxmlformats.org/drawingml/2006/main" xmlns:r="http://schemas.openxmlformats.org/officeDocument/2006/relationships" xmlns:p="http://schemas.openxmlformats.org/presentationml/2006/main">
+  <p:cSld>
+    <p:spTree>
+      <p:nvGrpSpPr>
+        <p:cNvPr id="1" name=""/>
+        <p:cNvGrpSpPr/>
+        <p:nvPr/>
+      </p:nvGrpSpPr>
+      <p:grpSpPr/>
+      <p:sp>
+        <p:nvSpPr>
+          <p:cNvPr id="2" name="文本框 1"/>
+          <p:cNvSpPr txBox="1"/>
+          <p:nvPr/>
+        </p:nvSpPr>
+        <p:spPr>
+          <a:xfrm>
+            <a:off x="695960" y="809625"/>
+            <a:ext cx="8137525" cy="398780"/>
+          </a:xfrm>
+          <a:prstGeom prst="rect">
+            <a:avLst/>
+          </a:prstGeom>
+          <a:noFill/>
+        </p:spPr>
+        <p:txBody>
+          <a:bodyPr wrap="square" rtlCol="0">
+            <a:spAutoFit/>
+          </a:bodyPr>
+          <a:p>
+            <a:r>
+              <a:rPr lang="zh-CN" altLang="en-US" sz="2000"/>
+              <a:t>在模型基础阶段中，因为使用的是近似的补偿模型，所以存在一些问题：</a:t>
+            </a:r>
+            <a:endParaRPr lang="zh-CN" altLang="en-US" sz="2000"/>
+          </a:p>
+        </p:txBody>
+      </p:sp>
+      <p:sp>
+        <p:nvSpPr>
+          <p:cNvPr id="3" name="文本框 2"/>
+          <p:cNvSpPr txBox="1"/>
+          <p:nvPr/>
+        </p:nvSpPr>
+        <p:spPr>
+          <a:xfrm>
+            <a:off x="1297305" y="1365250"/>
+            <a:ext cx="7580630" cy="706755"/>
+          </a:xfrm>
+          <a:prstGeom prst="rect">
+            <a:avLst/>
+          </a:prstGeom>
+          <a:noFill/>
+        </p:spPr>
+        <p:txBody>
+          <a:bodyPr wrap="square" rtlCol="0">
+            <a:spAutoFit/>
+          </a:bodyPr>
+          <a:p>
+            <a:r>
+              <a:rPr lang="en-US" altLang="zh-CN" sz="2000"/>
+              <a:t>1.</a:t>
+            </a:r>
+            <a:r>
+              <a:rPr lang="zh-CN" altLang="en-US" sz="2000"/>
+              <a:t>查找合适步长的回溯线搜索可能会死循环。</a:t>
+            </a:r>
+            <a:endParaRPr lang="zh-CN" altLang="en-US" sz="2000"/>
+          </a:p>
+          <a:p>
+            <a:r>
+              <a:rPr lang="en-US" altLang="zh-CN" sz="2000"/>
+              <a:t>2.</a:t>
+            </a:r>
+            <a:r>
+              <a:rPr lang="zh-CN" altLang="en-US" sz="2000"/>
+              <a:t>梯度下降幅度可能不充分，导致状态无法更新到真实最优状态。</a:t>
+            </a:r>
+            <a:endParaRPr lang="zh-CN" altLang="en-US" sz="2000"/>
+          </a:p>
+        </p:txBody>
+      </p:sp>
+      <p:sp>
+        <p:nvSpPr>
+          <p:cNvPr id="4" name="文本框 3"/>
+          <p:cNvSpPr txBox="1"/>
+          <p:nvPr/>
+        </p:nvSpPr>
+        <p:spPr>
+          <a:xfrm>
+            <a:off x="695960" y="2463165"/>
+            <a:ext cx="4064000" cy="398780"/>
+          </a:xfrm>
+          <a:prstGeom prst="rect">
+            <a:avLst/>
+          </a:prstGeom>
+          <a:noFill/>
+        </p:spPr>
+        <p:txBody>
+          <a:bodyPr wrap="square" rtlCol="0">
+            <a:spAutoFit/>
+          </a:bodyPr>
+          <a:p>
+            <a:r>
+              <a:rPr lang="zh-CN" altLang="en-US" sz="2000"/>
+              <a:t>针对以上问题，进行了两点优化：</a:t>
+            </a:r>
+            <a:endParaRPr lang="en-US" altLang="zh-CN" sz="2000"/>
+          </a:p>
+        </p:txBody>
+      </p:sp>
+      <p:sp>
+        <p:nvSpPr>
+          <p:cNvPr id="5" name="文本框 4"/>
+          <p:cNvSpPr txBox="1"/>
+          <p:nvPr/>
+        </p:nvSpPr>
+        <p:spPr>
+          <a:xfrm>
+            <a:off x="1297305" y="3032125"/>
+            <a:ext cx="2849245" cy="398780"/>
+          </a:xfrm>
+          <a:prstGeom prst="rect">
+            <a:avLst/>
+          </a:prstGeom>
+          <a:noFill/>
+        </p:spPr>
+        <p:txBody>
+          <a:bodyPr wrap="square" rtlCol="0">
+            <a:spAutoFit/>
+          </a:bodyPr>
+          <a:p>
+            <a:r>
+              <a:rPr lang="en-US" altLang="zh-CN" sz="2000"/>
+              <a:t>1.</a:t>
+            </a:r>
+            <a:r>
+              <a:rPr lang="zh-CN" altLang="en-US" sz="2000"/>
+              <a:t>设置步长的范围，即：</a:t>
+            </a:r>
+            <a:endParaRPr lang="zh-CN" altLang="en-US" sz="2000"/>
+          </a:p>
+        </p:txBody>
+      </p:sp>
+      <mc:AlternateContent xmlns:mc="http://schemas.openxmlformats.org/markup-compatibility/2006">
+        <mc:Choice xmlns:a14="http://schemas.microsoft.com/office/drawing/2010/main" Requires="a14">
+          <p:sp>
+            <p:nvSpPr>
+              <p:cNvPr id="7" name="文本框 6"/>
+              <p:cNvSpPr txBox="1"/>
+              <p:nvPr/>
+            </p:nvSpPr>
+            <p:spPr>
+              <a:xfrm>
+                <a:off x="3938270" y="3032125"/>
+                <a:ext cx="2186940" cy="398145"/>
+              </a:xfrm>
+              <a:prstGeom prst="rect">
+                <a:avLst/>
+              </a:prstGeom>
+              <a:noFill/>
+            </p:spPr>
+            <p:txBody>
+              <a:bodyPr wrap="none" rtlCol="0" anchor="t">
+                <a:noAutofit/>
+              </a:bodyPr>
+              <a:p>
+                <a:pPr algn="l"/>
+                <a14:m>
+                  <m:oMath xmlns:m="http://schemas.openxmlformats.org/officeDocument/2006/math">
+                    <m:sSub>
+                      <m:sSubPr>
+                        <m:ctrlPr>
+                          <a:rPr lang="en-US" altLang="zh-CN" i="1">
+                            <a:latin typeface="Cambria Math" panose="02040503050406030204" charset="0"/>
+                            <a:cs typeface="Cambria Math" panose="02040503050406030204" charset="0"/>
+                          </a:rPr>
+                        </m:ctrlPr>
+                      </m:sSubPr>
+                      <m:e>
+                        <m:r>
+                          <a:rPr lang="en-US" altLang="zh-CN" i="1">
+                            <a:latin typeface="Cambria Math" panose="02040503050406030204" charset="0"/>
+                            <a:cs typeface="Cambria Math" panose="02040503050406030204" charset="0"/>
+                          </a:rPr>
+                          <m:t>𝜂</m:t>
+                        </m:r>
+                      </m:e>
+                      <m:sub>
+                        <m:r>
+                          <a:rPr lang="en-US" altLang="zh-CN" i="1">
+                            <a:latin typeface="Cambria Math" panose="02040503050406030204" charset="0"/>
+                            <a:cs typeface="Cambria Math" panose="02040503050406030204" charset="0"/>
+                          </a:rPr>
+                          <m:t>𝑚𝑖𝑛</m:t>
+                        </m:r>
+                      </m:sub>
+                    </m:sSub>
+                    <m:r>
+                      <a:rPr lang="en-US" altLang="zh-CN" i="1">
+                        <a:latin typeface="Cambria Math" panose="02040503050406030204" charset="0"/>
+                        <a:cs typeface="Cambria Math" panose="02040503050406030204" charset="0"/>
+                      </a:rPr>
+                      <m:t>≤</m:t>
+                    </m:r>
+                    <m:r>
+                      <a:rPr lang="en-US" altLang="zh-CN" i="1">
+                        <a:latin typeface="Cambria Math" panose="02040503050406030204" charset="0"/>
+                        <a:cs typeface="Cambria Math" panose="02040503050406030204" charset="0"/>
+                      </a:rPr>
+                      <m:t>𝜂</m:t>
+                    </m:r>
+                    <m:r>
+                      <a:rPr lang="en-US" altLang="zh-CN" i="1">
+                        <a:latin typeface="Cambria Math" panose="02040503050406030204" charset="0"/>
+                        <a:cs typeface="Cambria Math" panose="02040503050406030204" charset="0"/>
+                      </a:rPr>
+                      <m:t>≤</m:t>
+                    </m:r>
+                    <m:sSub>
+                      <m:sSubPr>
+                        <m:ctrlPr>
+                          <a:rPr lang="en-US" altLang="zh-CN" i="1">
+                            <a:latin typeface="Cambria Math" panose="02040503050406030204" charset="0"/>
+                            <a:cs typeface="Cambria Math" panose="02040503050406030204" charset="0"/>
+                          </a:rPr>
+                        </m:ctrlPr>
+                      </m:sSubPr>
+                      <m:e>
+                        <m:r>
+                          <a:rPr lang="en-US" altLang="zh-CN" i="1">
+                            <a:latin typeface="Cambria Math" panose="02040503050406030204" charset="0"/>
+                            <a:cs typeface="Cambria Math" panose="02040503050406030204" charset="0"/>
+                          </a:rPr>
+                          <m:t>𝜂</m:t>
+                        </m:r>
+                      </m:e>
+                      <m:sub>
+                        <m:r>
+                          <a:rPr lang="en-US" altLang="zh-CN" i="1">
+                            <a:latin typeface="Cambria Math" panose="02040503050406030204" charset="0"/>
+                            <a:cs typeface="Cambria Math" panose="02040503050406030204" charset="0"/>
+                          </a:rPr>
+                          <m:t>𝑚𝑎𝑥</m:t>
+                        </m:r>
+                      </m:sub>
+                    </m:sSub>
+                  </m:oMath>
+                </a14:m>
+                <a:r>
+                  <a:rPr lang="zh-CN" altLang="en-US">
+                    <a:latin typeface="Cambria Math" panose="02040503050406030204" charset="0"/>
+                    <a:cs typeface="Cambria Math" panose="02040503050406030204" charset="0"/>
+                  </a:rPr>
+                  <a:t>。</a:t>
+                </a:r>
+                <a:endParaRPr lang="zh-CN" altLang="en-US">
+                  <a:latin typeface="Cambria Math" panose="02040503050406030204" charset="0"/>
+                  <a:cs typeface="Cambria Math" panose="02040503050406030204" charset="0"/>
+                </a:endParaRPr>
+              </a:p>
+            </p:txBody>
+          </p:sp>
+        </mc:Choice>
+        <mc:Fallback>
+          <p:sp>
+            <p:nvSpPr>
+              <p:cNvPr id="7" name="文本框 6"/>
+              <p:cNvSpPr txBox="1">
+                <a:spLocks noRot="1" noChangeAspect="1" noMove="1" noResize="1" noEditPoints="1" noAdjustHandles="1" noChangeArrowheads="1" noChangeShapeType="1" noTextEdit="1"/>
+              </p:cNvSpPr>
+              <p:nvPr/>
+            </p:nvSpPr>
+            <p:spPr>
+              <a:xfrm>
+                <a:off x="3938270" y="3032125"/>
+                <a:ext cx="2186940" cy="398145"/>
+              </a:xfrm>
+              <a:prstGeom prst="rect">
+                <a:avLst/>
+              </a:prstGeom>
+              <a:blipFill rotWithShape="1">
+                <a:blip r:embed="rId1"/>
+                <a:stretch>
+                  <a:fillRect/>
+                </a:stretch>
+              </a:blipFill>
+            </p:spPr>
+            <p:txBody>
+              <a:bodyPr/>
+              <a:lstStyle/>
+              <a:p>
+                <a:r>
+                  <a:rPr lang="zh-CN" altLang="en-US">
+                    <a:noFill/>
+                  </a:rPr>
+                  <a:t> </a:t>
+                </a:r>
+              </a:p>
+            </p:txBody>
+          </p:sp>
+        </mc:Fallback>
+      </mc:AlternateContent>
+      <p:sp>
+        <p:nvSpPr>
+          <p:cNvPr id="8" name="文本框 7"/>
+          <p:cNvSpPr txBox="1"/>
+          <p:nvPr/>
+        </p:nvSpPr>
+        <p:spPr>
+          <a:xfrm>
+            <a:off x="1297305" y="3430905"/>
+            <a:ext cx="4715510" cy="398780"/>
+          </a:xfrm>
+          <a:prstGeom prst="rect">
+            <a:avLst/>
+          </a:prstGeom>
+          <a:noFill/>
+        </p:spPr>
+        <p:txBody>
+          <a:bodyPr wrap="square" rtlCol="0">
+            <a:spAutoFit/>
+          </a:bodyPr>
+          <a:p>
+            <a:r>
+              <a:rPr lang="en-US" altLang="zh-CN" sz="2000"/>
+              <a:t>2.</a:t>
+            </a:r>
+            <a:r>
+              <a:rPr lang="zh-CN" altLang="en-US" sz="2000"/>
+              <a:t>限定补偿梯度和真实梯度的偏差，即：</a:t>
+            </a:r>
+            <a:endParaRPr lang="zh-CN" altLang="en-US" sz="2000"/>
+          </a:p>
+        </p:txBody>
+      </p:sp>
+      <p:pic>
+        <p:nvPicPr>
+          <p:cNvPr id="10" name="图片 9"/>
+          <p:cNvPicPr>
+            <a:picLocks noChangeAspect="1"/>
+          </p:cNvPicPr>
+          <p:nvPr/>
+        </p:nvPicPr>
+        <p:blipFill>
+          <a:blip r:embed="rId2"/>
+          <a:stretch>
+            <a:fillRect/>
+          </a:stretch>
+        </p:blipFill>
+        <p:spPr>
+          <a:xfrm>
+            <a:off x="5756275" y="3386455"/>
+            <a:ext cx="2514600" cy="576580"/>
+          </a:xfrm>
+          <a:prstGeom prst="rect">
+            <a:avLst/>
+          </a:prstGeom>
+        </p:spPr>
+      </p:pic>
+      <p:sp>
+        <p:nvSpPr>
+          <p:cNvPr id="11" name="文本框 10"/>
+          <p:cNvSpPr txBox="1"/>
+          <p:nvPr/>
+        </p:nvSpPr>
+        <p:spPr>
+          <a:xfrm>
+            <a:off x="739775" y="4116705"/>
+            <a:ext cx="7366000" cy="706755"/>
+          </a:xfrm>
+          <a:prstGeom prst="rect">
+            <a:avLst/>
+          </a:prstGeom>
+          <a:noFill/>
+        </p:spPr>
+        <p:txBody>
+          <a:bodyPr wrap="square" rtlCol="0">
+            <a:spAutoFit/>
+          </a:bodyPr>
+          <a:p>
+            <a:r>
+              <a:rPr lang="zh-CN" altLang="en-US" sz="2000"/>
+              <a:t>由于计算真实梯度代价昂贵，我们可以舍弃梯度误差的一些精度，保证其易于计算的上界满足条件即可：</a:t>
+            </a:r>
+            <a:endParaRPr lang="zh-CN" altLang="en-US" sz="2000"/>
+          </a:p>
+        </p:txBody>
+      </p:sp>
+      <p:pic>
+        <p:nvPicPr>
+          <p:cNvPr id="12" name="图片 11"/>
+          <p:cNvPicPr>
+            <a:picLocks noChangeAspect="1"/>
+          </p:cNvPicPr>
+          <p:nvPr/>
+        </p:nvPicPr>
+        <p:blipFill>
+          <a:blip r:embed="rId3"/>
+          <a:stretch>
+            <a:fillRect/>
+          </a:stretch>
+        </p:blipFill>
+        <p:spPr>
+          <a:xfrm>
+            <a:off x="4759960" y="5188585"/>
+            <a:ext cx="3345180" cy="765175"/>
+          </a:xfrm>
+          <a:prstGeom prst="rect">
+            <a:avLst/>
+          </a:prstGeom>
+        </p:spPr>
+      </p:pic>
+    </p:spTree>
+    <p:custDataLst>
+      <p:tags r:id="rId4"/>
+    </p:custDataLst>
+  </p:cSld>
+  <p:clrMapOvr>
+    <a:masterClrMapping/>
+  </p:clrMapOvr>
+  <p:timing>
+    <p:tnLst>
+      <p:par>
+        <p:cTn id="1" dur="indefinite" restart="never" nodeType="tmRoot">
+          <p:childTnLst>
+            <p:seq concurrent="1" nextAc="seek">
+              <p:cTn id="2" dur="indefinite" nodeType="mainSeq">
+                <p:childTnLst>
+                  <p:par>
+                    <p:cTn id="3" fill="hold">
+                      <p:stCondLst>
+                        <p:cond delay="indefinite"/>
+                      </p:stCondLst>
+                      <p:childTnLst>
+                        <p:par>
+                          <p:cTn id="4" fill="hold">
+                            <p:stCondLst>
+                              <p:cond delay="0"/>
+                            </p:stCondLst>
+                            <p:childTnLst>
+                              <p:par>
+                                <p:cTn id="5" presetID="2" presetClass="entr" presetSubtype="4" fill="hold" grpId="0" nodeType="clickEffect">
+                                  <p:stCondLst>
+                                    <p:cond delay="0"/>
+                                  </p:stCondLst>
+                                  <p:childTnLst>
+                                    <p:set>
+                                      <p:cBhvr>
+                                        <p:cTn id="6" dur="1" fill="hold">
+                                          <p:stCondLst>
+                                            <p:cond delay="0"/>
+                                          </p:stCondLst>
+                                        </p:cTn>
+                                        <p:tgtEl>
+                                          <p:spTgt spid="3"/>
+                                        </p:tgtEl>
+                                        <p:attrNameLst>
+                                          <p:attrName>style.visibility</p:attrName>
+                                        </p:attrNameLst>
+                                      </p:cBhvr>
+                                      <p:to>
+                                        <p:strVal val="visible"/>
+                                      </p:to>
+                                    </p:set>
+                                    <p:anim calcmode="lin" valueType="num">
+                                      <p:cBhvr additive="base">
+                                        <p:cTn id="7" dur="500" fill="hold"/>
+                                        <p:tgtEl>
+                                          <p:spTgt spid="3"/>
+                                        </p:tgtEl>
+                                        <p:attrNameLst>
+                                          <p:attrName>ppt_x</p:attrName>
+                                        </p:attrNameLst>
+                                      </p:cBhvr>
+                                      <p:tavLst>
+                                        <p:tav tm="0">
+                                          <p:val>
+                                            <p:strVal val="#ppt_x"/>
+                                          </p:val>
+                                        </p:tav>
+                                        <p:tav tm="100000">
+                                          <p:val>
+                                            <p:strVal val="#ppt_x"/>
+                                          </p:val>
+                                        </p:tav>
+                                      </p:tavLst>
+                                    </p:anim>
+                                    <p:anim calcmode="lin" valueType="num">
+                                      <p:cBhvr additive="base">
+                                        <p:cTn id="8" dur="500" fill="hold"/>
+                                        <p:tgtEl>
+                                          <p:spTgt spid="3"/>
+                                        </p:tgtEl>
+                                        <p:attrNameLst>
+                                          <p:attrName>ppt_y</p:attrName>
+                                        </p:attrNameLst>
+                                      </p:cBhvr>
+                                      <p:tavLst>
+                                        <p:tav tm="0">
+                                          <p:val>
+                                            <p:strVal val="1+#ppt_h/2"/>
+                                          </p:val>
+                                        </p:tav>
+                                        <p:tav tm="100000">
+                                          <p:val>
+                                            <p:strVal val="#ppt_y"/>
+                                          </p:val>
+                                        </p:tav>
+                                      </p:tavLst>
+                                    </p:anim>
+                                  </p:childTnLst>
+                                </p:cTn>
+                              </p:par>
+                            </p:childTnLst>
+                          </p:cTn>
+                        </p:par>
+                      </p:childTnLst>
+                    </p:cTn>
+                  </p:par>
+                  <p:par>
+                    <p:cTn id="9" fill="hold">
+                      <p:stCondLst>
+                        <p:cond delay="indefinite"/>
+                      </p:stCondLst>
+                      <p:childTnLst>
+                        <p:par>
+                          <p:cTn id="10" fill="hold">
+                            <p:stCondLst>
+                              <p:cond delay="0"/>
+                            </p:stCondLst>
+                            <p:childTnLst>
+                              <p:par>
+                                <p:cTn id="11" presetID="2" presetClass="entr" presetSubtype="4" fill="hold" grpId="0" nodeType="clickEffect">
+                                  <p:stCondLst>
+                                    <p:cond delay="0"/>
+                                  </p:stCondLst>
+                                  <p:childTnLst>
+                                    <p:set>
+                                      <p:cBhvr>
+                                        <p:cTn id="12" dur="1" fill="hold">
+                                          <p:stCondLst>
+                                            <p:cond delay="0"/>
+                                          </p:stCondLst>
+                                        </p:cTn>
+                                        <p:tgtEl>
+                                          <p:spTgt spid="4"/>
+                                        </p:tgtEl>
+                                        <p:attrNameLst>
+                                          <p:attrName>style.visibility</p:attrName>
+                                        </p:attrNameLst>
+                                      </p:cBhvr>
+                                      <p:to>
+                                        <p:strVal val="visible"/>
+                                      </p:to>
+                                    </p:set>
+                                    <p:anim calcmode="lin" valueType="num">
+                                      <p:cBhvr additive="base">
+                                        <p:cTn id="13" dur="500" fill="hold"/>
+                                        <p:tgtEl>
+                                          <p:spTgt spid="4"/>
+                                        </p:tgtEl>
+                                        <p:attrNameLst>
+                                          <p:attrName>ppt_x</p:attrName>
+                                        </p:attrNameLst>
+                                      </p:cBhvr>
+                                      <p:tavLst>
+                                        <p:tav tm="0">
+                                          <p:val>
+                                            <p:strVal val="#ppt_x"/>
+                                          </p:val>
+                                        </p:tav>
+                                        <p:tav tm="100000">
+                                          <p:val>
+                                            <p:strVal val="#ppt_x"/>
+                                          </p:val>
+                                        </p:tav>
+                                      </p:tavLst>
+                                    </p:anim>
+                                    <p:anim calcmode="lin" valueType="num">
+                                      <p:cBhvr additive="base">
+                                        <p:cTn id="14" dur="500" fill="hold"/>
+                                        <p:tgtEl>
+                                          <p:spTgt spid="4"/>
+                                        </p:tgtEl>
+                                        <p:attrNameLst>
+                                          <p:attrName>ppt_y</p:attrName>
+                                        </p:attrNameLst>
+                                      </p:cBhvr>
+                                      <p:tavLst>
+                                        <p:tav tm="0">
+                                          <p:val>
+                                            <p:strVal val="1+#ppt_h/2"/>
+                                          </p:val>
+                                        </p:tav>
+                                        <p:tav tm="100000">
+                                          <p:val>
+                                            <p:strVal val="#ppt_y"/>
+                                          </p:val>
+                                        </p:tav>
+                                      </p:tavLst>
+                                    </p:anim>
+                                  </p:childTnLst>
+                                </p:cTn>
+                              </p:par>
+                              <p:par>
+                                <p:cTn id="15" presetID="2" presetClass="entr" presetSubtype="4" fill="hold" grpId="0" nodeType="withEffect">
+                                  <p:stCondLst>
+                                    <p:cond delay="0"/>
+                                  </p:stCondLst>
+                                  <p:childTnLst>
+                                    <p:set>
+                                      <p:cBhvr>
+                                        <p:cTn id="16" dur="1" fill="hold">
+                                          <p:stCondLst>
+                                            <p:cond delay="0"/>
+                                          </p:stCondLst>
+                                        </p:cTn>
+                                        <p:tgtEl>
+                                          <p:spTgt spid="5"/>
+                                        </p:tgtEl>
+                                        <p:attrNameLst>
+                                          <p:attrName>style.visibility</p:attrName>
+                                        </p:attrNameLst>
+                                      </p:cBhvr>
+                                      <p:to>
+                                        <p:strVal val="visible"/>
+                                      </p:to>
+                                    </p:set>
+                                    <p:anim calcmode="lin" valueType="num">
+                                      <p:cBhvr additive="base">
+                                        <p:cTn id="17" dur="500" fill="hold"/>
+                                        <p:tgtEl>
+                                          <p:spTgt spid="5"/>
+                                        </p:tgtEl>
+                                        <p:attrNameLst>
+                                          <p:attrName>ppt_x</p:attrName>
+                                        </p:attrNameLst>
+                                      </p:cBhvr>
+                                      <p:tavLst>
+                                        <p:tav tm="0">
+                                          <p:val>
+                                            <p:strVal val="#ppt_x"/>
+                                          </p:val>
+                                        </p:tav>
+                                        <p:tav tm="100000">
+                                          <p:val>
+                                            <p:strVal val="#ppt_x"/>
+                                          </p:val>
+                                        </p:tav>
+                                      </p:tavLst>
+                                    </p:anim>
+                                    <p:anim calcmode="lin" valueType="num">
+                                      <p:cBhvr additive="base">
+                                        <p:cTn id="18" dur="500" fill="hold"/>
+                                        <p:tgtEl>
+                                          <p:spTgt spid="5"/>
+                                        </p:tgtEl>
+                                        <p:attrNameLst>
+                                          <p:attrName>ppt_y</p:attrName>
+                                        </p:attrNameLst>
+                                      </p:cBhvr>
+                                      <p:tavLst>
+                                        <p:tav tm="0">
+                                          <p:val>
+                                            <p:strVal val="1+#ppt_h/2"/>
+                                          </p:val>
+                                        </p:tav>
+                                        <p:tav tm="100000">
+                                          <p:val>
+                                            <p:strVal val="#ppt_y"/>
+                                          </p:val>
+                                        </p:tav>
+                                      </p:tavLst>
+                                    </p:anim>
+                                  </p:childTnLst>
+                                </p:cTn>
+                              </p:par>
+                              <p:par>
+                                <p:cTn id="19" presetID="2" presetClass="entr" presetSubtype="4" fill="hold" grpId="0" nodeType="withEffect">
+                                  <p:stCondLst>
+                                    <p:cond delay="0"/>
+                                  </p:stCondLst>
+                                  <p:childTnLst>
+                                    <p:set>
+                                      <p:cBhvr>
+                                        <p:cTn id="20" dur="1" fill="hold">
+                                          <p:stCondLst>
+                                            <p:cond delay="0"/>
+                                          </p:stCondLst>
+                                        </p:cTn>
+                                        <p:tgtEl>
+                                          <p:spTgt spid="7"/>
+                                        </p:tgtEl>
+                                        <p:attrNameLst>
+                                          <p:attrName>style.visibility</p:attrName>
+                                        </p:attrNameLst>
+                                      </p:cBhvr>
+                                      <p:to>
+                                        <p:strVal val="visible"/>
+                                      </p:to>
+                                    </p:set>
+                                    <p:anim calcmode="lin" valueType="num">
+                                      <p:cBhvr additive="base">
+                                        <p:cTn id="21" dur="500" fill="hold"/>
+                                        <p:tgtEl>
+                                          <p:spTgt spid="7"/>
+                                        </p:tgtEl>
+                                        <p:attrNameLst>
+                                          <p:attrName>ppt_x</p:attrName>
+                                        </p:attrNameLst>
+                                      </p:cBhvr>
+                                      <p:tavLst>
+                                        <p:tav tm="0">
+                                          <p:val>
+                                            <p:strVal val="#ppt_x"/>
+                                          </p:val>
+                                        </p:tav>
+                                        <p:tav tm="100000">
+                                          <p:val>
+                                            <p:strVal val="#ppt_x"/>
+                                          </p:val>
+                                        </p:tav>
+                                      </p:tavLst>
+                                    </p:anim>
+                                    <p:anim calcmode="lin" valueType="num">
+                                      <p:cBhvr additive="base">
+                                        <p:cTn id="22" dur="500" fill="hold"/>
+                                        <p:tgtEl>
+                                          <p:spTgt spid="7"/>
+                                        </p:tgtEl>
+                                        <p:attrNameLst>
+                                          <p:attrName>ppt_y</p:attrName>
+                                        </p:attrNameLst>
+                                      </p:cBhvr>
+                                      <p:tavLst>
+                                        <p:tav tm="0">
+                                          <p:val>
+                                            <p:strVal val="1+#ppt_h/2"/>
+                                          </p:val>
+                                        </p:tav>
+                                        <p:tav tm="100000">
+                                          <p:val>
+                                            <p:strVal val="#ppt_y"/>
+                                          </p:val>
+                                        </p:tav>
+                                      </p:tavLst>
+                                    </p:anim>
+                                  </p:childTnLst>
+                                </p:cTn>
+                              </p:par>
+                              <p:par>
+                                <p:cTn id="23" presetID="2" presetClass="entr" presetSubtype="4" fill="hold" grpId="0" nodeType="withEffect">
+                                  <p:stCondLst>
+                                    <p:cond delay="0"/>
+                                  </p:stCondLst>
+                                  <p:childTnLst>
+                                    <p:set>
+                                      <p:cBhvr>
+                                        <p:cTn id="24" dur="1" fill="hold">
+                                          <p:stCondLst>
+                                            <p:cond delay="0"/>
+                                          </p:stCondLst>
+                                        </p:cTn>
+                                        <p:tgtEl>
+                                          <p:spTgt spid="8"/>
+                                        </p:tgtEl>
+                                        <p:attrNameLst>
+                                          <p:attrName>style.visibility</p:attrName>
+                                        </p:attrNameLst>
+                                      </p:cBhvr>
+                                      <p:to>
+                                        <p:strVal val="visible"/>
+                                      </p:to>
+                                    </p:set>
+                                    <p:anim calcmode="lin" valueType="num">
+                                      <p:cBhvr additive="base">
+                                        <p:cTn id="25" dur="500" fill="hold"/>
+                                        <p:tgtEl>
+                                          <p:spTgt spid="8"/>
+                                        </p:tgtEl>
+                                        <p:attrNameLst>
+                                          <p:attrName>ppt_x</p:attrName>
+                                        </p:attrNameLst>
+                                      </p:cBhvr>
+                                      <p:tavLst>
+                                        <p:tav tm="0">
+                                          <p:val>
+                                            <p:strVal val="#ppt_x"/>
+                                          </p:val>
+                                        </p:tav>
+                                        <p:tav tm="100000">
+                                          <p:val>
+                                            <p:strVal val="#ppt_x"/>
+                                          </p:val>
+                                        </p:tav>
+                                      </p:tavLst>
+                                    </p:anim>
+                                    <p:anim calcmode="lin" valueType="num">
+                                      <p:cBhvr additive="base">
+                                        <p:cTn id="26" dur="500" fill="hold"/>
+                                        <p:tgtEl>
+                                          <p:spTgt spid="8"/>
+                                        </p:tgtEl>
+                                        <p:attrNameLst>
+                                          <p:attrName>ppt_y</p:attrName>
+                                        </p:attrNameLst>
+                                      </p:cBhvr>
+                                      <p:tavLst>
+                                        <p:tav tm="0">
+                                          <p:val>
+                                            <p:strVal val="1+#ppt_h/2"/>
+                                          </p:val>
+                                        </p:tav>
+                                        <p:tav tm="100000">
+                                          <p:val>
+                                            <p:strVal val="#ppt_y"/>
+                                          </p:val>
+                                        </p:tav>
+                                      </p:tavLst>
+                                    </p:anim>
+                                  </p:childTnLst>
+                                </p:cTn>
+                              </p:par>
+                              <p:par>
+                                <p:cTn id="27" presetID="2" presetClass="entr" presetSubtype="4" fill="hold" nodeType="withEffect">
+                                  <p:stCondLst>
+                                    <p:cond delay="0"/>
+                                  </p:stCondLst>
+                                  <p:childTnLst>
+                                    <p:set>
+                                      <p:cBhvr>
+                                        <p:cTn id="28" dur="1" fill="hold">
+                                          <p:stCondLst>
+                                            <p:cond delay="0"/>
+                                          </p:stCondLst>
+                                        </p:cTn>
+                                        <p:tgtEl>
+                                          <p:spTgt spid="10"/>
+                                        </p:tgtEl>
+                                        <p:attrNameLst>
+                                          <p:attrName>style.visibility</p:attrName>
+                                        </p:attrNameLst>
+                                      </p:cBhvr>
+                                      <p:to>
+                                        <p:strVal val="visible"/>
+                                      </p:to>
+                                    </p:set>
+                                    <p:anim calcmode="lin" valueType="num">
+                                      <p:cBhvr additive="base">
+                                        <p:cTn id="29" dur="500" fill="hold"/>
+                                        <p:tgtEl>
+                                          <p:spTgt spid="10"/>
+                                        </p:tgtEl>
+                                        <p:attrNameLst>
+                                          <p:attrName>ppt_x</p:attrName>
+                                        </p:attrNameLst>
+                                      </p:cBhvr>
+                                      <p:tavLst>
+                                        <p:tav tm="0">
+                                          <p:val>
+                                            <p:strVal val="#ppt_x"/>
+                                          </p:val>
+                                        </p:tav>
+                                        <p:tav tm="100000">
+                                          <p:val>
+                                            <p:strVal val="#ppt_x"/>
+                                          </p:val>
+                                        </p:tav>
+                                      </p:tavLst>
+                                    </p:anim>
+                                    <p:anim calcmode="lin" valueType="num">
+                                      <p:cBhvr additive="base">
+                                        <p:cTn id="30" dur="500" fill="hold"/>
+                                        <p:tgtEl>
+                                          <p:spTgt spid="10"/>
+                                        </p:tgtEl>
+                                        <p:attrNameLst>
+                                          <p:attrName>ppt_y</p:attrName>
+                                        </p:attrNameLst>
+                                      </p:cBhvr>
+                                      <p:tavLst>
+                                        <p:tav tm="0">
+                                          <p:val>
+                                            <p:strVal val="1+#ppt_h/2"/>
+                                          </p:val>
+                                        </p:tav>
+                                        <p:tav tm="100000">
+                                          <p:val>
+                                            <p:strVal val="#ppt_y"/>
+                                          </p:val>
+                                        </p:tav>
+                                      </p:tavLst>
+                                    </p:anim>
+                                  </p:childTnLst>
+                                </p:cTn>
+                              </p:par>
+                            </p:childTnLst>
+                          </p:cTn>
+                        </p:par>
+                      </p:childTnLst>
+                    </p:cTn>
+                  </p:par>
+                  <p:par>
+                    <p:cTn id="31" fill="hold">
+                      <p:stCondLst>
+                        <p:cond delay="indefinite"/>
+                      </p:stCondLst>
+                      <p:childTnLst>
+                        <p:par>
+                          <p:cTn id="32" fill="hold">
+                            <p:stCondLst>
+                              <p:cond delay="0"/>
+                            </p:stCondLst>
+                            <p:childTnLst>
+                              <p:par>
+                                <p:cTn id="33" presetID="2" presetClass="entr" presetSubtype="4" fill="hold" grpId="0" nodeType="clickEffect">
+                                  <p:stCondLst>
+                                    <p:cond delay="0"/>
+                                  </p:stCondLst>
+                                  <p:childTnLst>
+                                    <p:set>
+                                      <p:cBhvr>
+                                        <p:cTn id="34" dur="1" fill="hold">
+                                          <p:stCondLst>
+                                            <p:cond delay="0"/>
+                                          </p:stCondLst>
+                                        </p:cTn>
+                                        <p:tgtEl>
+                                          <p:spTgt spid="11"/>
+                                        </p:tgtEl>
+                                        <p:attrNameLst>
+                                          <p:attrName>style.visibility</p:attrName>
+                                        </p:attrNameLst>
+                                      </p:cBhvr>
+                                      <p:to>
+                                        <p:strVal val="visible"/>
+                                      </p:to>
+                                    </p:set>
+                                    <p:anim calcmode="lin" valueType="num">
+                                      <p:cBhvr additive="base">
+                                        <p:cTn id="35" dur="500" fill="hold"/>
+                                        <p:tgtEl>
+                                          <p:spTgt spid="11"/>
+                                        </p:tgtEl>
+                                        <p:attrNameLst>
+                                          <p:attrName>ppt_x</p:attrName>
+                                        </p:attrNameLst>
+                                      </p:cBhvr>
+                                      <p:tavLst>
+                                        <p:tav tm="0">
+                                          <p:val>
+                                            <p:strVal val="#ppt_x"/>
+                                          </p:val>
+                                        </p:tav>
+                                        <p:tav tm="100000">
+                                          <p:val>
+                                            <p:strVal val="#ppt_x"/>
+                                          </p:val>
+                                        </p:tav>
+                                      </p:tavLst>
+                                    </p:anim>
+                                    <p:anim calcmode="lin" valueType="num">
+                                      <p:cBhvr additive="base">
+                                        <p:cTn id="36" dur="500" fill="hold"/>
+                                        <p:tgtEl>
+                                          <p:spTgt spid="11"/>
+                                        </p:tgtEl>
+                                        <p:attrNameLst>
+                                          <p:attrName>ppt_y</p:attrName>
+                                        </p:attrNameLst>
+                                      </p:cBhvr>
+                                      <p:tavLst>
+                                        <p:tav tm="0">
+                                          <p:val>
+                                            <p:strVal val="1+#ppt_h/2"/>
+                                          </p:val>
+                                        </p:tav>
+                                        <p:tav tm="100000">
+                                          <p:val>
+                                            <p:strVal val="#ppt_y"/>
+                                          </p:val>
+                                        </p:tav>
+                                      </p:tavLst>
+                                    </p:anim>
+                                  </p:childTnLst>
+                                </p:cTn>
+                              </p:par>
+                              <p:par>
+                                <p:cTn id="37" presetID="2" presetClass="entr" presetSubtype="4" fill="hold" nodeType="withEffect">
+                                  <p:stCondLst>
+                                    <p:cond delay="0"/>
+                                  </p:stCondLst>
+                                  <p:childTnLst>
+                                    <p:set>
+                                      <p:cBhvr>
+                                        <p:cTn id="38" dur="1" fill="hold">
+                                          <p:stCondLst>
+                                            <p:cond delay="0"/>
+                                          </p:stCondLst>
+                                        </p:cTn>
+                                        <p:tgtEl>
+                                          <p:spTgt spid="12"/>
+                                        </p:tgtEl>
+                                        <p:attrNameLst>
+                                          <p:attrName>style.visibility</p:attrName>
+                                        </p:attrNameLst>
+                                      </p:cBhvr>
+                                      <p:to>
+                                        <p:strVal val="visible"/>
+                                      </p:to>
+                                    </p:set>
+                                    <p:anim calcmode="lin" valueType="num">
+                                      <p:cBhvr additive="base">
+                                        <p:cTn id="39" dur="500" fill="hold"/>
+                                        <p:tgtEl>
+                                          <p:spTgt spid="12"/>
+                                        </p:tgtEl>
+                                        <p:attrNameLst>
+                                          <p:attrName>ppt_x</p:attrName>
+                                        </p:attrNameLst>
+                                      </p:cBhvr>
+                                      <p:tavLst>
+                                        <p:tav tm="0">
+                                          <p:val>
+                                            <p:strVal val="#ppt_x"/>
+                                          </p:val>
+                                        </p:tav>
+                                        <p:tav tm="100000">
+                                          <p:val>
+                                            <p:strVal val="#ppt_x"/>
+                                          </p:val>
+                                        </p:tav>
+                                      </p:tavLst>
+                                    </p:anim>
+                                    <p:anim calcmode="lin" valueType="num">
+                                      <p:cBhvr additive="base">
+                                        <p:cTn id="40" dur="500" fill="hold"/>
+                                        <p:tgtEl>
+                                          <p:spTgt spid="12"/>
+                                        </p:tgtEl>
+                                        <p:attrNameLst>
+                                          <p:attrName>ppt_y</p:attrName>
+                                        </p:attrNameLst>
+                                      </p:cBhvr>
+                                      <p:tavLst>
+                                        <p:tav tm="0">
+                                          <p:val>
+                                            <p:strVal val="1+#ppt_h/2"/>
+                                          </p:val>
+                                        </p:tav>
+                                        <p:tav tm="100000">
+                                          <p:val>
+                                            <p:strVal val="#ppt_y"/>
+                                          </p:val>
+                                        </p:tav>
+                                      </p:tavLst>
+                                    </p:anim>
+                                  </p:childTnLst>
+                                </p:cTn>
+                              </p:par>
+                            </p:childTnLst>
+                          </p:cTn>
+                        </p:par>
+                      </p:childTnLst>
+                    </p:cTn>
+                  </p:par>
+                </p:childTnLst>
+              </p:cTn>
+              <p:prevCondLst>
+                <p:cond evt="onPrev" delay="0">
+                  <p:tgtEl>
+                    <p:sldTgt/>
+                  </p:tgtEl>
+                </p:cond>
+              </p:prevCondLst>
+              <p:nextCondLst>
+                <p:cond evt="onNext" delay="0">
+                  <p:tgtEl>
+                    <p:sldTgt/>
+                  </p:tgtEl>
+                </p:cond>
+              </p:nextCondLst>
+            </p:seq>
+          </p:childTnLst>
+        </p:cTn>
+      </p:par>
+    </p:tnLst>
+    <p:bldLst>
+      <p:bldP spid="3" grpId="0"/>
+      <p:bldP spid="3" grpId="1"/>
+      <p:bldP spid="4" grpId="0"/>
+      <p:bldP spid="5" grpId="0"/>
+      <p:bldP spid="7" grpId="0"/>
+      <p:bldP spid="8" grpId="0"/>
+      <p:bldP spid="4" grpId="1"/>
+      <p:bldP spid="5" grpId="1"/>
+      <p:bldP spid="7" grpId="1"/>
+      <p:bldP spid="8" grpId="1"/>
+      <p:bldP spid="11" grpId="0"/>
+      <p:bldP spid="11" grpId="1"/>
+    </p:bldLst>
+  </p:timing>
+</p:sld>
+</file>
+
+<file path=ppt/slides/slide9.xml><?xml version="1.0" encoding="utf-8"?>
+<p:sld xmlns:a="http://schemas.openxmlformats.org/drawingml/2006/main" xmlns:r="http://schemas.openxmlformats.org/officeDocument/2006/relationships" xmlns:p="http://schemas.openxmlformats.org/presentationml/2006/main">
+  <p:cSld>
+    <p:spTree>
+      <p:nvGrpSpPr>
+        <p:cNvPr id="1" name=""/>
+        <p:cNvGrpSpPr/>
+        <p:nvPr/>
+      </p:nvGrpSpPr>
+      <p:grpSpPr/>
+      <p:sp>
+        <p:nvSpPr>
+          <p:cNvPr id="2" name="文本框 1"/>
+          <p:cNvSpPr txBox="1"/>
+          <p:nvPr/>
+        </p:nvSpPr>
+        <p:spPr>
+          <a:xfrm>
+            <a:off x="688340" y="558165"/>
+            <a:ext cx="9996170" cy="706755"/>
+          </a:xfrm>
+          <a:prstGeom prst="rect">
+            <a:avLst/>
+          </a:prstGeom>
+          <a:noFill/>
+        </p:spPr>
+        <p:txBody>
+          <a:bodyPr wrap="square" rtlCol="0">
+            <a:spAutoFit/>
+          </a:bodyPr>
+          <a:p>
+            <a:r>
+              <a:rPr lang="zh-CN" altLang="en-US" sz="2000"/>
+              <a:t>理论分析和数据实验都证明：</a:t>
+            </a:r>
+            <a:endParaRPr lang="zh-CN" altLang="en-US" sz="2000"/>
+          </a:p>
+          <a:p>
+            <a:r>
+              <a:rPr lang="zh-CN" altLang="en-US" sz="2000"/>
+              <a:t>在达到相同精度时，</a:t>
+            </a:r>
+            <a:r>
+              <a:rPr lang="en-US" altLang="zh-CN" sz="2000"/>
+              <a:t>GC </a:t>
+            </a:r>
+            <a:r>
+              <a:rPr lang="zh-CN" altLang="en-US" sz="2000"/>
+              <a:t>算法使用的函数评估次数少于只使用模型自由的算法。</a:t>
+            </a:r>
+            <a:endParaRPr lang="zh-CN" altLang="en-US" sz="2000"/>
+          </a:p>
+        </p:txBody>
+      </p:sp>
+      <p:pic>
+        <p:nvPicPr>
+          <p:cNvPr id="3" name="图片 2"/>
+          <p:cNvPicPr>
+            <a:picLocks noChangeAspect="1"/>
+          </p:cNvPicPr>
+          <p:nvPr/>
+        </p:nvPicPr>
+        <p:blipFill>
+          <a:blip r:embed="rId1"/>
+          <a:stretch>
+            <a:fillRect/>
+          </a:stretch>
+        </p:blipFill>
+        <p:spPr>
+          <a:xfrm>
+            <a:off x="1768475" y="2075815"/>
+            <a:ext cx="8655050" cy="2203450"/>
+          </a:xfrm>
+          <a:prstGeom prst="rect">
+            <a:avLst/>
+          </a:prstGeom>
+        </p:spPr>
+      </p:pic>
+      <mc:AlternateContent xmlns:mc="http://schemas.openxmlformats.org/markup-compatibility/2006">
+        <mc:Choice xmlns:a14="http://schemas.microsoft.com/office/drawing/2010/main" Requires="a14">
+          <p:sp>
+            <p:nvSpPr>
+              <p:cNvPr id="6" name="文本框 5"/>
+              <p:cNvSpPr txBox="1"/>
+              <p:nvPr/>
+            </p:nvSpPr>
+            <p:spPr>
+              <a:xfrm>
+                <a:off x="2608516" y="4371594"/>
+                <a:ext cx="1532890" cy="415290"/>
+              </a:xfrm>
+              <a:prstGeom prst="rect">
+                <a:avLst/>
+              </a:prstGeom>
+              <a:noFill/>
+            </p:spPr>
+            <p:txBody>
+              <a:bodyPr wrap="none" rtlCol="0" anchor="t">
+                <a:spAutoFit/>
+              </a:bodyPr>
+              <a:p>
+                <a:pPr algn="l"/>
+                <a:r>
+                  <a:rPr lang="en-US" altLang="zh-CN" sz="2000">
+                    <a:latin typeface="Cambria Math" panose="02040503050406030204" charset="0"/>
+                    <a:ea typeface="MS Mincho" charset="0"/>
+                    <a:cs typeface="Cambria Math" panose="02040503050406030204" charset="0"/>
+                  </a:rPr>
+                  <a:t>GC</a:t>
+                </a:r>
+                <a14:m>
+                  <m:oMath xmlns:m="http://schemas.openxmlformats.org/officeDocument/2006/math">
+                    <m:r>
+                      <a:rPr lang="en-US" altLang="zh-CN" sz="2000" i="1">
+                        <a:latin typeface="Cambria Math" panose="02040503050406030204" charset="0"/>
+                        <a:ea typeface="MS Mincho" charset="0"/>
+                        <a:cs typeface="Cambria Math" panose="02040503050406030204" charset="0"/>
+                      </a:rPr>
+                      <m:t>：</m:t>
+                    </m:r>
+                    <m:r>
+                      <a:rPr lang="en-US" altLang="zh-CN" sz="2000" i="1">
+                        <a:latin typeface="Cambria Math" panose="02040503050406030204" charset="0"/>
+                        <a:ea typeface="MS Mincho" charset="0"/>
+                        <a:cs typeface="Cambria Math" panose="02040503050406030204" charset="0"/>
+                      </a:rPr>
+                      <m:t>𝛾</m:t>
+                    </m:r>
+                    <m:r>
+                      <a:rPr lang="en-US" altLang="zh-CN" sz="2000" i="1">
+                        <a:latin typeface="Cambria Math" panose="02040503050406030204" charset="0"/>
+                        <a:ea typeface="MS Mincho" charset="0"/>
+                        <a:cs typeface="Cambria Math" panose="02040503050406030204" charset="0"/>
+                      </a:rPr>
+                      <m:t>=</m:t>
+                    </m:r>
+                    <m:r>
+                      <a:rPr lang="en-US" altLang="zh-CN" sz="2000" i="1">
+                        <a:latin typeface="Cambria Math" panose="02040503050406030204" charset="0"/>
+                        <a:ea typeface="MS Mincho" charset="0"/>
+                        <a:cs typeface="Cambria Math" panose="02040503050406030204" charset="0"/>
+                      </a:rPr>
+                      <m:t>0</m:t>
+                    </m:r>
+                    <m:r>
+                      <a:rPr lang="en-US" altLang="zh-CN" sz="2000" i="1">
+                        <a:latin typeface="Cambria Math" panose="02040503050406030204" charset="0"/>
+                        <a:ea typeface="MS Mincho" charset="0"/>
+                        <a:cs typeface="Cambria Math" panose="02040503050406030204" charset="0"/>
+                      </a:rPr>
+                      <m:t>.</m:t>
+                    </m:r>
+                    <m:r>
+                      <a:rPr lang="en-US" altLang="zh-CN" sz="2000" i="1">
+                        <a:latin typeface="Cambria Math" panose="02040503050406030204" charset="0"/>
+                        <a:ea typeface="MS Mincho" charset="0"/>
+                        <a:cs typeface="Cambria Math" panose="02040503050406030204" charset="0"/>
+                      </a:rPr>
+                      <m:t>6</m:t>
+                    </m:r>
+                  </m:oMath>
+                </a14:m>
+                <a:endParaRPr lang="en-US" altLang="zh-CN" sz="2000" i="1">
+                  <a:latin typeface="Cambria Math" panose="02040503050406030204" charset="0"/>
+                  <a:cs typeface="Cambria Math" panose="02040503050406030204" charset="0"/>
+                </a:endParaRPr>
+              </a:p>
+            </p:txBody>
+          </p:sp>
+        </mc:Choice>
+        <mc:Fallback>
+          <p:sp>
+            <p:nvSpPr>
+              <p:cNvPr id="6" name="文本框 5"/>
+              <p:cNvSpPr txBox="1">
+                <a:spLocks noRot="1" noChangeAspect="1" noMove="1" noResize="1" noEditPoints="1" noAdjustHandles="1" noChangeArrowheads="1" noChangeShapeType="1" noTextEdit="1"/>
+              </p:cNvSpPr>
+              <p:nvPr/>
+            </p:nvSpPr>
+            <p:spPr>
+              <a:xfrm>
+                <a:off x="2608516" y="4371594"/>
+                <a:ext cx="1532890" cy="415290"/>
+              </a:xfrm>
+              <a:prstGeom prst="rect">
+                <a:avLst/>
+              </a:prstGeom>
+              <a:blipFill rotWithShape="1">
+                <a:blip r:embed="rId2"/>
+                <a:stretch>
+                  <a:fillRect l="-37" t="-61" r="37" b="61"/>
+                </a:stretch>
+              </a:blipFill>
+            </p:spPr>
+            <p:txBody>
+              <a:bodyPr/>
+              <a:lstStyle/>
+              <a:p>
+                <a:r>
+                  <a:rPr lang="zh-CN" altLang="en-US">
+                    <a:noFill/>
+                  </a:rPr>
+                  <a:t> </a:t>
+                </a:r>
+              </a:p>
+            </p:txBody>
+          </p:sp>
+        </mc:Fallback>
+      </mc:AlternateContent>
+      <mc:AlternateContent xmlns:mc="http://schemas.openxmlformats.org/markup-compatibility/2006">
+        <mc:Choice xmlns:a14="http://schemas.microsoft.com/office/drawing/2010/main" Requires="a14">
+          <p:sp>
+            <p:nvSpPr>
+              <p:cNvPr id="7" name="文本框 6"/>
+              <p:cNvSpPr txBox="1"/>
+              <p:nvPr/>
+            </p:nvSpPr>
+            <p:spPr>
+              <a:xfrm>
+                <a:off x="5397436" y="4371594"/>
+                <a:ext cx="1532890" cy="415290"/>
+              </a:xfrm>
+              <a:prstGeom prst="rect">
+                <a:avLst/>
+              </a:prstGeom>
+              <a:noFill/>
+            </p:spPr>
+            <p:txBody>
+              <a:bodyPr wrap="none" rtlCol="0" anchor="t">
+                <a:spAutoFit/>
+              </a:bodyPr>
+              <a:p>
+                <a:pPr algn="l"/>
+                <a:r>
+                  <a:rPr lang="en-US" altLang="zh-CN" sz="2000">
+                    <a:latin typeface="Cambria Math" panose="02040503050406030204" charset="0"/>
+                    <a:ea typeface="MS Mincho" charset="0"/>
+                    <a:cs typeface="Cambria Math" panose="02040503050406030204" charset="0"/>
+                  </a:rPr>
+                  <a:t>GC</a:t>
+                </a:r>
+                <a14:m>
+                  <m:oMath xmlns:m="http://schemas.openxmlformats.org/officeDocument/2006/math">
+                    <m:r>
+                      <a:rPr lang="en-US" altLang="zh-CN" sz="2000" i="1">
+                        <a:latin typeface="Cambria Math" panose="02040503050406030204" charset="0"/>
+                        <a:ea typeface="MS Mincho" charset="0"/>
+                        <a:cs typeface="Cambria Math" panose="02040503050406030204" charset="0"/>
+                      </a:rPr>
+                      <m:t>：</m:t>
+                    </m:r>
+                    <m:r>
+                      <a:rPr lang="en-US" altLang="zh-CN" sz="2000" i="1">
+                        <a:latin typeface="Cambria Math" panose="02040503050406030204" charset="0"/>
+                        <a:ea typeface="MS Mincho" charset="0"/>
+                        <a:cs typeface="Cambria Math" panose="02040503050406030204" charset="0"/>
+                      </a:rPr>
+                      <m:t>𝛾</m:t>
+                    </m:r>
+                    <m:r>
+                      <a:rPr lang="en-US" altLang="zh-CN" sz="2000" i="1">
+                        <a:latin typeface="Cambria Math" panose="02040503050406030204" charset="0"/>
+                        <a:ea typeface="MS Mincho" charset="0"/>
+                        <a:cs typeface="Cambria Math" panose="02040503050406030204" charset="0"/>
+                      </a:rPr>
+                      <m:t>=</m:t>
+                    </m:r>
+                    <m:r>
+                      <a:rPr lang="en-US" altLang="zh-CN" sz="2000" i="1">
+                        <a:latin typeface="Cambria Math" panose="02040503050406030204" charset="0"/>
+                        <a:ea typeface="MS Mincho" charset="0"/>
+                        <a:cs typeface="Cambria Math" panose="02040503050406030204" charset="0"/>
+                      </a:rPr>
+                      <m:t>0</m:t>
+                    </m:r>
+                    <m:r>
+                      <a:rPr lang="en-US" altLang="zh-CN" sz="2000" i="1">
+                        <a:latin typeface="Cambria Math" panose="02040503050406030204" charset="0"/>
+                        <a:ea typeface="MS Mincho" charset="0"/>
+                        <a:cs typeface="Cambria Math" panose="02040503050406030204" charset="0"/>
+                      </a:rPr>
+                      <m:t>.</m:t>
+                    </m:r>
+                    <m:r>
+                      <a:rPr lang="en-US" altLang="zh-CN" sz="2000" i="1">
+                        <a:latin typeface="Cambria Math" panose="02040503050406030204" charset="0"/>
+                        <a:ea typeface="MS Mincho" charset="0"/>
+                        <a:cs typeface="Cambria Math" panose="02040503050406030204" charset="0"/>
+                      </a:rPr>
+                      <m:t>9</m:t>
+                    </m:r>
+                  </m:oMath>
+                </a14:m>
+                <a:endParaRPr lang="en-US" altLang="zh-CN" sz="2000" i="1">
+                  <a:latin typeface="Cambria Math" panose="02040503050406030204" charset="0"/>
+                  <a:cs typeface="Cambria Math" panose="02040503050406030204" charset="0"/>
+                </a:endParaRPr>
+              </a:p>
+            </p:txBody>
+          </p:sp>
+        </mc:Choice>
+        <mc:Fallback>
+          <p:sp>
+            <p:nvSpPr>
+              <p:cNvPr id="7" name="文本框 6"/>
+              <p:cNvSpPr txBox="1">
+                <a:spLocks noRot="1" noChangeAspect="1" noMove="1" noResize="1" noEditPoints="1" noAdjustHandles="1" noChangeArrowheads="1" noChangeShapeType="1" noTextEdit="1"/>
+              </p:cNvSpPr>
+              <p:nvPr/>
+            </p:nvSpPr>
+            <p:spPr>
+              <a:xfrm>
+                <a:off x="5397436" y="4371594"/>
+                <a:ext cx="1532890" cy="415290"/>
+              </a:xfrm>
+              <a:prstGeom prst="rect">
+                <a:avLst/>
+              </a:prstGeom>
+              <a:blipFill rotWithShape="1">
+                <a:blip r:embed="rId3"/>
+                <a:stretch>
+                  <a:fillRect l="-37" t="-61" r="37" b="61"/>
+                </a:stretch>
+              </a:blipFill>
+            </p:spPr>
+            <p:txBody>
+              <a:bodyPr/>
+              <a:lstStyle/>
+              <a:p>
+                <a:r>
+                  <a:rPr lang="zh-CN" altLang="en-US">
+                    <a:noFill/>
+                  </a:rPr>
+                  <a:t> </a:t>
+                </a:r>
+              </a:p>
+            </p:txBody>
+          </p:sp>
+        </mc:Fallback>
+      </mc:AlternateContent>
+      <p:sp>
+        <p:nvSpPr>
+          <p:cNvPr id="8" name="文本框 7"/>
+          <p:cNvSpPr txBox="1"/>
+          <p:nvPr/>
+        </p:nvSpPr>
+        <p:spPr>
+          <a:xfrm>
+            <a:off x="7776845" y="4371340"/>
+            <a:ext cx="2908300" cy="398780"/>
+          </a:xfrm>
+          <a:prstGeom prst="rect">
+            <a:avLst/>
+          </a:prstGeom>
+          <a:noFill/>
+        </p:spPr>
+        <p:txBody>
+          <a:bodyPr wrap="square" rtlCol="0">
+            <a:spAutoFit/>
+          </a:bodyPr>
+          <a:p>
+            <a:r>
+              <a:rPr lang="zh-CN" altLang="en-US" sz="2000"/>
+              <a:t>只使用模型自由的算法</a:t>
+            </a:r>
+            <a:endParaRPr lang="zh-CN" altLang="en-US" sz="2000"/>
+          </a:p>
+        </p:txBody>
+      </p:sp>
+      <mc:AlternateContent xmlns:mc="http://schemas.openxmlformats.org/markup-compatibility/2006">
+        <mc:Choice xmlns:a14="http://schemas.microsoft.com/office/drawing/2010/main" Requires="a14">
+          <p:sp>
+            <p:nvSpPr>
+              <p:cNvPr id="11" name="文本框 10"/>
+              <p:cNvSpPr txBox="1"/>
+              <p:nvPr/>
+            </p:nvSpPr>
+            <p:spPr>
+              <a:xfrm>
+                <a:off x="2751391" y="5084064"/>
+                <a:ext cx="1247775" cy="398780"/>
+              </a:xfrm>
+              <a:prstGeom prst="rect">
+                <a:avLst/>
+              </a:prstGeom>
+              <a:noFill/>
+            </p:spPr>
+            <p:txBody>
+              <a:bodyPr wrap="none" rtlCol="0" anchor="t">
+                <a:spAutoFit/>
+              </a:bodyPr>
+              <a:p>
+                <a:pPr algn="l"/>
+                <a14:m>
+                  <m:oMathPara xmlns:m="http://schemas.openxmlformats.org/officeDocument/2006/math">
+                    <m:oMathParaPr>
+                      <m:jc m:val="centerGroup"/>
+                    </m:oMathParaPr>
+                    <m:oMath xmlns:m="http://schemas.openxmlformats.org/officeDocument/2006/math">
+                      <m:r>
+                        <a:rPr lang="en-US" altLang="zh-CN" sz="2000" i="1">
+                          <a:latin typeface="Cambria Math" panose="02040503050406030204" charset="0"/>
+                          <a:ea typeface="MS Mincho" charset="0"/>
+                          <a:cs typeface="Cambria Math" panose="02040503050406030204" charset="0"/>
+                        </a:rPr>
+                        <m:t>𝛾</m:t>
+                      </m:r>
+                      <m:r>
+                        <a:rPr lang="en-US" altLang="zh-CN" sz="2000" i="1">
+                          <a:latin typeface="Cambria Math" panose="02040503050406030204" charset="0"/>
+                          <a:ea typeface="MS Mincho" charset="0"/>
+                          <a:cs typeface="Cambria Math" panose="02040503050406030204" charset="0"/>
+                        </a:rPr>
+                        <m:t>,</m:t>
+                      </m:r>
+                      <m:sSub>
+                        <m:sSubPr>
+                          <m:ctrlPr>
+                            <a:rPr lang="en-US" altLang="zh-CN" sz="2000" i="1">
+                              <a:latin typeface="Cambria Math" panose="02040503050406030204" charset="0"/>
+                              <a:cs typeface="Cambria Math" panose="02040503050406030204" charset="0"/>
+                            </a:rPr>
+                          </m:ctrlPr>
+                        </m:sSubPr>
+                        <m:e>
+                          <m:r>
+                            <a:rPr lang="en-US" altLang="zh-CN" sz="2000" i="1">
+                              <a:latin typeface="Cambria Math" panose="02040503050406030204" charset="0"/>
+                              <a:cs typeface="Cambria Math" panose="02040503050406030204" charset="0"/>
+                            </a:rPr>
+                            <m:t>𝐿</m:t>
+                          </m:r>
+                        </m:e>
+                        <m:sub>
+                          <m:r>
+                            <a:rPr lang="en-US" altLang="zh-CN" sz="2000" i="1">
+                              <a:latin typeface="Cambria Math" panose="02040503050406030204" charset="0"/>
+                              <a:cs typeface="Cambria Math" panose="02040503050406030204" charset="0"/>
+                            </a:rPr>
+                            <m:t>𝑟</m:t>
+                          </m:r>
+                        </m:sub>
+                      </m:sSub>
+                      <m:r>
+                        <a:rPr lang="en-US" altLang="zh-CN" sz="2000" i="1">
+                          <a:latin typeface="Cambria Math" panose="02040503050406030204" charset="0"/>
+                          <a:ea typeface="MS Mincho" charset="0"/>
+                          <a:cs typeface="Cambria Math" panose="02040503050406030204" charset="0"/>
+                        </a:rPr>
+                        <m:t>,</m:t>
+                      </m:r>
+                      <m:sSub>
+                        <m:sSubPr>
+                          <m:ctrlPr>
+                            <a:rPr lang="en-US" altLang="zh-CN" sz="2000" i="1">
+                              <a:latin typeface="Cambria Math" panose="02040503050406030204" charset="0"/>
+                              <a:cs typeface="Cambria Math" panose="02040503050406030204" charset="0"/>
+                            </a:rPr>
+                          </m:ctrlPr>
+                        </m:sSubPr>
+                        <m:e>
+                          <m:r>
+                            <a:rPr lang="en-US" altLang="zh-CN" sz="2000" i="1">
+                              <a:latin typeface="Cambria Math" panose="02040503050406030204" charset="0"/>
+                              <a:ea typeface="MS Mincho" charset="0"/>
+                              <a:cs typeface="Cambria Math" panose="02040503050406030204" charset="0"/>
+                            </a:rPr>
+                            <m:t>𝜂</m:t>
+                          </m:r>
+                        </m:e>
+                        <m:sub>
+                          <m:r>
+                            <a:rPr lang="en-US" altLang="zh-CN" sz="2000" i="1">
+                              <a:latin typeface="Cambria Math" panose="02040503050406030204" charset="0"/>
+                              <a:cs typeface="Cambria Math" panose="02040503050406030204" charset="0"/>
+                            </a:rPr>
+                            <m:t>𝑚𝑖𝑛</m:t>
+                          </m:r>
+                        </m:sub>
+                      </m:sSub>
+                    </m:oMath>
+                  </m:oMathPara>
+                </a14:m>
+                <a:endParaRPr lang="en-US" altLang="zh-CN" sz="2000" i="1">
+                  <a:latin typeface="Cambria Math" panose="02040503050406030204" charset="0"/>
+                  <a:cs typeface="Cambria Math" panose="02040503050406030204" charset="0"/>
+                </a:endParaRPr>
+              </a:p>
+            </p:txBody>
+          </p:sp>
+        </mc:Choice>
+        <mc:Fallback>
+          <p:sp>
+            <p:nvSpPr>
+              <p:cNvPr id="11" name="文本框 10"/>
+              <p:cNvSpPr txBox="1">
+                <a:spLocks noRot="1" noChangeAspect="1" noMove="1" noResize="1" noEditPoints="1" noAdjustHandles="1" noChangeArrowheads="1" noChangeShapeType="1" noTextEdit="1"/>
+              </p:cNvSpPr>
+              <p:nvPr/>
+            </p:nvSpPr>
+            <p:spPr>
+              <a:xfrm>
+                <a:off x="2751391" y="5084064"/>
+                <a:ext cx="1247775" cy="398780"/>
+              </a:xfrm>
+              <a:prstGeom prst="rect">
+                <a:avLst/>
+              </a:prstGeom>
+              <a:blipFill rotWithShape="1">
+                <a:blip r:embed="rId4"/>
+                <a:stretch>
+                  <a:fillRect l="-46" t="-64" r="46" b="64"/>
+                </a:stretch>
+              </a:blipFill>
+            </p:spPr>
+            <p:txBody>
+              <a:bodyPr/>
+              <a:lstStyle/>
+              <a:p>
+                <a:r>
+                  <a:rPr lang="zh-CN" altLang="en-US">
+                    <a:noFill/>
+                  </a:rPr>
+                  <a:t> </a:t>
+                </a:r>
+              </a:p>
+            </p:txBody>
+          </p:sp>
+        </mc:Fallback>
+      </mc:AlternateContent>
+      <p:sp>
+        <p:nvSpPr>
+          <p:cNvPr id="12" name="文本框 11"/>
+          <p:cNvSpPr txBox="1"/>
+          <p:nvPr/>
+        </p:nvSpPr>
+        <p:spPr>
+          <a:xfrm>
+            <a:off x="940435" y="5083810"/>
+            <a:ext cx="1974850" cy="398780"/>
+          </a:xfrm>
+          <a:prstGeom prst="rect">
+            <a:avLst/>
+          </a:prstGeom>
+          <a:noFill/>
+        </p:spPr>
+        <p:txBody>
+          <a:bodyPr wrap="square" rtlCol="0">
+            <a:spAutoFit/>
+          </a:bodyPr>
+          <a:p>
+            <a:r>
+              <a:rPr lang="zh-CN" altLang="en-US" sz="2000"/>
+              <a:t>在实验中发现：</a:t>
+            </a:r>
+            <a:endParaRPr lang="zh-CN" altLang="en-US" sz="2000"/>
+          </a:p>
+        </p:txBody>
+      </p:sp>
+      <p:sp>
+        <p:nvSpPr>
+          <p:cNvPr id="13" name="文本框 12"/>
+          <p:cNvSpPr txBox="1"/>
+          <p:nvPr/>
+        </p:nvSpPr>
+        <p:spPr>
+          <a:xfrm>
+            <a:off x="3895725" y="5083810"/>
+            <a:ext cx="2952750" cy="398780"/>
+          </a:xfrm>
+          <a:prstGeom prst="rect">
+            <a:avLst/>
+          </a:prstGeom>
+          <a:noFill/>
+        </p:spPr>
+        <p:txBody>
+          <a:bodyPr wrap="square" rtlCol="0">
+            <a:spAutoFit/>
+          </a:bodyPr>
+          <a:p>
+            <a:r>
+              <a:rPr lang="zh-CN" altLang="en-US" sz="2000"/>
+              <a:t>都会影响函数评估次数。</a:t>
+            </a:r>
+            <a:endParaRPr lang="zh-CN" altLang="en-US" sz="2000"/>
+          </a:p>
+        </p:txBody>
+      </p:sp>
+    </p:spTree>
+    <p:custDataLst>
+      <p:tags r:id="rId5"/>
     </p:custDataLst>
   </p:cSld>
   <p:clrMapOvr>
@@ -4047,14 +12982,9 @@
 
 <file path=ppt/tags/tag66.xml><?xml version="1.0" encoding="utf-8"?>
 <p:tagLst xmlns:p="http://schemas.openxmlformats.org/presentationml/2006/main">
-  <p:tag name="KSO_WM_UNIT_HIGHLIGHT" val="0"/>
-  <p:tag name="KSO_WM_UNIT_COMPATIBLE" val="0"/>
-  <p:tag name="KSO_WM_UNIT_DIAGRAM_ISNUMVISUAL" val="0"/>
-  <p:tag name="KSO_WM_UNIT_DIAGRAM_ISREFERUNIT" val="0"/>
-  <p:tag name="KSO_WM_UNIT_ID" val="_2**"/>
-  <p:tag name="KSO_WM_UNIT_LAYERLEVEL" val="1"/>
-  <p:tag name="KSO_WM_TAG_VERSION" val="1.0"/>
   <p:tag name="KSO_WM_BEAUTIFY_FLAG" val="#wm#"/>
+  <p:tag name="KSO_WM_TEMPLATE_CATEGORY" val="custom"/>
+  <p:tag name="KSO_WM_TEMPLATE_INDEX" val="20205081"/>
 </p:tagLst>
 </file>
 
@@ -4079,6 +13009,15 @@
 </p:tagLst>
 </file>
 
+<file path=ppt/tags/tag69.xml><?xml version="1.0" encoding="utf-8"?>
+<p:tagLst xmlns:p="http://schemas.openxmlformats.org/presentationml/2006/main">
+  <p:tag name="KSO_WM_BEAUTIFY_FLAG" val="#wm#"/>
+  <p:tag name="KSO_WM_TEMPLATE_CATEGORY" val="custom"/>
+  <p:tag name="KSO_WM_TEMPLATE_INDEX" val="20205081"/>
+  <p:tag name="KSO_WM_AICARD_INVALID" val="Invalid"/>
+</p:tagLst>
+</file>
+
 <file path=ppt/tags/tag7.xml><?xml version="1.0" encoding="utf-8"?>
 <p:tagLst xmlns:p="http://schemas.openxmlformats.org/presentationml/2006/main">
   <p:tag name="KSO_WM_UNIT_HIGHLIGHT" val="0"/>
@@ -4092,6 +13031,86 @@
 </p:tagLst>
 </file>
 
+<file path=ppt/tags/tag70.xml><?xml version="1.0" encoding="utf-8"?>
+<p:tagLst xmlns:p="http://schemas.openxmlformats.org/presentationml/2006/main">
+  <p:tag name="KSO_WM_BEAUTIFY_FLAG" val="#wm#"/>
+  <p:tag name="KSO_WM_TEMPLATE_CATEGORY" val="custom"/>
+  <p:tag name="KSO_WM_TEMPLATE_INDEX" val="20205081"/>
+</p:tagLst>
+</file>
+
+<file path=ppt/tags/tag71.xml><?xml version="1.0" encoding="utf-8"?>
+<p:tagLst xmlns:p="http://schemas.openxmlformats.org/presentationml/2006/main">
+  <p:tag name="KSO_WM_BEAUTIFY_FLAG" val="#wm#"/>
+  <p:tag name="KSO_WM_TEMPLATE_CATEGORY" val="custom"/>
+  <p:tag name="KSO_WM_TEMPLATE_INDEX" val="20205081"/>
+</p:tagLst>
+</file>
+
+<file path=ppt/tags/tag72.xml><?xml version="1.0" encoding="utf-8"?>
+<p:tagLst xmlns:p="http://schemas.openxmlformats.org/presentationml/2006/main">
+  <p:tag name="KSO_WM_BEAUTIFY_FLAG" val="#wm#"/>
+  <p:tag name="KSO_WM_TEMPLATE_CATEGORY" val="custom"/>
+  <p:tag name="KSO_WM_TEMPLATE_INDEX" val="20205081"/>
+</p:tagLst>
+</file>
+
+<file path=ppt/tags/tag73.xml><?xml version="1.0" encoding="utf-8"?>
+<p:tagLst xmlns:p="http://schemas.openxmlformats.org/presentationml/2006/main">
+  <p:tag name="KSO_WM_BEAUTIFY_FLAG" val="#wm#"/>
+  <p:tag name="KSO_WM_TEMPLATE_CATEGORY" val="custom"/>
+  <p:tag name="KSO_WM_TEMPLATE_INDEX" val="20205081"/>
+</p:tagLst>
+</file>
+
+<file path=ppt/tags/tag74.xml><?xml version="1.0" encoding="utf-8"?>
+<p:tagLst xmlns:p="http://schemas.openxmlformats.org/presentationml/2006/main">
+  <p:tag name="KSO_WM_BEAUTIFY_FLAG" val="#wm#"/>
+  <p:tag name="KSO_WM_TEMPLATE_CATEGORY" val="custom"/>
+  <p:tag name="KSO_WM_TEMPLATE_INDEX" val="20205081"/>
+</p:tagLst>
+</file>
+
+<file path=ppt/tags/tag75.xml><?xml version="1.0" encoding="utf-8"?>
+<p:tagLst xmlns:p="http://schemas.openxmlformats.org/presentationml/2006/main">
+  <p:tag name="KSO_WM_BEAUTIFY_FLAG" val="#wm#"/>
+  <p:tag name="KSO_WM_TEMPLATE_CATEGORY" val="custom"/>
+  <p:tag name="KSO_WM_TEMPLATE_INDEX" val="20205081"/>
+</p:tagLst>
+</file>
+
+<file path=ppt/tags/tag76.xml><?xml version="1.0" encoding="utf-8"?>
+<p:tagLst xmlns:p="http://schemas.openxmlformats.org/presentationml/2006/main">
+  <p:tag name="KSO_WM_BEAUTIFY_FLAG" val="#wm#"/>
+  <p:tag name="KSO_WM_TEMPLATE_CATEGORY" val="custom"/>
+  <p:tag name="KSO_WM_TEMPLATE_INDEX" val="20205081"/>
+</p:tagLst>
+</file>
+
+<file path=ppt/tags/tag77.xml><?xml version="1.0" encoding="utf-8"?>
+<p:tagLst xmlns:p="http://schemas.openxmlformats.org/presentationml/2006/main">
+  <p:tag name="KSO_WM_BEAUTIFY_FLAG" val="#wm#"/>
+  <p:tag name="KSO_WM_TEMPLATE_CATEGORY" val="custom"/>
+  <p:tag name="KSO_WM_TEMPLATE_INDEX" val="20205081"/>
+</p:tagLst>
+</file>
+
+<file path=ppt/tags/tag78.xml><?xml version="1.0" encoding="utf-8"?>
+<p:tagLst xmlns:p="http://schemas.openxmlformats.org/presentationml/2006/main">
+  <p:tag name="KSO_WM_BEAUTIFY_FLAG" val="#wm#"/>
+  <p:tag name="KSO_WM_TEMPLATE_CATEGORY" val="custom"/>
+  <p:tag name="KSO_WM_TEMPLATE_INDEX" val="20205081"/>
+</p:tagLst>
+</file>
+
+<file path=ppt/tags/tag79.xml><?xml version="1.0" encoding="utf-8"?>
+<p:tagLst xmlns:p="http://schemas.openxmlformats.org/presentationml/2006/main">
+  <p:tag name="KSO_WM_BEAUTIFY_FLAG" val="#wm#"/>
+  <p:tag name="KSO_WM_TEMPLATE_CATEGORY" val="custom"/>
+  <p:tag name="KSO_WM_TEMPLATE_INDEX" val="20205081"/>
+</p:tagLst>
+</file>
+
 <file path=ppt/tags/tag8.xml><?xml version="1.0" encoding="utf-8"?>
 <p:tagLst xmlns:p="http://schemas.openxmlformats.org/presentationml/2006/main">
   <p:tag name="KSO_WM_UNIT_HIGHLIGHT" val="0"/>
@@ -4102,6 +13121,38 @@
   <p:tag name="KSO_WM_UNIT_LAYERLEVEL" val="1"/>
   <p:tag name="KSO_WM_TAG_VERSION" val="1.0"/>
   <p:tag name="KSO_WM_BEAUTIFY_FLAG" val="#wm#"/>
+</p:tagLst>
+</file>
+
+<file path=ppt/tags/tag80.xml><?xml version="1.0" encoding="utf-8"?>
+<p:tagLst xmlns:p="http://schemas.openxmlformats.org/presentationml/2006/main">
+  <p:tag name="KSO_WM_BEAUTIFY_FLAG" val="#wm#"/>
+  <p:tag name="KSO_WM_TEMPLATE_CATEGORY" val="custom"/>
+  <p:tag name="KSO_WM_TEMPLATE_INDEX" val="20205081"/>
+</p:tagLst>
+</file>
+
+<file path=ppt/tags/tag81.xml><?xml version="1.0" encoding="utf-8"?>
+<p:tagLst xmlns:p="http://schemas.openxmlformats.org/presentationml/2006/main">
+  <p:tag name="KSO_WM_BEAUTIFY_FLAG" val="#wm#"/>
+  <p:tag name="KSO_WM_TEMPLATE_CATEGORY" val="custom"/>
+  <p:tag name="KSO_WM_TEMPLATE_INDEX" val="20205081"/>
+</p:tagLst>
+</file>
+
+<file path=ppt/tags/tag82.xml><?xml version="1.0" encoding="utf-8"?>
+<p:tagLst xmlns:p="http://schemas.openxmlformats.org/presentationml/2006/main">
+  <p:tag name="KSO_WM_BEAUTIFY_FLAG" val="#wm#"/>
+  <p:tag name="KSO_WM_TEMPLATE_CATEGORY" val="custom"/>
+  <p:tag name="KSO_WM_TEMPLATE_INDEX" val="20205081"/>
+</p:tagLst>
+</file>
+
+<file path=ppt/tags/tag83.xml><?xml version="1.0" encoding="utf-8"?>
+<p:tagLst xmlns:p="http://schemas.openxmlformats.org/presentationml/2006/main">
+  <p:tag name="KSO_WM_BEAUTIFY_FLAG" val="#wm#"/>
+  <p:tag name="KSO_WM_TEMPLATE_CATEGORY" val="custom"/>
+  <p:tag name="KSO_WM_TEMPLATE_INDEX" val="20205081"/>
 </p:tagLst>
 </file>
 

--- a/李岩松/论文汇报.pptx
+++ b/李岩松/论文汇报.pptx
@@ -3512,14 +3512,14 @@
                   <a:gsLst>
                     <a:gs pos="0">
                       <a:schemeClr val="accent1">
-                        <a:lumOff val="-19997"/>
+                        <a:lumOff val="-19996"/>
                         <a:satOff val="20000"/>
                       </a:schemeClr>
                     </a:gs>
                     <a:gs pos="100000">
                       <a:schemeClr val="accent1">
                         <a:lumOff val="15000"/>
-                        <a:satOff val="-14997"/>
+                        <a:satOff val="-14996"/>
                       </a:schemeClr>
                     </a:gs>
                   </a:gsLst>
@@ -3535,14 +3535,14 @@
                 <a:gsLst>
                   <a:gs pos="0">
                     <a:schemeClr val="accent1">
-                      <a:lumOff val="-19997"/>
+                      <a:lumOff val="-19996"/>
                       <a:satOff val="20000"/>
                     </a:schemeClr>
                   </a:gs>
                   <a:gs pos="100000">
                     <a:schemeClr val="accent1">
                       <a:lumOff val="15000"/>
-                      <a:satOff val="-14997"/>
+                      <a:satOff val="-14996"/>
                     </a:schemeClr>
                   </a:gs>
                 </a:gsLst>
@@ -5223,7 +5223,7 @@
             <a:pPr indent="457200"/>
             <a:r>
               <a:rPr lang="zh-CN" altLang="en-US" sz="2000"/>
-              <a:t>少量真实梯度更新校准大量模型梯度更新，从而降低达到相同精度所需的函数评估次数。</a:t>
+              <a:t>少量真实梯度校准大量模型梯度，从而降低达到相同精度所需的函数评估次数。</a:t>
             </a:r>
             <a:endParaRPr lang="en-US" altLang="zh-CN" sz="2000"/>
           </a:p>
@@ -5344,14 +5344,14 @@
                   <a:gsLst>
                     <a:gs pos="0">
                       <a:schemeClr val="accent1">
-                        <a:lumOff val="-19998"/>
+                        <a:lumOff val="-19997"/>
                         <a:satOff val="20000"/>
                       </a:schemeClr>
                     </a:gs>
                     <a:gs pos="100000">
                       <a:schemeClr val="accent1">
                         <a:lumOff val="15000"/>
-                        <a:satOff val="-14998"/>
+                        <a:satOff val="-14997"/>
                       </a:schemeClr>
                     </a:gs>
                   </a:gsLst>
@@ -5367,14 +5367,14 @@
                 <a:gsLst>
                   <a:gs pos="0">
                     <a:schemeClr val="accent1">
-                      <a:lumOff val="-19998"/>
+                      <a:lumOff val="-19997"/>
                       <a:satOff val="20000"/>
                     </a:schemeClr>
                   </a:gs>
                   <a:gs pos="100000">
                     <a:schemeClr val="accent1">
                       <a:lumOff val="15000"/>
-                      <a:satOff val="-14998"/>
+                      <a:satOff val="-14997"/>
                     </a:schemeClr>
                   </a:gs>
                 </a:gsLst>
